--- a/content/W02/D1/slides/C2_W02_D01_half2_STUDENT.pptx
+++ b/content/W02/D1/slides/C2_W02_D01_half2_STUDENT.pptx
@@ -3497,14 +3497,14 @@
       </p:sp>
       <p:pic>
         <p:nvPicPr>
-          <p:cNvPr id="6" name="Picture 5" descr="70dc1a307b6b51e6.png"/>
+          <p:cNvPr id="6" name="Picture 5" descr="f5b9a2f46b8b79a1.png"/>
           <p:cNvPicPr>
             <a:picLocks noChangeAspect="1"/>
           </p:cNvPicPr>
           <p:nvPr/>
         </p:nvPicPr>
         <p:blipFill>
-          <a:blip r:embed="rId2"/>
+          <a:blip r:embed="rId3"/>
           <a:stretch>
             <a:fillRect/>
           </a:stretch>
@@ -5299,14 +5299,14 @@
       </p:sp>
       <p:pic>
         <p:nvPicPr>
-          <p:cNvPr id="6" name="Picture 5" descr="0e94efbadf37f4e7.png"/>
+          <p:cNvPr id="6" name="Picture 5" descr="4741ebdd3be99669.png"/>
           <p:cNvPicPr>
             <a:picLocks noChangeAspect="1"/>
           </p:cNvPicPr>
           <p:nvPr/>
         </p:nvPicPr>
         <p:blipFill>
-          <a:blip r:embed="rId2"/>
+          <a:blip r:embed="rId3"/>
           <a:stretch>
             <a:fillRect/>
           </a:stretch>
@@ -6215,14 +6215,14 @@
       </p:sp>
       <p:pic>
         <p:nvPicPr>
-          <p:cNvPr id="6" name="Picture 5" descr="821b6949f8a71efd.png"/>
+          <p:cNvPr id="6" name="Picture 5" descr="90f6c0eabedc67fe.png"/>
           <p:cNvPicPr>
             <a:picLocks noChangeAspect="1"/>
           </p:cNvPicPr>
           <p:nvPr/>
         </p:nvPicPr>
         <p:blipFill>
-          <a:blip r:embed="rId2"/>
+          <a:blip r:embed="rId3"/>
           <a:stretch>
             <a:fillRect/>
           </a:stretch>
@@ -8328,14 +8328,14 @@
       </p:sp>
       <p:pic>
         <p:nvPicPr>
-          <p:cNvPr id="6" name="Picture 5" descr="4fd65461496b2482.png"/>
+          <p:cNvPr id="6" name="Picture 5" descr="1dda5bfc07bdd93d.png"/>
           <p:cNvPicPr>
             <a:picLocks noChangeAspect="1"/>
           </p:cNvPicPr>
           <p:nvPr/>
         </p:nvPicPr>
         <p:blipFill>
-          <a:blip r:embed="rId2"/>
+          <a:blip r:embed="rId3"/>
           <a:stretch>
             <a:fillRect/>
           </a:stretch>
@@ -10668,14 +10668,14 @@
       </p:sp>
       <p:pic>
         <p:nvPicPr>
-          <p:cNvPr id="6" name="Picture 5" descr="33512d847baf69c5.png"/>
+          <p:cNvPr id="6" name="Picture 5" descr="2ca2a87392c9911e.png"/>
           <p:cNvPicPr>
             <a:picLocks noChangeAspect="1"/>
           </p:cNvPicPr>
           <p:nvPr/>
         </p:nvPicPr>
         <p:blipFill>
-          <a:blip r:embed="rId2"/>
+          <a:blip r:embed="rId3"/>
           <a:stretch>
             <a:fillRect/>
           </a:stretch>

--- a/content/W02/D1/slides/C2_W02_D01_half2_STUDENT.pptx
+++ b/content/W02/D1/slides/C2_W02_D01_half2_STUDENT.pptx
@@ -14810,7 +14810,7 @@
                 </a:solidFill>
                 <a:latin typeface="Calibri"/>
               </a:rPr>
-              <a:t>sql/C2_W02_D01_02_monday_suite_STUDENT.sql</a:t>
+              <a:t>sql/C2_W02_D01_04_monday_suite_STUDENT.sql</a:t>
             </a:r>
           </a:p>
         </p:txBody>

--- a/content/W02/D1/slides/C2_W02_D01_half2_STUDENT.pptx
+++ b/content/W02/D1/slides/C2_W02_D01_half2_STUDENT.pptx
@@ -674,7 +674,22 @@
           <a:lstStyle/>
           <a:p>
             <a:r>
-              <a:t>LIVE, 2 minutes. Frequency is the branch that fell furthest, which is Week 1's finding at warehouse</a:t>
+              <a:t>LIVE, 2 minutes. Ask two questions and take an answer to each. Where did the rupees fall?</a:t>
+            </a:r>
+          </a:p>
+          <a:p>
+            <a:r>
+              <a:t>Business: it carries 99.1 percent of revenue, so its 1.4 percent dip is Rs 14,29,840 of the</a:t>
+            </a:r>
+          </a:p>
+          <a:p>
+            <a:r>
+              <a:t>Rs 16,00,000 fall. Where did the orders and the frequency fall? Retail-Plus: it lost 75 of the</a:t>
+            </a:r>
+          </a:p>
+          <a:p>
+            <a:r>
+              <a:t>book's 76 fewer orders, and its frequency fell furthest, which is Week 1's lever at warehouse</a:t>
             </a:r>
           </a:p>
           <a:p>
@@ -754,7 +769,12 @@
           </a:p>
           <a:p>
             <a:r>
-              <a:t>percent against query 1.</a:t>
+              <a:t>percent against query 1. Then ask why the evidence has two halves: rupees and orders are different</a:t>
+            </a:r>
+          </a:p>
+          <a:p>
+            <a:r>
+              <a:t>questions, and here they have different answers.</a:t>
             </a:r>
           </a:p>
         </p:txBody>
@@ -6589,7 +6609,7 @@
                 </a:solidFill>
                 <a:latin typeface="Georgia"/>
               </a:rPr>
-              <a:t>What the suite says: Retail-Plus moved</a:t>
+              <a:t>What the suite says: two questions, two answers</a:t>
             </a:r>
           </a:p>
         </p:txBody>
@@ -6624,7 +6644,7 @@
                 </a:solidFill>
                 <a:latin typeface="Calibri"/>
               </a:rPr>
-              <a:t>Query 6, the one row per segment Anand reads first.</a:t>
+              <a:t>Query 6 in percent, and query 3's revenue turned into rupees.</a:t>
             </a:r>
           </a:p>
         </p:txBody>
@@ -6648,11 +6668,12 @@
                 <a:tableStyleId>{2D5ABB26-0587-4C30-8999-92F81FD0307C}</a:tableStyleId>
               </a:tblPr>
               <a:tblGrid>
-                <a:gridCol w="2276408"/>
-                <a:gridCol w="2124456"/>
-                <a:gridCol w="2124456"/>
-                <a:gridCol w="2494426"/>
-                <a:gridCol w="2111243"/>
+                <a:gridCol w="1759827"/>
+                <a:gridCol w="1642357"/>
+                <a:gridCol w="1642357"/>
+                <a:gridCol w="1928371"/>
+                <a:gridCol w="1632142"/>
+                <a:gridCol w="2525935"/>
               </a:tblGrid>
               <a:tr h="335280">
                 <a:tc>
@@ -6756,6 +6777,28 @@
                           <a:latin typeface="Calibri"/>
                         </a:rPr>
                         <a:t>Revenue</a:t>
+                      </a:r>
+                    </a:p>
+                  </a:txBody>
+                  <a:tcPr marL="101600" marR="101600" marT="38100" marB="38100" anchor="ctr">
+                    <a:solidFill>
+                      <a:srgbClr val="1A0F5C"/>
+                    </a:solidFill>
+                  </a:tcPr>
+                </a:tc>
+                <a:tc>
+                  <a:txBody>
+                    <a:bodyPr/>
+                    <a:lstStyle/>
+                    <a:p>
+                      <a:r>
+                        <a:rPr sz="1250" b="1" i="0">
+                          <a:solidFill>
+                            <a:srgbClr val="FFFFFF"/>
+                          </a:solidFill>
+                          <a:latin typeface="Calibri"/>
+                        </a:rPr>
+                        <a:t>Rupees moved</a:t>
                       </a:r>
                     </a:p>
                   </a:txBody>
@@ -6877,6 +6920,28 @@
                     </a:solidFill>
                   </a:tcPr>
                 </a:tc>
+                <a:tc>
+                  <a:txBody>
+                    <a:bodyPr/>
+                    <a:lstStyle/>
+                    <a:p>
+                      <a:r>
+                        <a:rPr sz="1200" b="0" i="0">
+                          <a:solidFill>
+                            <a:srgbClr val="1A1440"/>
+                          </a:solidFill>
+                          <a:latin typeface="Calibri"/>
+                        </a:rPr>
+                        <a:t>Rs 14,29,840 down</a:t>
+                      </a:r>
+                    </a:p>
+                  </a:txBody>
+                  <a:tcPr marL="101600" marR="101600" marT="38100" marB="38100" anchor="ctr">
+                    <a:solidFill>
+                      <a:srgbClr val="FFFFFF"/>
+                    </a:solidFill>
+                  </a:tcPr>
+                </a:tc>
               </a:tr>
               <a:tr h="335280">
                 <a:tc>
@@ -6980,6 +7045,28 @@
                           <a:latin typeface="Calibri"/>
                         </a:rPr>
                         <a:t>1.8% down</a:t>
+                      </a:r>
+                    </a:p>
+                  </a:txBody>
+                  <a:tcPr marL="101600" marR="101600" marT="38100" marB="38100" anchor="ctr">
+                    <a:solidFill>
+                      <a:srgbClr val="F4F2FA"/>
+                    </a:solidFill>
+                  </a:tcPr>
+                </a:tc>
+                <a:tc>
+                  <a:txBody>
+                    <a:bodyPr/>
+                    <a:lstStyle/>
+                    <a:p>
+                      <a:r>
+                        <a:rPr sz="1200" b="0" i="0">
+                          <a:solidFill>
+                            <a:srgbClr val="1A1440"/>
+                          </a:solidFill>
+                          <a:latin typeface="Calibri"/>
+                        </a:rPr>
+                        <a:t>Rs 6,820 down</a:t>
                       </a:r>
                     </a:p>
                   </a:txBody>
@@ -7101,6 +7188,28 @@
                     </a:solidFill>
                   </a:tcPr>
                 </a:tc>
+                <a:tc>
+                  <a:txBody>
+                    <a:bodyPr/>
+                    <a:lstStyle/>
+                    <a:p>
+                      <a:r>
+                        <a:rPr sz="1200" b="0" i="0">
+                          <a:solidFill>
+                            <a:srgbClr val="1A1440"/>
+                          </a:solidFill>
+                          <a:latin typeface="Calibri"/>
+                        </a:rPr>
+                        <a:t>Rs 1,72,390 down</a:t>
+                      </a:r>
+                    </a:p>
+                  </a:txBody>
+                  <a:tcPr marL="101600" marR="101600" marT="38100" marB="38100" anchor="ctr">
+                    <a:solidFill>
+                      <a:srgbClr val="FFFFFF"/>
+                    </a:solidFill>
+                  </a:tcPr>
+                </a:tc>
               </a:tr>
               <a:tr h="335280">
                 <a:tc>
@@ -7213,6 +7322,28 @@
                     </a:solidFill>
                   </a:tcPr>
                 </a:tc>
+                <a:tc>
+                  <a:txBody>
+                    <a:bodyPr/>
+                    <a:lstStyle/>
+                    <a:p>
+                      <a:r>
+                        <a:rPr sz="1200" b="0" i="0">
+                          <a:solidFill>
+                            <a:srgbClr val="1A1440"/>
+                          </a:solidFill>
+                          <a:latin typeface="Calibri"/>
+                        </a:rPr>
+                        <a:t>Rs 9,050 up</a:t>
+                      </a:r>
+                    </a:p>
+                  </a:txBody>
+                  <a:tcPr marL="101600" marR="101600" marT="38100" marB="38100" anchor="ctr">
+                    <a:solidFill>
+                      <a:srgbClr val="F4F2FA"/>
+                    </a:solidFill>
+                  </a:tcPr>
+                </a:tc>
               </a:tr>
             </a:tbl>
           </a:graphicData>
@@ -7887,7 +8018,7 @@
                 </a:solidFill>
                 <a:latin typeface="Calibri"/>
               </a:rPr>
-              <a:t>Booked revenue fell 1.6 percent from Q1 to Q2, the same fall last week's extract showed, so the warehouse agrees with the note Meera accepted.</a:t>
+              <a:t>Booked revenue fell 1.6 percent from Q1 to Q2, Rs 16,00,000, the same rate last week's file showed.</a:t>
             </a:r>
           </a:p>
         </p:txBody>
@@ -7901,7 +8032,7 @@
         <p:spPr>
           <a:xfrm>
             <a:off x="530352" y="3689794"/>
-            <a:ext cx="11130991" cy="807720"/>
+            <a:ext cx="11130991" cy="1074420"/>
           </a:xfrm>
           <a:prstGeom prst="roundRect">
             <a:avLst>
@@ -7949,7 +8080,7 @@
         <p:spPr>
           <a:xfrm>
             <a:off x="676656" y="3817810"/>
-            <a:ext cx="45720" cy="551688"/>
+            <a:ext cx="45720" cy="818388"/>
           </a:xfrm>
           <a:prstGeom prst="roundRect">
             <a:avLst>
@@ -7995,7 +8126,7 @@
         <p:spPr>
           <a:xfrm>
             <a:off x="877824" y="3808666"/>
-            <a:ext cx="10564063" cy="624840"/>
+            <a:ext cx="10564063" cy="891540"/>
           </a:xfrm>
           <a:prstGeom prst="rect">
             <a:avLst/>
@@ -8024,7 +8155,7 @@
                 </a:solidFill>
                 <a:latin typeface="Calibri"/>
               </a:rPr>
-              <a:t>The fall sits in Retail-Plus, down 29.4 percent: its members ordered less often, 2.36 to 1.84 per quarter, and fewer bought at all, 91 to 76; the other segments moved under 2 percent or grew.</a:t>
+              <a:t>The rupees fell in Business, which carries 99.1 percent of revenue and lost Rs 14,29,840 on a 1.4 percent dip. The orders fell in Retail-Plus: it lost 75 of the book's 76 fewer orders, its members ordered less often, 2.36 to 1.84 per quarter, and fewer bought at all, 91 to 76.</a:t>
             </a:r>
           </a:p>
         </p:txBody>
@@ -8037,7 +8168,7 @@
         </p:nvSpPr>
         <p:spPr>
           <a:xfrm>
-            <a:off x="530352" y="4662106"/>
+            <a:off x="530352" y="4928806"/>
             <a:ext cx="11130991" cy="807720"/>
           </a:xfrm>
           <a:prstGeom prst="roundRect">
@@ -8085,7 +8216,7 @@
         </p:nvSpPr>
         <p:spPr>
           <a:xfrm>
-            <a:off x="676656" y="4790122"/>
+            <a:off x="676656" y="5056822"/>
             <a:ext cx="45720" cy="551688"/>
           </a:xfrm>
           <a:prstGeom prst="roundRect">
@@ -8131,7 +8262,7 @@
         </p:nvSpPr>
         <p:spPr>
           <a:xfrm>
-            <a:off x="877824" y="4780978"/>
+            <a:off x="877824" y="5047678"/>
             <a:ext cx="10564063" cy="624840"/>
           </a:xfrm>
           <a:prstGeom prst="rect">
@@ -8161,7 +8292,7 @@
                 </a:solidFill>
                 <a:latin typeface="Calibri"/>
               </a:rPr>
-              <a:t>This is booked revenue; Student's Q1 rate rests on 27 orders. </a:t>
+              <a:t>This is booked revenue; Student's Q1 rate rests on 27 orders; the warehouse counts different customers from last week's file and is the book of record. </a:t>
             </a:r>
             <a:r>
               <a:rPr sz="1500" b="1" i="0">
@@ -8927,7 +9058,7 @@
                 </a:solidFill>
                 <a:latin typeface="Calibri"/>
               </a:rPr>
-              <a:t>Week 2 Day 1: the Monday numbers, from the warehouse</a:t>
+              <a:t>Week 2, Day 1. The Monday suite</a:t>
             </a:r>
           </a:p>
         </p:txBody>
@@ -14429,7 +14560,7 @@
                 </a:solidFill>
                 <a:latin typeface="Calibri"/>
               </a:rPr>
-              <a:t>Week 2 Day 1: the Monday numbers, from the warehouse</a:t>
+              <a:t>Week 2, Day 1. The Monday suite</a:t>
             </a:r>
           </a:p>
         </p:txBody>
@@ -19406,7 +19537,7 @@
                 </a:solidFill>
                 <a:latin typeface="Calibri"/>
               </a:rPr>
-              <a:t>Week 2 Day 1: the Monday numbers, from the warehouse</a:t>
+              <a:t>Week 2, Day 1. The Monday suite</a:t>
             </a:r>
           </a:p>
         </p:txBody>

--- a/content/W02/D1/slides/C2_W02_D01_half2_STUDENT.pptx
+++ b/content/W02/D1/slides/C2_W02_D01_half2_STUDENT.pptx
@@ -5132,7 +5132,7 @@
                 </a:solidFill>
                 <a:latin typeface="Calibri"/>
               </a:rPr>
-              <a:t>Anand Iyer, CFO, Kalpa Retail, on the suite he wants every Monday</a:t>
+              <a:t>Anand Iyer, finance controller, Kalpa Retail, on the suite he wants every Monday</a:t>
             </a:r>
           </a:p>
         </p:txBody>
@@ -7864,7 +7864,7 @@
       </p:sp>
       <p:pic>
         <p:nvPicPr>
-          <p:cNvPr id="9" name="mermaid diagram" descr="e3f007be7ace300e.png"/>
+          <p:cNvPr id="9" name="mermaid diagram" descr="097ed012adf723ee.png"/>
           <p:cNvPicPr>
             <a:picLocks noChangeAspect="1"/>
           </p:cNvPicPr>
@@ -13788,14 +13788,14 @@
                 </a:solidFill>
                 <a:latin typeface="Calibri"/>
               </a:rPr>
-              <a:t>Anand Iyer, CFO, Kalpa Retail</a:t>
+              <a:t>Anand Iyer, finance controller, Kalpa Retail</a:t>
             </a:r>
           </a:p>
         </p:txBody>
       </p:sp>
       <p:pic>
         <p:nvPicPr>
-          <p:cNvPr id="11" name="mermaid diagram" descr="e22b3685878325e9.png"/>
+          <p:cNvPr id="11" name="mermaid diagram" descr="9cf66d0223d78537.png"/>
           <p:cNvPicPr>
             <a:picLocks noChangeAspect="1"/>
           </p:cNvPicPr>
@@ -18581,7 +18581,7 @@
       </p:sp>
       <p:pic>
         <p:nvPicPr>
-          <p:cNvPr id="9" name="mermaid diagram" descr="1b5bd9a02d4c377f.png"/>
+          <p:cNvPr id="9" name="mermaid diagram" descr="bbe83e36b779cb4d.png"/>
           <p:cNvPicPr>
             <a:picLocks noChangeAspect="1"/>
           </p:cNvPicPr>
@@ -20773,7 +20773,7 @@
       </p:sp>
       <p:pic>
         <p:nvPicPr>
-          <p:cNvPr id="9" name="mermaid diagram" descr="34109e70f5df5d9e.png"/>
+          <p:cNvPr id="9" name="mermaid diagram" descr="905b6c5be800b454.png"/>
           <p:cNvPicPr>
             <a:picLocks noChangeAspect="1"/>
           </p:cNvPicPr>

--- a/content/W02/D1/slides/C2_W02_D01_half2_STUDENT.pptx
+++ b/content/W02/D1/slides/C2_W02_D01_half2_STUDENT.pptx
@@ -2428,22 +2428,27 @@
           <a:lstStyle/>
           <a:p>
             <a:r>
-              <a:t>LIVE, 1 minute. Michelle Ufford's talk "Whoops, the Numbers are wrong! Scaling Data Quality @</a:t>
-            </a:r>
-          </a:p>
-          <a:p>
-            <a:r>
-              <a:t>Netflix" at the DataWorks and Hadoop Summit, June 2017. One of its slides sets a new batch of</a:t>
-            </a:r>
-          </a:p>
-          <a:p>
-            <a:r>
-              <a:t>17,240 rows with 17,240 missing values beside the previous day's 16,135 rows with 21: every value</a:t>
-            </a:r>
-          </a:p>
-          <a:p>
-            <a:r>
-              <a:t>of the column was missing, and the audit exists to stop that batch. Source and check date are in</a:t>
+              <a:t>LIVE, 1 minute. Michelle Ufford's talk "Whoops, The Numbers Are Wrong! Scaling Data Quality @</a:t>
+            </a:r>
+          </a:p>
+          <a:p>
+            <a:r>
+              <a:t>Netflix" at DataWorks Summit, San Jose, 13 June 2017. One of its slides sets a new batch of 17,240</a:t>
+            </a:r>
+          </a:p>
+          <a:p>
+            <a:r>
+              <a:t>rows with 17,240 missing values beside the previous day's 16,135 rows with 21: every value of the</a:t>
+            </a:r>
+          </a:p>
+          <a:p>
+            <a:r>
+              <a:t>column was missing. In the talk's rules the row-count checks fail the job and the missing-value</a:t>
+            </a:r>
+          </a:p>
+          <a:p>
+            <a:r>
+              <a:t>check only warns, so that batch raised a warning; say it that way. Source and check date are in</a:t>
             </a:r>
           </a:p>
           <a:p>
@@ -29224,7 +29229,7 @@
       </p:sp>
       <p:pic>
         <p:nvPicPr>
-          <p:cNvPr id="9" name="mermaid diagram" descr="0ac4d55538496294.png"/>
+          <p:cNvPr id="9" name="mermaid diagram" descr="4cd06380afdb5b42.png"/>
           <p:cNvPicPr>
             <a:picLocks noChangeAspect="1"/>
           </p:cNvPicPr>
@@ -29238,8 +29243,8 @@
         </p:blipFill>
         <p:spPr>
           <a:xfrm>
-            <a:off x="1445266" y="1956816"/>
-            <a:ext cx="9301162" cy="2786062"/>
+            <a:off x="1180947" y="1956816"/>
+            <a:ext cx="9829800" cy="2786062"/>
           </a:xfrm>
           <a:prstGeom prst="rect">
             <a:avLst/>

--- a/content/W02/D1/slides/C2_W02_D01_half2_STUDENT.pptx
+++ b/content/W02/D1/slides/C2_W02_D01_half2_STUDENT.pptx
@@ -21296,7 +21296,7 @@
                 </a:solidFill>
                 <a:latin typeface="Calibri"/>
               </a:rPr>
-              <a:t>MARKS</a:t>
+              <a:t>GRADES</a:t>
             </a:r>
           </a:p>
         </p:txBody>

--- a/content/W02/D1/slides/C2_W02_D01_half2_STUDENT.pptx
+++ b/content/W02/D1/slides/C2_W02_D01_half2_STUDENT.pptx
@@ -32,6 +32,7 @@
     <p:sldId id="280" r:id="rId32"/>
     <p:sldId id="281" r:id="rId33"/>
     <p:sldId id="282" r:id="rId34"/>
+    <p:sldId id="283" r:id="rId35"/>
   </p:sldIdLst>
   <p:sldSz cx="12191695" cy="6858000" type="screen4x3"/>
   <p:notesSz cx="6858000" cy="9144000"/>
@@ -1628,7 +1629,12 @@
           <a:lstStyle/>
           <a:p>
             <a:r>
-              <a:t>LIVE. Ten minutes: the crux lines (1), the Kahoot (8) and tomorrow's question (1). The self-study</a:t>
+              <a:t>LIVE. Ten minutes: the day's answer (1), the crux lines (1), the Kahoot (7) and tomorrow's</a:t>
+            </a:r>
+          </a:p>
+          <a:p>
+            <a:r>
+              <a:t>question (1). The self-study</a:t>
             </a:r>
           </a:p>
           <a:p>
@@ -1708,12 +1714,12 @@
           <a:lstStyle/>
           <a:p>
             <a:r>
-              <a:t>LIVE, 1 minute. Read the six lines; the cheat sheet prints them word for word. Each is the check</a:t>
-            </a:r>
-          </a:p>
-          <a:p>
-            <a:r>
-              <a:t>that caught one of the day's plausible wrong numbers. Then the Kahoot.</a:t>
+              <a:t>LIVE, 1 minute. Ask two learners to read their own sentence to Anand before this slide: the</a:t>
+            </a:r>
+          </a:p>
+          <a:p>
+            <a:r>
+              <a:t>full message is S14's. Then the six lines worth keeping.</a:t>
             </a:r>
           </a:p>
         </p:txBody>
@@ -1783,22 +1789,12 @@
           <a:lstStyle/>
           <a:p>
             <a:r>
-              <a:t>LIVE, 8 minutes. The pack is kahoot/C2_W02_D01_quiz_STUDENT.md. After each item, one learner says</a:t>
-            </a:r>
-          </a:p>
-          <a:p>
-            <a:r>
-              <a:t>why the key holds. The last item returns to Week 1 Thursday: the discount's 6 percent lift was a</a:t>
-            </a:r>
-          </a:p>
-          <a:p>
-            <a:r>
-              <a:t>mix effect, and the room says in one line what a fair comparison would need. Then tomorrow's</a:t>
-            </a:r>
-          </a:p>
-          <a:p>
-            <a:r>
-              <a:t>question.</a:t>
+              <a:t>LIVE, 1 minute. Read the six lines; the cheat sheet prints them word for word. Each is the check</a:t>
+            </a:r>
+          </a:p>
+          <a:p>
+            <a:r>
+              <a:t>that caught one of the day's plausible wrong numbers. Then the Kahoot.</a:t>
             </a:r>
           </a:p>
         </p:txBody>
@@ -1868,22 +1864,22 @@
           <a:lstStyle/>
           <a:p>
             <a:r>
-              <a:t>SELF-STUDY, 2 minutes to read. The drill runs aloud in the practice lab, sixty seconds per answer,</a:t>
-            </a:r>
-          </a:p>
-          <a:p>
-            <a:r>
-              <a:t>in pairs. Each chapter's closing slide and the study notes carry the full answers. The design</a:t>
-            </a:r>
-          </a:p>
-          <a:p>
-            <a:r>
-              <a:t>question among them: four ways to produce a number, which would you choose, sized how, and what</a:t>
-            </a:r>
-          </a:p>
-          <a:p>
-            <a:r>
-              <a:t>would make you switch.</a:t>
+              <a:t>LIVE, 7 minutes. The pack is kahoot/C2_W02_D01_quiz_STUDENT.md. After each item, one learner says</a:t>
+            </a:r>
+          </a:p>
+          <a:p>
+            <a:r>
+              <a:t>why the key holds. The last item returns to Week 1 Thursday: the discount's 6 percent lift was a</a:t>
+            </a:r>
+          </a:p>
+          <a:p>
+            <a:r>
+              <a:t>mix effect, and the room says in one line what a fair comparison would need. Then tomorrow's</a:t>
+            </a:r>
+          </a:p>
+          <a:p>
+            <a:r>
+              <a:t>question.</a:t>
             </a:r>
           </a:p>
         </p:txBody>
@@ -1953,22 +1949,22 @@
           <a:lstStyle/>
           <a:p>
             <a:r>
-              <a:t>SELF-STUDY. The case runs in the take-home, in pairs or alone:</a:t>
-            </a:r>
-          </a:p>
-          <a:p>
-            <a:r>
-              <a:t>notebooks/C2_W02_D01_ex2_second_case_STUDENT.ipynb with the brief</a:t>
-            </a:r>
-          </a:p>
-          <a:p>
-            <a:r>
-              <a:t>exercises/unguided/C2_W02_D01_second_case_STUDENT.md. Seven lettered choices and one line for</a:t>
-            </a:r>
-          </a:p>
-          <a:p>
-            <a:r>
-              <a:t>Anand naming the channel losing its consumers fastest, with its number.</a:t>
+              <a:t>SELF-STUDY, 2 minutes to read. The drill runs aloud in the practice lab, sixty seconds per answer,</a:t>
+            </a:r>
+          </a:p>
+          <a:p>
+            <a:r>
+              <a:t>in pairs. Each chapter's closing slide and the study notes carry the full answers. The design</a:t>
+            </a:r>
+          </a:p>
+          <a:p>
+            <a:r>
+              <a:t>question among them: four ways to produce a number, which would you choose, sized how, and what</a:t>
+            </a:r>
+          </a:p>
+          <a:p>
+            <a:r>
+              <a:t>would make you switch.</a:t>
             </a:r>
           </a:p>
         </p:txBody>
@@ -2038,12 +2034,22 @@
           <a:lstStyle/>
           <a:p>
             <a:r>
-              <a:t>SELF-STUDY. The debrief of wrong answers runs in the lab on a faculty day. A learner who missed</a:t>
-            </a:r>
-          </a:p>
-          <a:p>
-            <a:r>
-              <a:t>the class can take each row back to its chapter's slides and notebook.</a:t>
+              <a:t>SELF-STUDY. The case runs in the take-home, in pairs or alone:</a:t>
+            </a:r>
+          </a:p>
+          <a:p>
+            <a:r>
+              <a:t>notebooks/C2_W02_D01_ex2_second_case_STUDENT.ipynb with the brief</a:t>
+            </a:r>
+          </a:p>
+          <a:p>
+            <a:r>
+              <a:t>exercises/unguided/C2_W02_D01_second_case_STUDENT.md. Seven lettered choices and one line for</a:t>
+            </a:r>
+          </a:p>
+          <a:p>
+            <a:r>
+              <a:t>Anand naming the channel losing its consumers fastest, with its number.</a:t>
             </a:r>
           </a:p>
         </p:txBody>
@@ -2069,6 +2075,81 @@
 </file>
 
 <file path=ppt/notesSlides/notesSlide27.xml><?xml version="1.0" encoding="utf-8"?>
+<p:notes xmlns:a="http://schemas.openxmlformats.org/drawingml/2006/main" xmlns:p="http://schemas.openxmlformats.org/presentationml/2006/main" xmlns:r="http://schemas.openxmlformats.org/officeDocument/2006/relationships">
+  <p:cSld>
+    <p:spTree>
+      <p:nvGrpSpPr>
+        <p:cNvPr id="1" name=""/>
+        <p:cNvGrpSpPr/>
+        <p:nvPr/>
+      </p:nvGrpSpPr>
+      <p:grpSpPr>
+        <a:xfrm>
+          <a:off x="0" y="0"/>
+          <a:ext cx="0" cy="0"/>
+          <a:chOff x="0" y="0"/>
+          <a:chExt cx="0" cy="0"/>
+        </a:xfrm>
+      </p:grpSpPr>
+      <p:sp>
+        <p:nvSpPr>
+          <p:cNvPr id="2" name="Slide Image Placeholder 1"/>
+          <p:cNvSpPr>
+            <a:spLocks noGrp="1"/>
+          </p:cNvSpPr>
+          <p:nvPr>
+            <p:ph type="sldImg" idx="2"/>
+          </p:nvPr>
+        </p:nvSpPr>
+        <p:spPr/>
+      </p:sp>
+      <p:sp>
+        <p:nvSpPr>
+          <p:cNvPr id="3" name="Notes Placeholder 2"/>
+          <p:cNvSpPr>
+            <a:spLocks noGrp="1"/>
+          </p:cNvSpPr>
+          <p:nvPr>
+            <p:ph type="body" idx="3" sz="quarter"/>
+          </p:nvPr>
+        </p:nvSpPr>
+        <p:spPr/>
+        <p:txBody>
+          <a:bodyPr/>
+          <a:lstStyle/>
+          <a:p>
+            <a:r>
+              <a:t>SELF-STUDY. The debrief of wrong answers runs in the lab on a faculty day. A learner who missed</a:t>
+            </a:r>
+          </a:p>
+          <a:p>
+            <a:r>
+              <a:t>the class can take each row back to its chapter's slides and notebook.</a:t>
+            </a:r>
+          </a:p>
+        </p:txBody>
+      </p:sp>
+      <p:sp>
+        <p:nvSpPr>
+          <p:cNvPr id="4" name="Slide Number Placeholder 3"/>
+          <p:cNvSpPr>
+            <a:spLocks noGrp="1"/>
+          </p:cNvSpPr>
+          <p:nvPr>
+            <p:ph type="sldNum" idx="5" sz="quarter"/>
+          </p:nvPr>
+        </p:nvSpPr>
+        <p:spPr/>
+      </p:sp>
+    </p:spTree>
+  </p:cSld>
+  <p:clrMapOvr>
+    <a:masterClrMapping/>
+  </p:clrMapOvr>
+</p:notes>
+</file>
+
+<file path=ppt/notesSlides/notesSlide28.xml><?xml version="1.0" encoding="utf-8"?>
 <p:notes xmlns:a="http://schemas.openxmlformats.org/drawingml/2006/main" xmlns:p="http://schemas.openxmlformats.org/presentationml/2006/main" xmlns:r="http://schemas.openxmlformats.org/officeDocument/2006/relationships">
   <p:cSld>
     <p:spTree>
@@ -6306,7 +6387,7 @@
                 </a:solidFill>
                 <a:latin typeface="Calibri"/>
               </a:rPr>
-              <a:t>1 / 27</a:t>
+              <a:t>1 / 28</a:t>
             </a:r>
           </a:p>
         </p:txBody>
@@ -7454,7 +7535,7 @@
                 </a:solidFill>
                 <a:latin typeface="Calibri"/>
               </a:rPr>
-              <a:t>S8  ·  10 / 27</a:t>
+              <a:t>S8  ·  10 / 28</a:t>
             </a:r>
           </a:p>
         </p:txBody>
@@ -8359,7 +8440,7 @@
                 </a:solidFill>
                 <a:latin typeface="Calibri"/>
               </a:rPr>
-              <a:t>S9  ·  11 / 27</a:t>
+              <a:t>S9  ·  11 / 28</a:t>
             </a:r>
           </a:p>
         </p:txBody>
@@ -9721,7 +9802,7 @@
                 </a:solidFill>
                 <a:latin typeface="Calibri"/>
               </a:rPr>
-              <a:t>S10  ·  12 / 27</a:t>
+              <a:t>S10  ·  12 / 28</a:t>
             </a:r>
           </a:p>
         </p:txBody>
@@ -10395,7 +10476,7 @@
                 </a:solidFill>
                 <a:latin typeface="Calibri"/>
               </a:rPr>
-              <a:t>S11  ·  13 / 27</a:t>
+              <a:t>S11  ·  13 / 28</a:t>
             </a:r>
           </a:p>
         </p:txBody>
@@ -11626,7 +11707,7 @@
                 </a:solidFill>
                 <a:latin typeface="Calibri"/>
               </a:rPr>
-              <a:t>S12  ·  14 / 27</a:t>
+              <a:t>S12  ·  14 / 28</a:t>
             </a:r>
           </a:p>
         </p:txBody>
@@ -12202,7 +12283,7 @@
                 </a:solidFill>
                 <a:latin typeface="Calibri"/>
               </a:rPr>
-              <a:t>S13  ·  15 / 27</a:t>
+              <a:t>S13  ·  15 / 28</a:t>
             </a:r>
           </a:p>
         </p:txBody>
@@ -12819,7 +12900,7 @@
                 </a:solidFill>
                 <a:latin typeface="Calibri"/>
               </a:rPr>
-              <a:t>S14  ·  16 / 27</a:t>
+              <a:t>S14  ·  16 / 28</a:t>
             </a:r>
           </a:p>
         </p:txBody>
@@ -14016,7 +14097,7 @@
                 </a:solidFill>
                 <a:latin typeface="Calibri"/>
               </a:rPr>
-              <a:t>S15  ·  17 / 27</a:t>
+              <a:t>S15  ·  17 / 28</a:t>
             </a:r>
           </a:p>
         </p:txBody>
@@ -14527,7 +14608,7 @@
                 </a:solidFill>
                 <a:latin typeface="Calibri"/>
               </a:rPr>
-              <a:t>18 / 27</a:t>
+              <a:t>18 / 28</a:t>
             </a:r>
           </a:p>
         </p:txBody>
@@ -16302,7 +16383,7 @@
                 </a:solidFill>
                 <a:latin typeface="Calibri"/>
               </a:rPr>
-              <a:t>S16  ·  19 / 27</a:t>
+              <a:t>S16  ·  19 / 28</a:t>
             </a:r>
           </a:p>
         </p:txBody>
@@ -17117,7 +17198,7 @@
                 </a:solidFill>
                 <a:latin typeface="Calibri"/>
               </a:rPr>
-              <a:t>S1  ·  2 / 27</a:t>
+              <a:t>S1  ·  2 / 28</a:t>
             </a:r>
           </a:p>
         </p:txBody>
@@ -18544,7 +18625,7 @@
                 </a:solidFill>
                 <a:latin typeface="Calibri"/>
               </a:rPr>
-              <a:t>S17  ·  20 / 27</a:t>
+              <a:t>S17  ·  20 / 28</a:t>
             </a:r>
           </a:p>
         </p:txBody>
@@ -19055,7 +19136,7 @@
                 </a:solidFill>
                 <a:latin typeface="Calibri"/>
               </a:rPr>
-              <a:t>21 / 27</a:t>
+              <a:t>21 / 28</a:t>
             </a:r>
           </a:p>
         </p:txBody>
@@ -19261,7 +19342,7 @@
                 </a:solidFill>
                 <a:latin typeface="Georgia"/>
               </a:rPr>
-              <a:t>Answer: six lines worth keeping, one per chapter</a:t>
+              <a:t>Answer: yes: down 1.6%, Retail-Plus, and it reruns</a:t>
             </a:r>
           </a:p>
         </p:txBody>
@@ -19296,23 +19377,658 @@
                 </a:solidFill>
                 <a:latin typeface="Calibri"/>
               </a:rPr>
-              <a:t>Which line does each chapter leave the Monday suite with?</a:t>
-            </a:r>
-          </a:p>
-        </p:txBody>
-      </p:sp>
-      <p:sp>
-        <p:nvSpPr>
-          <p:cNvPr id="9" name="Rectangle 8"/>
+              <a:t>Can the warehouse itself give Anand the Monday numbers, every segment, every week?</a:t>
+            </a:r>
+          </a:p>
+        </p:txBody>
+      </p:sp>
+      <p:sp>
+        <p:nvSpPr>
+          <p:cNvPr id="9" name="TextBox 8"/>
+          <p:cNvSpPr txBox="1"/>
+          <p:nvPr/>
+        </p:nvSpPr>
+        <p:spPr>
+          <a:xfrm>
+            <a:off x="530352" y="1956816"/>
+            <a:ext cx="2577007" cy="698500"/>
+          </a:xfrm>
+          <a:prstGeom prst="rect">
+            <a:avLst/>
+          </a:prstGeom>
+          <a:noFill/>
+        </p:spPr>
+        <p:txBody>
+          <a:bodyPr wrap="square" anchor="t" lIns="0" rIns="0" tIns="0" bIns="0">
+            <a:spAutoFit/>
+          </a:bodyPr>
+          <a:lstStyle/>
+          <a:p>
+            <a:pPr algn="l"/>
+            <a:r>
+              <a:rPr sz="4400" b="0" i="0">
+                <a:solidFill>
+                  <a:srgbClr val="5B3FD6"/>
+                </a:solidFill>
+                <a:latin typeface="Georgia"/>
+              </a:rPr>
+              <a:t>1.6%</a:t>
+            </a:r>
+          </a:p>
+        </p:txBody>
+      </p:sp>
+      <p:sp>
+        <p:nvSpPr>
+          <p:cNvPr id="10" name="TextBox 9"/>
+          <p:cNvSpPr txBox="1"/>
+          <p:nvPr/>
+        </p:nvSpPr>
+        <p:spPr>
+          <a:xfrm>
+            <a:off x="530352" y="2691892"/>
+            <a:ext cx="2577007" cy="168656"/>
+          </a:xfrm>
+          <a:prstGeom prst="rect">
+            <a:avLst/>
+          </a:prstGeom>
+          <a:noFill/>
+        </p:spPr>
+        <p:txBody>
+          <a:bodyPr wrap="square" anchor="t" lIns="0" rIns="0" tIns="0" bIns="0">
+            <a:spAutoFit/>
+          </a:bodyPr>
+          <a:lstStyle/>
+          <a:p>
+            <a:pPr algn="l"/>
+            <a:r>
+              <a:rPr sz="800" b="1" i="0" spc="250">
+                <a:solidFill>
+                  <a:srgbClr val="1A0F5C"/>
+                </a:solidFill>
+                <a:latin typeface="Calibri"/>
+              </a:rPr>
+              <a:t>THE BOOK'S FALL</a:t>
+            </a:r>
+          </a:p>
+        </p:txBody>
+      </p:sp>
+      <p:sp>
+        <p:nvSpPr>
+          <p:cNvPr id="11" name="TextBox 10"/>
+          <p:cNvSpPr txBox="1"/>
+          <p:nvPr/>
+        </p:nvSpPr>
+        <p:spPr>
+          <a:xfrm>
+            <a:off x="530352" y="2893060"/>
+            <a:ext cx="2577007" cy="193421"/>
+          </a:xfrm>
+          <a:prstGeom prst="rect">
+            <a:avLst/>
+          </a:prstGeom>
+          <a:noFill/>
+        </p:spPr>
+        <p:txBody>
+          <a:bodyPr wrap="square" anchor="t" lIns="0" rIns="0" tIns="0" bIns="0">
+            <a:spAutoFit/>
+          </a:bodyPr>
+          <a:lstStyle/>
+          <a:p>
+            <a:pPr algn="l"/>
+            <a:r>
+              <a:rPr sz="950" b="0" i="0">
+                <a:solidFill>
+                  <a:srgbClr val="6B6690"/>
+                </a:solidFill>
+                <a:latin typeface="Calibri"/>
+              </a:rPr>
+              <a:t>Rs 10.00 crore to Rs 9.84 crore</a:t>
+            </a:r>
+          </a:p>
+        </p:txBody>
+      </p:sp>
+      <p:sp>
+        <p:nvSpPr>
+          <p:cNvPr id="12" name="Rectangle 11"/>
           <p:cNvSpPr/>
           <p:nvPr/>
         </p:nvSpPr>
         <p:spPr>
           <a:xfrm>
-            <a:off x="1381734" y="2523744"/>
-            <a:ext cx="9428226" cy="18288"/>
-          </a:xfrm>
-          <a:prstGeom prst="rect">
+            <a:off x="530352" y="3145536"/>
+            <a:ext cx="2577007" cy="10972"/>
+          </a:xfrm>
+          <a:prstGeom prst="rect">
+            <a:avLst/>
+          </a:prstGeom>
+          <a:solidFill>
+            <a:srgbClr val="E4E1F1"/>
+          </a:solidFill>
+          <a:ln>
+            <a:noFill/>
+          </a:ln>
+          <a:effectLst/>
+        </p:spPr>
+        <p:style>
+          <a:lnRef idx="1">
+            <a:schemeClr val="accent1"/>
+          </a:lnRef>
+          <a:fillRef idx="3">
+            <a:schemeClr val="accent1"/>
+          </a:fillRef>
+          <a:effectRef idx="2">
+            <a:schemeClr val="accent1"/>
+          </a:effectRef>
+          <a:fontRef idx="minor">
+            <a:schemeClr val="lt1"/>
+          </a:fontRef>
+        </p:style>
+        <p:txBody>
+          <a:bodyPr rtlCol="0" anchor="ctr" wrap="square"/>
+          <a:lstStyle/>
+          <a:p>
+            <a:pPr algn="ctr"/>
+          </a:p>
+        </p:txBody>
+      </p:sp>
+      <p:sp>
+        <p:nvSpPr>
+          <p:cNvPr id="13" name="TextBox 12"/>
+          <p:cNvSpPr txBox="1"/>
+          <p:nvPr/>
+        </p:nvSpPr>
+        <p:spPr>
+          <a:xfrm>
+            <a:off x="3381679" y="1956816"/>
+            <a:ext cx="2577007" cy="698500"/>
+          </a:xfrm>
+          <a:prstGeom prst="rect">
+            <a:avLst/>
+          </a:prstGeom>
+          <a:noFill/>
+        </p:spPr>
+        <p:txBody>
+          <a:bodyPr wrap="square" anchor="t" lIns="0" rIns="0" tIns="0" bIns="0">
+            <a:spAutoFit/>
+          </a:bodyPr>
+          <a:lstStyle/>
+          <a:p>
+            <a:pPr algn="l"/>
+            <a:r>
+              <a:rPr sz="4400" b="0" i="0">
+                <a:solidFill>
+                  <a:srgbClr val="5B3FD6"/>
+                </a:solidFill>
+                <a:latin typeface="Georgia"/>
+              </a:rPr>
+              <a:t>29.4%</a:t>
+            </a:r>
+          </a:p>
+        </p:txBody>
+      </p:sp>
+      <p:sp>
+        <p:nvSpPr>
+          <p:cNvPr id="14" name="TextBox 13"/>
+          <p:cNvSpPr txBox="1"/>
+          <p:nvPr/>
+        </p:nvSpPr>
+        <p:spPr>
+          <a:xfrm>
+            <a:off x="3381679" y="2691892"/>
+            <a:ext cx="2577007" cy="168656"/>
+          </a:xfrm>
+          <a:prstGeom prst="rect">
+            <a:avLst/>
+          </a:prstGeom>
+          <a:noFill/>
+        </p:spPr>
+        <p:txBody>
+          <a:bodyPr wrap="square" anchor="t" lIns="0" rIns="0" tIns="0" bIns="0">
+            <a:spAutoFit/>
+          </a:bodyPr>
+          <a:lstStyle/>
+          <a:p>
+            <a:pPr algn="l"/>
+            <a:r>
+              <a:rPr sz="800" b="1" i="0" spc="250">
+                <a:solidFill>
+                  <a:srgbClr val="1A0F5C"/>
+                </a:solidFill>
+                <a:latin typeface="Calibri"/>
+              </a:rPr>
+              <a:t>RETAIL-PLUS'S FALL</a:t>
+            </a:r>
+          </a:p>
+        </p:txBody>
+      </p:sp>
+      <p:sp>
+        <p:nvSpPr>
+          <p:cNvPr id="15" name="TextBox 14"/>
+          <p:cNvSpPr txBox="1"/>
+          <p:nvPr/>
+        </p:nvSpPr>
+        <p:spPr>
+          <a:xfrm>
+            <a:off x="3381679" y="2893060"/>
+            <a:ext cx="2577007" cy="350266"/>
+          </a:xfrm>
+          <a:prstGeom prst="rect">
+            <a:avLst/>
+          </a:prstGeom>
+          <a:noFill/>
+        </p:spPr>
+        <p:txBody>
+          <a:bodyPr wrap="square" anchor="t" lIns="0" rIns="0" tIns="0" bIns="0">
+            <a:spAutoFit/>
+          </a:bodyPr>
+          <a:lstStyle/>
+          <a:p>
+            <a:pPr algn="l"/>
+            <a:r>
+              <a:rPr sz="950" b="0" i="0">
+                <a:solidFill>
+                  <a:srgbClr val="6B6690"/>
+                </a:solidFill>
+                <a:latin typeface="Calibri"/>
+              </a:rPr>
+              <a:t>16.5% fewer members, each 22.0% less often</a:t>
+            </a:r>
+          </a:p>
+        </p:txBody>
+      </p:sp>
+      <p:sp>
+        <p:nvSpPr>
+          <p:cNvPr id="16" name="Rectangle 15"/>
+          <p:cNvSpPr/>
+          <p:nvPr/>
+        </p:nvSpPr>
+        <p:spPr>
+          <a:xfrm>
+            <a:off x="3381679" y="3145536"/>
+            <a:ext cx="2577007" cy="10972"/>
+          </a:xfrm>
+          <a:prstGeom prst="rect">
+            <a:avLst/>
+          </a:prstGeom>
+          <a:solidFill>
+            <a:srgbClr val="E4E1F1"/>
+          </a:solidFill>
+          <a:ln>
+            <a:noFill/>
+          </a:ln>
+          <a:effectLst/>
+        </p:spPr>
+        <p:style>
+          <a:lnRef idx="1">
+            <a:schemeClr val="accent1"/>
+          </a:lnRef>
+          <a:fillRef idx="3">
+            <a:schemeClr val="accent1"/>
+          </a:fillRef>
+          <a:effectRef idx="2">
+            <a:schemeClr val="accent1"/>
+          </a:effectRef>
+          <a:fontRef idx="minor">
+            <a:schemeClr val="lt1"/>
+          </a:fontRef>
+        </p:style>
+        <p:txBody>
+          <a:bodyPr rtlCol="0" anchor="ctr" wrap="square"/>
+          <a:lstStyle/>
+          <a:p>
+            <a:pPr algn="ctr"/>
+          </a:p>
+        </p:txBody>
+      </p:sp>
+      <p:sp>
+        <p:nvSpPr>
+          <p:cNvPr id="17" name="TextBox 16"/>
+          <p:cNvSpPr txBox="1"/>
+          <p:nvPr/>
+        </p:nvSpPr>
+        <p:spPr>
+          <a:xfrm>
+            <a:off x="6233007" y="1956816"/>
+            <a:ext cx="2577007" cy="698500"/>
+          </a:xfrm>
+          <a:prstGeom prst="rect">
+            <a:avLst/>
+          </a:prstGeom>
+          <a:noFill/>
+        </p:spPr>
+        <p:txBody>
+          <a:bodyPr wrap="square" anchor="t" lIns="0" rIns="0" tIns="0" bIns="0">
+            <a:spAutoFit/>
+          </a:bodyPr>
+          <a:lstStyle/>
+          <a:p>
+            <a:pPr algn="l"/>
+            <a:r>
+              <a:rPr sz="4400" b="0" i="0">
+                <a:solidFill>
+                  <a:srgbClr val="5B3FD6"/>
+                </a:solidFill>
+                <a:latin typeface="Georgia"/>
+              </a:rPr>
+              <a:t>7.0%</a:t>
+            </a:r>
+          </a:p>
+        </p:txBody>
+      </p:sp>
+      <p:sp>
+        <p:nvSpPr>
+          <p:cNvPr id="18" name="TextBox 17"/>
+          <p:cNvSpPr txBox="1"/>
+          <p:nvPr/>
+        </p:nvSpPr>
+        <p:spPr>
+          <a:xfrm>
+            <a:off x="6233007" y="2691892"/>
+            <a:ext cx="2577007" cy="168656"/>
+          </a:xfrm>
+          <a:prstGeom prst="rect">
+            <a:avLst/>
+          </a:prstGeom>
+          <a:noFill/>
+        </p:spPr>
+        <p:txBody>
+          <a:bodyPr wrap="square" anchor="t" lIns="0" rIns="0" tIns="0" bIns="0">
+            <a:spAutoFit/>
+          </a:bodyPr>
+          <a:lstStyle/>
+          <a:p>
+            <a:pPr algn="l"/>
+            <a:r>
+              <a:rPr sz="800" b="1" i="0" spc="250">
+                <a:solidFill>
+                  <a:srgbClr val="1A0F5C"/>
+                </a:solidFill>
+                <a:latin typeface="Calibri"/>
+              </a:rPr>
+              <a:t>FEWER CUSTOMERS</a:t>
+            </a:r>
+          </a:p>
+        </p:txBody>
+      </p:sp>
+      <p:sp>
+        <p:nvSpPr>
+          <p:cNvPr id="19" name="TextBox 18"/>
+          <p:cNvSpPr txBox="1"/>
+          <p:nvPr/>
+        </p:nvSpPr>
+        <p:spPr>
+          <a:xfrm>
+            <a:off x="6233007" y="2893060"/>
+            <a:ext cx="2577007" cy="193421"/>
+          </a:xfrm>
+          <a:prstGeom prst="rect">
+            <a:avLst/>
+          </a:prstGeom>
+          <a:noFill/>
+        </p:spPr>
+        <p:txBody>
+          <a:bodyPr wrap="square" anchor="t" lIns="0" rIns="0" tIns="0" bIns="0">
+            <a:spAutoFit/>
+          </a:bodyPr>
+          <a:lstStyle/>
+          <a:p>
+            <a:pPr algn="l"/>
+            <a:r>
+              <a:rPr sz="950" b="0" i="0">
+                <a:solidFill>
+                  <a:srgbClr val="6B6690"/>
+                </a:solidFill>
+                <a:latin typeface="Calibri"/>
+              </a:rPr>
+              <a:t>the caveat against last week's extract</a:t>
+            </a:r>
+          </a:p>
+        </p:txBody>
+      </p:sp>
+      <p:sp>
+        <p:nvSpPr>
+          <p:cNvPr id="20" name="Rectangle 19"/>
+          <p:cNvSpPr/>
+          <p:nvPr/>
+        </p:nvSpPr>
+        <p:spPr>
+          <a:xfrm>
+            <a:off x="6233007" y="3145536"/>
+            <a:ext cx="2577007" cy="10972"/>
+          </a:xfrm>
+          <a:prstGeom prst="rect">
+            <a:avLst/>
+          </a:prstGeom>
+          <a:solidFill>
+            <a:srgbClr val="E4E1F1"/>
+          </a:solidFill>
+          <a:ln>
+            <a:noFill/>
+          </a:ln>
+          <a:effectLst/>
+        </p:spPr>
+        <p:style>
+          <a:lnRef idx="1">
+            <a:schemeClr val="accent1"/>
+          </a:lnRef>
+          <a:fillRef idx="3">
+            <a:schemeClr val="accent1"/>
+          </a:fillRef>
+          <a:effectRef idx="2">
+            <a:schemeClr val="accent1"/>
+          </a:effectRef>
+          <a:fontRef idx="minor">
+            <a:schemeClr val="lt1"/>
+          </a:fontRef>
+        </p:style>
+        <p:txBody>
+          <a:bodyPr rtlCol="0" anchor="ctr" wrap="square"/>
+          <a:lstStyle/>
+          <a:p>
+            <a:pPr algn="ctr"/>
+          </a:p>
+        </p:txBody>
+      </p:sp>
+      <p:sp>
+        <p:nvSpPr>
+          <p:cNvPr id="21" name="TextBox 20"/>
+          <p:cNvSpPr txBox="1"/>
+          <p:nvPr/>
+        </p:nvSpPr>
+        <p:spPr>
+          <a:xfrm>
+            <a:off x="9084335" y="1956816"/>
+            <a:ext cx="2577007" cy="698500"/>
+          </a:xfrm>
+          <a:prstGeom prst="rect">
+            <a:avLst/>
+          </a:prstGeom>
+          <a:noFill/>
+        </p:spPr>
+        <p:txBody>
+          <a:bodyPr wrap="square" anchor="t" lIns="0" rIns="0" tIns="0" bIns="0">
+            <a:spAutoFit/>
+          </a:bodyPr>
+          <a:lstStyle/>
+          <a:p>
+            <a:pPr algn="l"/>
+            <a:r>
+              <a:rPr sz="4400" b="0" i="0">
+                <a:solidFill>
+                  <a:srgbClr val="5B3FD6"/>
+                </a:solidFill>
+                <a:latin typeface="Georgia"/>
+              </a:rPr>
+              <a:t>7</a:t>
+            </a:r>
+          </a:p>
+        </p:txBody>
+      </p:sp>
+      <p:sp>
+        <p:nvSpPr>
+          <p:cNvPr id="22" name="TextBox 21"/>
+          <p:cNvSpPr txBox="1"/>
+          <p:nvPr/>
+        </p:nvSpPr>
+        <p:spPr>
+          <a:xfrm>
+            <a:off x="9084335" y="2691892"/>
+            <a:ext cx="2577007" cy="168656"/>
+          </a:xfrm>
+          <a:prstGeom prst="rect">
+            <a:avLst/>
+          </a:prstGeom>
+          <a:noFill/>
+        </p:spPr>
+        <p:txBody>
+          <a:bodyPr wrap="square" anchor="t" lIns="0" rIns="0" tIns="0" bIns="0">
+            <a:spAutoFit/>
+          </a:bodyPr>
+          <a:lstStyle/>
+          <a:p>
+            <a:pPr algn="l"/>
+            <a:r>
+              <a:rPr sz="800" b="1" i="0" spc="250">
+                <a:solidFill>
+                  <a:srgbClr val="1A0F5C"/>
+                </a:solidFill>
+                <a:latin typeface="Calibri"/>
+              </a:rPr>
+              <a:t>FINGERPRINT NUMBERS</a:t>
+            </a:r>
+          </a:p>
+        </p:txBody>
+      </p:sp>
+      <p:sp>
+        <p:nvSpPr>
+          <p:cNvPr id="23" name="TextBox 22"/>
+          <p:cNvSpPr txBox="1"/>
+          <p:nvPr/>
+        </p:nvSpPr>
+        <p:spPr>
+          <a:xfrm>
+            <a:off x="9084335" y="2893060"/>
+            <a:ext cx="2577007" cy="193421"/>
+          </a:xfrm>
+          <a:prstGeom prst="rect">
+            <a:avLst/>
+          </a:prstGeom>
+          <a:noFill/>
+        </p:spPr>
+        <p:txBody>
+          <a:bodyPr wrap="square" anchor="t" lIns="0" rIns="0" tIns="0" bIns="0">
+            <a:spAutoFit/>
+          </a:bodyPr>
+          <a:lstStyle/>
+          <a:p>
+            <a:pPr algn="l"/>
+            <a:r>
+              <a:rPr sz="950" b="0" i="0">
+                <a:solidFill>
+                  <a:srgbClr val="6B6690"/>
+                </a:solidFill>
+                <a:latin typeface="Calibri"/>
+              </a:rPr>
+              <a:t>so a rerun says whether the book moved</a:t>
+            </a:r>
+          </a:p>
+        </p:txBody>
+      </p:sp>
+      <p:sp>
+        <p:nvSpPr>
+          <p:cNvPr id="24" name="Rectangle 23"/>
+          <p:cNvSpPr/>
+          <p:nvPr/>
+        </p:nvSpPr>
+        <p:spPr>
+          <a:xfrm>
+            <a:off x="9084335" y="3145536"/>
+            <a:ext cx="2577007" cy="10972"/>
+          </a:xfrm>
+          <a:prstGeom prst="rect">
+            <a:avLst/>
+          </a:prstGeom>
+          <a:solidFill>
+            <a:srgbClr val="E4E1F1"/>
+          </a:solidFill>
+          <a:ln>
+            <a:noFill/>
+          </a:ln>
+          <a:effectLst/>
+        </p:spPr>
+        <p:style>
+          <a:lnRef idx="1">
+            <a:schemeClr val="accent1"/>
+          </a:lnRef>
+          <a:fillRef idx="3">
+            <a:schemeClr val="accent1"/>
+          </a:fillRef>
+          <a:effectRef idx="2">
+            <a:schemeClr val="accent1"/>
+          </a:effectRef>
+          <a:fontRef idx="minor">
+            <a:schemeClr val="lt1"/>
+          </a:fontRef>
+        </p:style>
+        <p:txBody>
+          <a:bodyPr rtlCol="0" anchor="ctr" wrap="square"/>
+          <a:lstStyle/>
+          <a:p>
+            <a:pPr algn="ctr"/>
+          </a:p>
+        </p:txBody>
+      </p:sp>
+      <p:sp>
+        <p:nvSpPr>
+          <p:cNvPr id="25" name="TextBox 24"/>
+          <p:cNvSpPr txBox="1"/>
+          <p:nvPr/>
+        </p:nvSpPr>
+        <p:spPr>
+          <a:xfrm>
+            <a:off x="530352" y="3419856"/>
+            <a:ext cx="11130991" cy="772160"/>
+          </a:xfrm>
+          <a:prstGeom prst="rect">
+            <a:avLst/>
+          </a:prstGeom>
+          <a:noFill/>
+        </p:spPr>
+        <p:txBody>
+          <a:bodyPr wrap="square" anchor="t" lIns="0" rIns="0" tIns="0" bIns="0">
+            <a:spAutoFit/>
+          </a:bodyPr>
+          <a:lstStyle/>
+          <a:p>
+            <a:pPr>
+              <a:spcAft>
+                <a:spcPts val="800"/>
+              </a:spcAft>
+            </a:pPr>
+            <a:r>
+              <a:rPr sz="1600" b="0" i="0">
+                <a:solidFill>
+                  <a:srgbClr val="1A1440"/>
+                </a:solidFill>
+                <a:latin typeface="Calibri"/>
+              </a:rPr>
+              <a:t>Yes. Every number on Anand's sheet is a named query on the book, every count says what it counts, every ratio multiplies back, and every run repeats.</a:t>
+            </a:r>
+          </a:p>
+        </p:txBody>
+      </p:sp>
+      <p:sp>
+        <p:nvSpPr>
+          <p:cNvPr id="26" name="Oval 25"/>
+          <p:cNvSpPr/>
+          <p:nvPr/>
+        </p:nvSpPr>
+        <p:spPr>
+          <a:xfrm>
+            <a:off x="530352" y="6492240"/>
+            <a:ext cx="64008" cy="64008"/>
+          </a:xfrm>
+          <a:prstGeom prst="ellipse">
             <a:avLst/>
           </a:prstGeom>
           <a:solidFill>
@@ -19347,49 +20063,128 @@
       </p:sp>
       <p:sp>
         <p:nvSpPr>
-          <p:cNvPr id="10" name="TextBox 9"/>
-          <p:cNvSpPr txBox="1"/>
-          <p:nvPr/>
-        </p:nvSpPr>
-        <p:spPr>
-          <a:xfrm>
-            <a:off x="530352" y="1956816"/>
-            <a:ext cx="1702765" cy="168656"/>
-          </a:xfrm>
-          <a:prstGeom prst="rect">
-            <a:avLst/>
-          </a:prstGeom>
-          <a:noFill/>
-        </p:spPr>
-        <p:txBody>
-          <a:bodyPr wrap="square" anchor="t" lIns="0" rIns="0" tIns="0" bIns="0">
-            <a:spAutoFit/>
-          </a:bodyPr>
+          <p:cNvPr id="27" name="TextBox 26"/>
+          <p:cNvSpPr txBox="1"/>
+          <p:nvPr/>
+        </p:nvSpPr>
+        <p:spPr>
+          <a:xfrm>
+            <a:off x="640080" y="6437376"/>
+            <a:ext cx="1286446" cy="152146"/>
+          </a:xfrm>
+          <a:prstGeom prst="rect">
+            <a:avLst/>
+          </a:prstGeom>
+          <a:noFill/>
+        </p:spPr>
+        <p:txBody>
+          <a:bodyPr wrap="square" anchor="t" lIns="0" rIns="0" tIns="0" bIns="0">
+            <a:spAutoFit/>
+          </a:bodyPr>
+          <a:lstStyle/>
+          <a:p>
+            <a:pPr algn="l"/>
+            <a:r>
+              <a:rPr sz="700" b="0" i="0">
+                <a:solidFill>
+                  <a:srgbClr val="6B6690"/>
+                </a:solidFill>
+                <a:latin typeface="Calibri"/>
+              </a:rPr>
+              <a:t>Same answer next week?</a:t>
+            </a:r>
+          </a:p>
+        </p:txBody>
+      </p:sp>
+      <p:sp>
+        <p:nvSpPr>
+          <p:cNvPr id="28" name="Oval 27"/>
+          <p:cNvSpPr/>
+          <p:nvPr/>
+        </p:nvSpPr>
+        <p:spPr>
+          <a:xfrm>
+            <a:off x="2017966" y="6492240"/>
+            <a:ext cx="64008" cy="64008"/>
+          </a:xfrm>
+          <a:prstGeom prst="ellipse">
+            <a:avLst/>
+          </a:prstGeom>
+          <a:solidFill>
+            <a:srgbClr val="CFC9EE"/>
+          </a:solidFill>
+          <a:ln>
+            <a:noFill/>
+          </a:ln>
+          <a:effectLst/>
+        </p:spPr>
+        <p:style>
+          <a:lnRef idx="1">
+            <a:schemeClr val="accent1"/>
+          </a:lnRef>
+          <a:fillRef idx="3">
+            <a:schemeClr val="accent1"/>
+          </a:fillRef>
+          <a:effectRef idx="2">
+            <a:schemeClr val="accent1"/>
+          </a:effectRef>
+          <a:fontRef idx="minor">
+            <a:schemeClr val="lt1"/>
+          </a:fontRef>
+        </p:style>
+        <p:txBody>
+          <a:bodyPr rtlCol="0" anchor="ctr" wrap="square"/>
           <a:lstStyle/>
           <a:p>
             <a:pPr algn="ctr"/>
-            <a:r>
-              <a:rPr sz="800" b="1" i="0" spc="250">
-                <a:solidFill>
-                  <a:srgbClr val="5B3FD6"/>
-                </a:solidFill>
-                <a:latin typeface="Calibri"/>
-              </a:rPr>
-              <a:t>CHAPTER 1</a:t>
-            </a:r>
-          </a:p>
-        </p:txBody>
-      </p:sp>
-      <p:sp>
-        <p:nvSpPr>
-          <p:cNvPr id="11" name="Oval 10"/>
+          </a:p>
+        </p:txBody>
+      </p:sp>
+      <p:sp>
+        <p:nvSpPr>
+          <p:cNvPr id="29" name="TextBox 28"/>
+          <p:cNvSpPr txBox="1"/>
+          <p:nvPr/>
+        </p:nvSpPr>
+        <p:spPr>
+          <a:xfrm>
+            <a:off x="2127694" y="6437376"/>
+            <a:ext cx="1194435" cy="152146"/>
+          </a:xfrm>
+          <a:prstGeom prst="rect">
+            <a:avLst/>
+          </a:prstGeom>
+          <a:noFill/>
+        </p:spPr>
+        <p:txBody>
+          <a:bodyPr wrap="square" anchor="t" lIns="0" rIns="0" tIns="0" bIns="0">
+            <a:spAutoFit/>
+          </a:bodyPr>
+          <a:lstStyle/>
+          <a:p>
+            <a:pPr algn="l"/>
+            <a:r>
+              <a:rPr sz="700" b="0" i="0">
+                <a:solidFill>
+                  <a:srgbClr val="6B6690"/>
+                </a:solidFill>
+                <a:latin typeface="Calibri"/>
+              </a:rPr>
+              <a:t>Can you do it alone?</a:t>
+            </a:r>
+          </a:p>
+        </p:txBody>
+      </p:sp>
+      <p:sp>
+        <p:nvSpPr>
+          <p:cNvPr id="30" name="Oval 29"/>
           <p:cNvSpPr/>
           <p:nvPr/>
         </p:nvSpPr>
         <p:spPr>
           <a:xfrm>
-            <a:off x="1281150" y="2432304"/>
-            <a:ext cx="201168" cy="201168"/>
+            <a:off x="3413569" y="6492240"/>
+            <a:ext cx="64008" cy="64008"/>
           </a:xfrm>
           <a:prstGeom prst="ellipse">
             <a:avLst/>
@@ -19426,1354 +20221,7 @@
       </p:sp>
       <p:sp>
         <p:nvSpPr>
-          <p:cNvPr id="12" name="Rounded Rectangle 11"/>
-          <p:cNvSpPr/>
-          <p:nvPr/>
-        </p:nvSpPr>
-        <p:spPr>
-          <a:xfrm>
-            <a:off x="530352" y="2843784"/>
-            <a:ext cx="1702765" cy="1595120"/>
-          </a:xfrm>
-          <a:prstGeom prst="roundRect">
-            <a:avLst>
-              <a:gd name="adj" fmla="val 5000"/>
-            </a:avLst>
-          </a:prstGeom>
-          <a:solidFill>
-            <a:srgbClr val="FFFFFF"/>
-          </a:solidFill>
-          <a:ln w="9525">
-            <a:solidFill>
-              <a:srgbClr val="E4E1F1"/>
-            </a:solidFill>
-          </a:ln>
-          <a:effectLst>
-            <a:outerShdw blurRad="76200" dist="19050" dir="5400000" algn="bl" rotWithShape="0">
-              <a:srgbClr val="1A0F5C">
-                <a:alpha val="12000"/>
-              </a:srgbClr>
-            </a:outerShdw>
-          </a:effectLst>
-        </p:spPr>
-        <p:style>
-          <a:lnRef idx="1">
-            <a:schemeClr val="accent1"/>
-          </a:lnRef>
-          <a:fillRef idx="3">
-            <a:schemeClr val="accent1"/>
-          </a:fillRef>
-          <a:effectRef idx="2">
-            <a:schemeClr val="accent1"/>
-          </a:effectRef>
-          <a:fontRef idx="minor">
-            <a:schemeClr val="lt1"/>
-          </a:fontRef>
-        </p:style>
-        <p:txBody>
-          <a:bodyPr rtlCol="0" anchor="ctr" wrap="square"/>
-          <a:lstStyle/>
-          <a:p>
-            <a:pPr algn="ctr"/>
-          </a:p>
-        </p:txBody>
-      </p:sp>
-      <p:sp>
-        <p:nvSpPr>
-          <p:cNvPr id="13" name="TextBox 12"/>
-          <p:cNvSpPr txBox="1"/>
-          <p:nvPr/>
-        </p:nvSpPr>
-        <p:spPr>
-          <a:xfrm>
-            <a:off x="694944" y="2990088"/>
-            <a:ext cx="1373581" cy="251205"/>
-          </a:xfrm>
-          <a:prstGeom prst="rect">
-            <a:avLst/>
-          </a:prstGeom>
-          <a:noFill/>
-        </p:spPr>
-        <p:txBody>
-          <a:bodyPr wrap="square" anchor="t" lIns="0" rIns="0" tIns="0" bIns="0">
-            <a:spAutoFit/>
-          </a:bodyPr>
-          <a:lstStyle/>
-          <a:p>
-            <a:pPr algn="l"/>
-            <a:r>
-              <a:rPr sz="1300" b="1" i="0">
-                <a:solidFill>
-                  <a:srgbClr val="1A0F5C"/>
-                </a:solidFill>
-                <a:latin typeface="Calibri"/>
-              </a:rPr>
-              <a:t>Counts</a:t>
-            </a:r>
-          </a:p>
-        </p:txBody>
-      </p:sp>
-      <p:sp>
-        <p:nvSpPr>
-          <p:cNvPr id="14" name="TextBox 13"/>
-          <p:cNvSpPr txBox="1"/>
-          <p:nvPr/>
-        </p:nvSpPr>
-        <p:spPr>
-          <a:xfrm>
-            <a:off x="694944" y="3277870"/>
-            <a:ext cx="1373581" cy="862076"/>
-          </a:xfrm>
-          <a:prstGeom prst="rect">
-            <a:avLst/>
-          </a:prstGeom>
-          <a:noFill/>
-        </p:spPr>
-        <p:txBody>
-          <a:bodyPr wrap="square" anchor="t" lIns="0" rIns="0" tIns="0" bIns="0">
-            <a:spAutoFit/>
-          </a:bodyPr>
-          <a:lstStyle/>
-          <a:p>
-            <a:pPr algn="l"/>
-            <a:r>
-              <a:rPr sz="1000" b="0" i="0">
-                <a:solidFill>
-                  <a:srgbClr val="6B6690"/>
-                </a:solidFill>
-                <a:latin typeface="Calibri"/>
-              </a:rPr>
-              <a:t>A count says what it counts: order rows are count(*), customers are count(DISTINCT customer_id).</a:t>
-            </a:r>
-          </a:p>
-        </p:txBody>
-      </p:sp>
-      <p:sp>
-        <p:nvSpPr>
-          <p:cNvPr id="15" name="TextBox 14"/>
-          <p:cNvSpPr txBox="1"/>
-          <p:nvPr/>
-        </p:nvSpPr>
-        <p:spPr>
-          <a:xfrm>
-            <a:off x="2415997" y="1956816"/>
-            <a:ext cx="1702765" cy="168656"/>
-          </a:xfrm>
-          <a:prstGeom prst="rect">
-            <a:avLst/>
-          </a:prstGeom>
-          <a:noFill/>
-        </p:spPr>
-        <p:txBody>
-          <a:bodyPr wrap="square" anchor="t" lIns="0" rIns="0" tIns="0" bIns="0">
-            <a:spAutoFit/>
-          </a:bodyPr>
-          <a:lstStyle/>
-          <a:p>
-            <a:pPr algn="ctr"/>
-            <a:r>
-              <a:rPr sz="800" b="1" i="0" spc="250">
-                <a:solidFill>
-                  <a:srgbClr val="5B3FD6"/>
-                </a:solidFill>
-                <a:latin typeface="Calibri"/>
-              </a:rPr>
-              <a:t>CHAPTER 2</a:t>
-            </a:r>
-          </a:p>
-        </p:txBody>
-      </p:sp>
-      <p:sp>
-        <p:nvSpPr>
-          <p:cNvPr id="16" name="Oval 15"/>
-          <p:cNvSpPr/>
-          <p:nvPr/>
-        </p:nvSpPr>
-        <p:spPr>
-          <a:xfrm>
-            <a:off x="3166795" y="2432304"/>
-            <a:ext cx="201168" cy="201168"/>
-          </a:xfrm>
-          <a:prstGeom prst="ellipse">
-            <a:avLst/>
-          </a:prstGeom>
-          <a:solidFill>
-            <a:srgbClr val="5B3FD6"/>
-          </a:solidFill>
-          <a:ln>
-            <a:noFill/>
-          </a:ln>
-          <a:effectLst/>
-        </p:spPr>
-        <p:style>
-          <a:lnRef idx="1">
-            <a:schemeClr val="accent1"/>
-          </a:lnRef>
-          <a:fillRef idx="3">
-            <a:schemeClr val="accent1"/>
-          </a:fillRef>
-          <a:effectRef idx="2">
-            <a:schemeClr val="accent1"/>
-          </a:effectRef>
-          <a:fontRef idx="minor">
-            <a:schemeClr val="lt1"/>
-          </a:fontRef>
-        </p:style>
-        <p:txBody>
-          <a:bodyPr rtlCol="0" anchor="ctr" wrap="square"/>
-          <a:lstStyle/>
-          <a:p>
-            <a:pPr algn="ctr"/>
-          </a:p>
-        </p:txBody>
-      </p:sp>
-      <p:sp>
-        <p:nvSpPr>
-          <p:cNvPr id="17" name="Rounded Rectangle 16"/>
-          <p:cNvSpPr/>
-          <p:nvPr/>
-        </p:nvSpPr>
-        <p:spPr>
-          <a:xfrm>
-            <a:off x="2415997" y="2843784"/>
-            <a:ext cx="1702765" cy="1595120"/>
-          </a:xfrm>
-          <a:prstGeom prst="roundRect">
-            <a:avLst>
-              <a:gd name="adj" fmla="val 5000"/>
-            </a:avLst>
-          </a:prstGeom>
-          <a:solidFill>
-            <a:srgbClr val="FFFFFF"/>
-          </a:solidFill>
-          <a:ln w="9525">
-            <a:solidFill>
-              <a:srgbClr val="E4E1F1"/>
-            </a:solidFill>
-          </a:ln>
-          <a:effectLst>
-            <a:outerShdw blurRad="76200" dist="19050" dir="5400000" algn="bl" rotWithShape="0">
-              <a:srgbClr val="1A0F5C">
-                <a:alpha val="12000"/>
-              </a:srgbClr>
-            </a:outerShdw>
-          </a:effectLst>
-        </p:spPr>
-        <p:style>
-          <a:lnRef idx="1">
-            <a:schemeClr val="accent1"/>
-          </a:lnRef>
-          <a:fillRef idx="3">
-            <a:schemeClr val="accent1"/>
-          </a:fillRef>
-          <a:effectRef idx="2">
-            <a:schemeClr val="accent1"/>
-          </a:effectRef>
-          <a:fontRef idx="minor">
-            <a:schemeClr val="lt1"/>
-          </a:fontRef>
-        </p:style>
-        <p:txBody>
-          <a:bodyPr rtlCol="0" anchor="ctr" wrap="square"/>
-          <a:lstStyle/>
-          <a:p>
-            <a:pPr algn="ctr"/>
-          </a:p>
-        </p:txBody>
-      </p:sp>
-      <p:sp>
-        <p:nvSpPr>
-          <p:cNvPr id="18" name="TextBox 17"/>
-          <p:cNvSpPr txBox="1"/>
-          <p:nvPr/>
-        </p:nvSpPr>
-        <p:spPr>
-          <a:xfrm>
-            <a:off x="2580589" y="2990088"/>
-            <a:ext cx="1373581" cy="251205"/>
-          </a:xfrm>
-          <a:prstGeom prst="rect">
-            <a:avLst/>
-          </a:prstGeom>
-          <a:noFill/>
-        </p:spPr>
-        <p:txBody>
-          <a:bodyPr wrap="square" anchor="t" lIns="0" rIns="0" tIns="0" bIns="0">
-            <a:spAutoFit/>
-          </a:bodyPr>
-          <a:lstStyle/>
-          <a:p>
-            <a:pPr algn="l"/>
-            <a:r>
-              <a:rPr sz="1300" b="1" i="0">
-                <a:solidFill>
-                  <a:srgbClr val="1A0F5C"/>
-                </a:solidFill>
-                <a:latin typeface="Calibri"/>
-              </a:rPr>
-              <a:t>Sources</a:t>
-            </a:r>
-          </a:p>
-        </p:txBody>
-      </p:sp>
-      <p:sp>
-        <p:nvSpPr>
-          <p:cNvPr id="19" name="TextBox 18"/>
-          <p:cNvSpPr txBox="1"/>
-          <p:nvPr/>
-        </p:nvSpPr>
-        <p:spPr>
-          <a:xfrm>
-            <a:off x="2580589" y="3277870"/>
-            <a:ext cx="1373581" cy="696976"/>
-          </a:xfrm>
-          <a:prstGeom prst="rect">
-            <a:avLst/>
-          </a:prstGeom>
-          <a:noFill/>
-        </p:spPr>
-        <p:txBody>
-          <a:bodyPr wrap="square" anchor="t" lIns="0" rIns="0" tIns="0" bIns="0">
-            <a:spAutoFit/>
-          </a:bodyPr>
-          <a:lstStyle/>
-          <a:p>
-            <a:pPr algn="l"/>
-            <a:r>
-              <a:rPr sz="1000" b="0" i="0">
-                <a:solidFill>
-                  <a:srgbClr val="6B6690"/>
-                </a:solidFill>
-                <a:latin typeface="Calibri"/>
-              </a:rPr>
-              <a:t>A matching total is one leaf matching, so compare every leaf as a change.</a:t>
-            </a:r>
-          </a:p>
-        </p:txBody>
-      </p:sp>
-      <p:sp>
-        <p:nvSpPr>
-          <p:cNvPr id="20" name="TextBox 19"/>
-          <p:cNvSpPr txBox="1"/>
-          <p:nvPr/>
-        </p:nvSpPr>
-        <p:spPr>
-          <a:xfrm>
-            <a:off x="4301642" y="1956816"/>
-            <a:ext cx="1702765" cy="168656"/>
-          </a:xfrm>
-          <a:prstGeom prst="rect">
-            <a:avLst/>
-          </a:prstGeom>
-          <a:noFill/>
-        </p:spPr>
-        <p:txBody>
-          <a:bodyPr wrap="square" anchor="t" lIns="0" rIns="0" tIns="0" bIns="0">
-            <a:spAutoFit/>
-          </a:bodyPr>
-          <a:lstStyle/>
-          <a:p>
-            <a:pPr algn="ctr"/>
-            <a:r>
-              <a:rPr sz="800" b="1" i="0" spc="250">
-                <a:solidFill>
-                  <a:srgbClr val="5B3FD6"/>
-                </a:solidFill>
-                <a:latin typeface="Calibri"/>
-              </a:rPr>
-              <a:t>CHAPTER 3</a:t>
-            </a:r>
-          </a:p>
-        </p:txBody>
-      </p:sp>
-      <p:sp>
-        <p:nvSpPr>
-          <p:cNvPr id="21" name="Oval 20"/>
-          <p:cNvSpPr/>
-          <p:nvPr/>
-        </p:nvSpPr>
-        <p:spPr>
-          <a:xfrm>
-            <a:off x="5052441" y="2432304"/>
-            <a:ext cx="201168" cy="201168"/>
-          </a:xfrm>
-          <a:prstGeom prst="ellipse">
-            <a:avLst/>
-          </a:prstGeom>
-          <a:solidFill>
-            <a:srgbClr val="5B3FD6"/>
-          </a:solidFill>
-          <a:ln>
-            <a:noFill/>
-          </a:ln>
-          <a:effectLst/>
-        </p:spPr>
-        <p:style>
-          <a:lnRef idx="1">
-            <a:schemeClr val="accent1"/>
-          </a:lnRef>
-          <a:fillRef idx="3">
-            <a:schemeClr val="accent1"/>
-          </a:fillRef>
-          <a:effectRef idx="2">
-            <a:schemeClr val="accent1"/>
-          </a:effectRef>
-          <a:fontRef idx="minor">
-            <a:schemeClr val="lt1"/>
-          </a:fontRef>
-        </p:style>
-        <p:txBody>
-          <a:bodyPr rtlCol="0" anchor="ctr" wrap="square"/>
-          <a:lstStyle/>
-          <a:p>
-            <a:pPr algn="ctr"/>
-          </a:p>
-        </p:txBody>
-      </p:sp>
-      <p:sp>
-        <p:nvSpPr>
-          <p:cNvPr id="22" name="Rounded Rectangle 21"/>
-          <p:cNvSpPr/>
-          <p:nvPr/>
-        </p:nvSpPr>
-        <p:spPr>
-          <a:xfrm>
-            <a:off x="4301642" y="2843784"/>
-            <a:ext cx="1702765" cy="1595120"/>
-          </a:xfrm>
-          <a:prstGeom prst="roundRect">
-            <a:avLst>
-              <a:gd name="adj" fmla="val 5000"/>
-            </a:avLst>
-          </a:prstGeom>
-          <a:solidFill>
-            <a:srgbClr val="FFFFFF"/>
-          </a:solidFill>
-          <a:ln w="9525">
-            <a:solidFill>
-              <a:srgbClr val="E4E1F1"/>
-            </a:solidFill>
-          </a:ln>
-          <a:effectLst>
-            <a:outerShdw blurRad="76200" dist="19050" dir="5400000" algn="bl" rotWithShape="0">
-              <a:srgbClr val="1A0F5C">
-                <a:alpha val="12000"/>
-              </a:srgbClr>
-            </a:outerShdw>
-          </a:effectLst>
-        </p:spPr>
-        <p:style>
-          <a:lnRef idx="1">
-            <a:schemeClr val="accent1"/>
-          </a:lnRef>
-          <a:fillRef idx="3">
-            <a:schemeClr val="accent1"/>
-          </a:fillRef>
-          <a:effectRef idx="2">
-            <a:schemeClr val="accent1"/>
-          </a:effectRef>
-          <a:fontRef idx="minor">
-            <a:schemeClr val="lt1"/>
-          </a:fontRef>
-        </p:style>
-        <p:txBody>
-          <a:bodyPr rtlCol="0" anchor="ctr" wrap="square"/>
-          <a:lstStyle/>
-          <a:p>
-            <a:pPr algn="ctr"/>
-          </a:p>
-        </p:txBody>
-      </p:sp>
-      <p:sp>
-        <p:nvSpPr>
-          <p:cNvPr id="23" name="TextBox 22"/>
-          <p:cNvSpPr txBox="1"/>
-          <p:nvPr/>
-        </p:nvSpPr>
-        <p:spPr>
-          <a:xfrm>
-            <a:off x="4466234" y="2990088"/>
-            <a:ext cx="1373581" cy="251205"/>
-          </a:xfrm>
-          <a:prstGeom prst="rect">
-            <a:avLst/>
-          </a:prstGeom>
-          <a:noFill/>
-        </p:spPr>
-        <p:txBody>
-          <a:bodyPr wrap="square" anchor="t" lIns="0" rIns="0" tIns="0" bIns="0">
-            <a:spAutoFit/>
-          </a:bodyPr>
-          <a:lstStyle/>
-          <a:p>
-            <a:pPr algn="l"/>
-            <a:r>
-              <a:rPr sz="1300" b="1" i="0">
-                <a:solidFill>
-                  <a:srgbClr val="1A0F5C"/>
-                </a:solidFill>
-                <a:latin typeface="Calibri"/>
-              </a:rPr>
-              <a:t>Ratios</a:t>
-            </a:r>
-          </a:p>
-        </p:txBody>
-      </p:sp>
-      <p:sp>
-        <p:nvSpPr>
-          <p:cNvPr id="24" name="TextBox 23"/>
-          <p:cNvSpPr txBox="1"/>
-          <p:nvPr/>
-        </p:nvSpPr>
-        <p:spPr>
-          <a:xfrm>
-            <a:off x="4466234" y="3277870"/>
-            <a:ext cx="1373581" cy="696976"/>
-          </a:xfrm>
-          <a:prstGeom prst="rect">
-            <a:avLst/>
-          </a:prstGeom>
-          <a:noFill/>
-        </p:spPr>
-        <p:txBody>
-          <a:bodyPr wrap="square" anchor="t" lIns="0" rIns="0" tIns="0" bIns="0">
-            <a:spAutoFit/>
-          </a:bodyPr>
-          <a:lstStyle/>
-          <a:p>
-            <a:pPr algn="l"/>
-            <a:r>
-              <a:rPr sz="1000" b="0" i="0">
-                <a:solidFill>
-                  <a:srgbClr val="6B6690"/>
-                </a:solidFill>
-                <a:latin typeface="Calibri"/>
-              </a:rPr>
-              <a:t>Divide in numeric, round on purpose, and keep the counts beside the ratio.</a:t>
-            </a:r>
-          </a:p>
-        </p:txBody>
-      </p:sp>
-      <p:sp>
-        <p:nvSpPr>
-          <p:cNvPr id="25" name="TextBox 24"/>
-          <p:cNvSpPr txBox="1"/>
-          <p:nvPr/>
-        </p:nvSpPr>
-        <p:spPr>
-          <a:xfrm>
-            <a:off x="6187287" y="1956816"/>
-            <a:ext cx="1702765" cy="168656"/>
-          </a:xfrm>
-          <a:prstGeom prst="rect">
-            <a:avLst/>
-          </a:prstGeom>
-          <a:noFill/>
-        </p:spPr>
-        <p:txBody>
-          <a:bodyPr wrap="square" anchor="t" lIns="0" rIns="0" tIns="0" bIns="0">
-            <a:spAutoFit/>
-          </a:bodyPr>
-          <a:lstStyle/>
-          <a:p>
-            <a:pPr algn="ctr"/>
-            <a:r>
-              <a:rPr sz="800" b="1" i="0" spc="250">
-                <a:solidFill>
-                  <a:srgbClr val="5B3FD6"/>
-                </a:solidFill>
-                <a:latin typeface="Calibri"/>
-              </a:rPr>
-              <a:t>CHAPTER 4</a:t>
-            </a:r>
-          </a:p>
-        </p:txBody>
-      </p:sp>
-      <p:sp>
-        <p:nvSpPr>
-          <p:cNvPr id="26" name="Oval 25"/>
-          <p:cNvSpPr/>
-          <p:nvPr/>
-        </p:nvSpPr>
-        <p:spPr>
-          <a:xfrm>
-            <a:off x="6938086" y="2432304"/>
-            <a:ext cx="201168" cy="201168"/>
-          </a:xfrm>
-          <a:prstGeom prst="ellipse">
-            <a:avLst/>
-          </a:prstGeom>
-          <a:solidFill>
-            <a:srgbClr val="5B3FD6"/>
-          </a:solidFill>
-          <a:ln>
-            <a:noFill/>
-          </a:ln>
-          <a:effectLst/>
-        </p:spPr>
-        <p:style>
-          <a:lnRef idx="1">
-            <a:schemeClr val="accent1"/>
-          </a:lnRef>
-          <a:fillRef idx="3">
-            <a:schemeClr val="accent1"/>
-          </a:fillRef>
-          <a:effectRef idx="2">
-            <a:schemeClr val="accent1"/>
-          </a:effectRef>
-          <a:fontRef idx="minor">
-            <a:schemeClr val="lt1"/>
-          </a:fontRef>
-        </p:style>
-        <p:txBody>
-          <a:bodyPr rtlCol="0" anchor="ctr" wrap="square"/>
-          <a:lstStyle/>
-          <a:p>
-            <a:pPr algn="ctr"/>
-          </a:p>
-        </p:txBody>
-      </p:sp>
-      <p:sp>
-        <p:nvSpPr>
-          <p:cNvPr id="27" name="Rounded Rectangle 26"/>
-          <p:cNvSpPr/>
-          <p:nvPr/>
-        </p:nvSpPr>
-        <p:spPr>
-          <a:xfrm>
-            <a:off x="6187287" y="2843784"/>
-            <a:ext cx="1702765" cy="1595120"/>
-          </a:xfrm>
-          <a:prstGeom prst="roundRect">
-            <a:avLst>
-              <a:gd name="adj" fmla="val 5000"/>
-            </a:avLst>
-          </a:prstGeom>
-          <a:solidFill>
-            <a:srgbClr val="FFFFFF"/>
-          </a:solidFill>
-          <a:ln w="9525">
-            <a:solidFill>
-              <a:srgbClr val="E4E1F1"/>
-            </a:solidFill>
-          </a:ln>
-          <a:effectLst>
-            <a:outerShdw blurRad="76200" dist="19050" dir="5400000" algn="bl" rotWithShape="0">
-              <a:srgbClr val="1A0F5C">
-                <a:alpha val="12000"/>
-              </a:srgbClr>
-            </a:outerShdw>
-          </a:effectLst>
-        </p:spPr>
-        <p:style>
-          <a:lnRef idx="1">
-            <a:schemeClr val="accent1"/>
-          </a:lnRef>
-          <a:fillRef idx="3">
-            <a:schemeClr val="accent1"/>
-          </a:fillRef>
-          <a:effectRef idx="2">
-            <a:schemeClr val="accent1"/>
-          </a:effectRef>
-          <a:fontRef idx="minor">
-            <a:schemeClr val="lt1"/>
-          </a:fontRef>
-        </p:style>
-        <p:txBody>
-          <a:bodyPr rtlCol="0" anchor="ctr" wrap="square"/>
-          <a:lstStyle/>
-          <a:p>
-            <a:pPr algn="ctr"/>
-          </a:p>
-        </p:txBody>
-      </p:sp>
-      <p:sp>
-        <p:nvSpPr>
-          <p:cNvPr id="28" name="TextBox 27"/>
-          <p:cNvSpPr txBox="1"/>
-          <p:nvPr/>
-        </p:nvSpPr>
-        <p:spPr>
-          <a:xfrm>
-            <a:off x="6351879" y="2990088"/>
-            <a:ext cx="1373581" cy="251205"/>
-          </a:xfrm>
-          <a:prstGeom prst="rect">
-            <a:avLst/>
-          </a:prstGeom>
-          <a:noFill/>
-        </p:spPr>
-        <p:txBody>
-          <a:bodyPr wrap="square" anchor="t" lIns="0" rIns="0" tIns="0" bIns="0">
-            <a:spAutoFit/>
-          </a:bodyPr>
-          <a:lstStyle/>
-          <a:p>
-            <a:pPr algn="l"/>
-            <a:r>
-              <a:rPr sz="1300" b="1" i="0">
-                <a:solidFill>
-                  <a:srgbClr val="1A0F5C"/>
-                </a:solidFill>
-                <a:latin typeface="Calibri"/>
-              </a:rPr>
-              <a:t>Averages</a:t>
-            </a:r>
-          </a:p>
-        </p:txBody>
-      </p:sp>
-      <p:sp>
-        <p:nvSpPr>
-          <p:cNvPr id="29" name="TextBox 28"/>
-          <p:cNvSpPr txBox="1"/>
-          <p:nvPr/>
-        </p:nvSpPr>
-        <p:spPr>
-          <a:xfrm>
-            <a:off x="6351879" y="3277870"/>
-            <a:ext cx="1373581" cy="696976"/>
-          </a:xfrm>
-          <a:prstGeom prst="rect">
-            <a:avLst/>
-          </a:prstGeom>
-          <a:noFill/>
-        </p:spPr>
-        <p:txBody>
-          <a:bodyPr wrap="square" anchor="t" lIns="0" rIns="0" tIns="0" bIns="0">
-            <a:spAutoFit/>
-          </a:bodyPr>
-          <a:lstStyle/>
-          <a:p>
-            <a:pPr algn="l"/>
-            <a:r>
-              <a:rPr sz="1000" b="0" i="0">
-                <a:solidFill>
-                  <a:srgbClr val="6B6690"/>
-                </a:solidFill>
-                <a:latin typeface="Calibri"/>
-              </a:rPr>
-              <a:t>An average names who is inside it, so write the zero on purpose.</a:t>
-            </a:r>
-          </a:p>
-        </p:txBody>
-      </p:sp>
-      <p:sp>
-        <p:nvSpPr>
-          <p:cNvPr id="30" name="TextBox 29"/>
-          <p:cNvSpPr txBox="1"/>
-          <p:nvPr/>
-        </p:nvSpPr>
-        <p:spPr>
-          <a:xfrm>
-            <a:off x="8072932" y="1956816"/>
-            <a:ext cx="1702765" cy="168656"/>
-          </a:xfrm>
-          <a:prstGeom prst="rect">
-            <a:avLst/>
-          </a:prstGeom>
-          <a:noFill/>
-        </p:spPr>
-        <p:txBody>
-          <a:bodyPr wrap="square" anchor="t" lIns="0" rIns="0" tIns="0" bIns="0">
-            <a:spAutoFit/>
-          </a:bodyPr>
-          <a:lstStyle/>
-          <a:p>
-            <a:pPr algn="ctr"/>
-            <a:r>
-              <a:rPr sz="800" b="1" i="0" spc="250">
-                <a:solidFill>
-                  <a:srgbClr val="5B3FD6"/>
-                </a:solidFill>
-                <a:latin typeface="Calibri"/>
-              </a:rPr>
-              <a:t>CHAPTER 5</a:t>
-            </a:r>
-          </a:p>
-        </p:txBody>
-      </p:sp>
-      <p:sp>
-        <p:nvSpPr>
-          <p:cNvPr id="31" name="Oval 30"/>
-          <p:cNvSpPr/>
-          <p:nvPr/>
-        </p:nvSpPr>
-        <p:spPr>
-          <a:xfrm>
-            <a:off x="8823731" y="2432304"/>
-            <a:ext cx="201168" cy="201168"/>
-          </a:xfrm>
-          <a:prstGeom prst="ellipse">
-            <a:avLst/>
-          </a:prstGeom>
-          <a:solidFill>
-            <a:srgbClr val="5B3FD6"/>
-          </a:solidFill>
-          <a:ln>
-            <a:noFill/>
-          </a:ln>
-          <a:effectLst/>
-        </p:spPr>
-        <p:style>
-          <a:lnRef idx="1">
-            <a:schemeClr val="accent1"/>
-          </a:lnRef>
-          <a:fillRef idx="3">
-            <a:schemeClr val="accent1"/>
-          </a:fillRef>
-          <a:effectRef idx="2">
-            <a:schemeClr val="accent1"/>
-          </a:effectRef>
-          <a:fontRef idx="minor">
-            <a:schemeClr val="lt1"/>
-          </a:fontRef>
-        </p:style>
-        <p:txBody>
-          <a:bodyPr rtlCol="0" anchor="ctr" wrap="square"/>
-          <a:lstStyle/>
-          <a:p>
-            <a:pPr algn="ctr"/>
-          </a:p>
-        </p:txBody>
-      </p:sp>
-      <p:sp>
-        <p:nvSpPr>
-          <p:cNvPr id="32" name="Rounded Rectangle 31"/>
-          <p:cNvSpPr/>
-          <p:nvPr/>
-        </p:nvSpPr>
-        <p:spPr>
-          <a:xfrm>
-            <a:off x="8072932" y="2843784"/>
-            <a:ext cx="1702765" cy="1595120"/>
-          </a:xfrm>
-          <a:prstGeom prst="roundRect">
-            <a:avLst>
-              <a:gd name="adj" fmla="val 5000"/>
-            </a:avLst>
-          </a:prstGeom>
-          <a:solidFill>
-            <a:srgbClr val="FFFFFF"/>
-          </a:solidFill>
-          <a:ln w="9525">
-            <a:solidFill>
-              <a:srgbClr val="E4E1F1"/>
-            </a:solidFill>
-          </a:ln>
-          <a:effectLst>
-            <a:outerShdw blurRad="76200" dist="19050" dir="5400000" algn="bl" rotWithShape="0">
-              <a:srgbClr val="1A0F5C">
-                <a:alpha val="12000"/>
-              </a:srgbClr>
-            </a:outerShdw>
-          </a:effectLst>
-        </p:spPr>
-        <p:style>
-          <a:lnRef idx="1">
-            <a:schemeClr val="accent1"/>
-          </a:lnRef>
-          <a:fillRef idx="3">
-            <a:schemeClr val="accent1"/>
-          </a:fillRef>
-          <a:effectRef idx="2">
-            <a:schemeClr val="accent1"/>
-          </a:effectRef>
-          <a:fontRef idx="minor">
-            <a:schemeClr val="lt1"/>
-          </a:fontRef>
-        </p:style>
-        <p:txBody>
-          <a:bodyPr rtlCol="0" anchor="ctr" wrap="square"/>
-          <a:lstStyle/>
-          <a:p>
-            <a:pPr algn="ctr"/>
-          </a:p>
-        </p:txBody>
-      </p:sp>
-      <p:sp>
-        <p:nvSpPr>
-          <p:cNvPr id="33" name="TextBox 32"/>
-          <p:cNvSpPr txBox="1"/>
-          <p:nvPr/>
-        </p:nvSpPr>
-        <p:spPr>
-          <a:xfrm>
-            <a:off x="8237524" y="2990088"/>
-            <a:ext cx="1373581" cy="251205"/>
-          </a:xfrm>
-          <a:prstGeom prst="rect">
-            <a:avLst/>
-          </a:prstGeom>
-          <a:noFill/>
-        </p:spPr>
-        <p:txBody>
-          <a:bodyPr wrap="square" anchor="t" lIns="0" rIns="0" tIns="0" bIns="0">
-            <a:spAutoFit/>
-          </a:bodyPr>
-          <a:lstStyle/>
-          <a:p>
-            <a:pPr algn="l"/>
-            <a:r>
-              <a:rPr sz="1300" b="1" i="0">
-                <a:solidFill>
-                  <a:srgbClr val="1A0F5C"/>
-                </a:solidFill>
-                <a:latin typeface="Calibri"/>
-              </a:rPr>
-              <a:t>Sums</a:t>
-            </a:r>
-          </a:p>
-        </p:txBody>
-      </p:sp>
-      <p:sp>
-        <p:nvSpPr>
-          <p:cNvPr id="34" name="TextBox 33"/>
-          <p:cNvSpPr txBox="1"/>
-          <p:nvPr/>
-        </p:nvSpPr>
-        <p:spPr>
-          <a:xfrm>
-            <a:off x="8237524" y="3277870"/>
-            <a:ext cx="1373581" cy="862076"/>
-          </a:xfrm>
-          <a:prstGeom prst="rect">
-            <a:avLst/>
-          </a:prstGeom>
-          <a:noFill/>
-        </p:spPr>
-        <p:txBody>
-          <a:bodyPr wrap="square" anchor="t" lIns="0" rIns="0" tIns="0" bIns="0">
-            <a:spAutoFit/>
-          </a:bodyPr>
-          <a:lstStyle/>
-          <a:p>
-            <a:pPr algn="l"/>
-            <a:r>
-              <a:rPr sz="1000" b="0" i="0">
-                <a:solidFill>
-                  <a:srgbClr val="6B6690"/>
-                </a:solidFill>
-                <a:latin typeface="Calibri"/>
-              </a:rPr>
-              <a:t>Orders and rupees add across quarters; customers are counted again from the orders.</a:t>
-            </a:r>
-          </a:p>
-        </p:txBody>
-      </p:sp>
-      <p:sp>
-        <p:nvSpPr>
-          <p:cNvPr id="35" name="TextBox 34"/>
-          <p:cNvSpPr txBox="1"/>
-          <p:nvPr/>
-        </p:nvSpPr>
-        <p:spPr>
-          <a:xfrm>
-            <a:off x="9958578" y="1956816"/>
-            <a:ext cx="1702765" cy="168656"/>
-          </a:xfrm>
-          <a:prstGeom prst="rect">
-            <a:avLst/>
-          </a:prstGeom>
-          <a:noFill/>
-        </p:spPr>
-        <p:txBody>
-          <a:bodyPr wrap="square" anchor="t" lIns="0" rIns="0" tIns="0" bIns="0">
-            <a:spAutoFit/>
-          </a:bodyPr>
-          <a:lstStyle/>
-          <a:p>
-            <a:pPr algn="ctr"/>
-            <a:r>
-              <a:rPr sz="800" b="1" i="0" spc="250">
-                <a:solidFill>
-                  <a:srgbClr val="5B3FD6"/>
-                </a:solidFill>
-                <a:latin typeface="Calibri"/>
-              </a:rPr>
-              <a:t>CHAPTER 6</a:t>
-            </a:r>
-          </a:p>
-        </p:txBody>
-      </p:sp>
-      <p:sp>
-        <p:nvSpPr>
-          <p:cNvPr id="36" name="Oval 35"/>
-          <p:cNvSpPr/>
-          <p:nvPr/>
-        </p:nvSpPr>
-        <p:spPr>
-          <a:xfrm>
-            <a:off x="10709376" y="2432304"/>
-            <a:ext cx="201168" cy="201168"/>
-          </a:xfrm>
-          <a:prstGeom prst="ellipse">
-            <a:avLst/>
-          </a:prstGeom>
-          <a:solidFill>
-            <a:srgbClr val="D9A7FF"/>
-          </a:solidFill>
-          <a:ln>
-            <a:noFill/>
-          </a:ln>
-          <a:effectLst/>
-        </p:spPr>
-        <p:style>
-          <a:lnRef idx="1">
-            <a:schemeClr val="accent1"/>
-          </a:lnRef>
-          <a:fillRef idx="3">
-            <a:schemeClr val="accent1"/>
-          </a:fillRef>
-          <a:effectRef idx="2">
-            <a:schemeClr val="accent1"/>
-          </a:effectRef>
-          <a:fontRef idx="minor">
-            <a:schemeClr val="lt1"/>
-          </a:fontRef>
-        </p:style>
-        <p:txBody>
-          <a:bodyPr rtlCol="0" anchor="ctr" wrap="square"/>
-          <a:lstStyle/>
-          <a:p>
-            <a:pPr algn="ctr"/>
-          </a:p>
-        </p:txBody>
-      </p:sp>
-      <p:sp>
-        <p:nvSpPr>
-          <p:cNvPr id="37" name="Rounded Rectangle 36"/>
-          <p:cNvSpPr/>
-          <p:nvPr/>
-        </p:nvSpPr>
-        <p:spPr>
-          <a:xfrm>
-            <a:off x="9958578" y="2843784"/>
-            <a:ext cx="1702765" cy="1595120"/>
-          </a:xfrm>
-          <a:prstGeom prst="roundRect">
-            <a:avLst>
-              <a:gd name="adj" fmla="val 5000"/>
-            </a:avLst>
-          </a:prstGeom>
-          <a:gradFill rotWithShape="1">
-            <a:gsLst>
-              <a:gs pos="0">
-                <a:srgbClr val="2C1A86"/>
-              </a:gs>
-              <a:gs pos="100000">
-                <a:srgbClr val="1A0F5C"/>
-              </a:gs>
-            </a:gsLst>
-            <a:lin scaled="0" ang="16200000"/>
-          </a:gradFill>
-          <a:ln>
-            <a:noFill/>
-          </a:ln>
-          <a:effectLst>
-            <a:outerShdw blurRad="76200" dist="19050" dir="5400000" algn="bl" rotWithShape="0">
-              <a:srgbClr val="1A0F5C">
-                <a:alpha val="12000"/>
-              </a:srgbClr>
-            </a:outerShdw>
-          </a:effectLst>
-        </p:spPr>
-        <p:style>
-          <a:lnRef idx="1">
-            <a:schemeClr val="accent1"/>
-          </a:lnRef>
-          <a:fillRef idx="3">
-            <a:schemeClr val="accent1"/>
-          </a:fillRef>
-          <a:effectRef idx="2">
-            <a:schemeClr val="accent1"/>
-          </a:effectRef>
-          <a:fontRef idx="minor">
-            <a:schemeClr val="lt1"/>
-          </a:fontRef>
-        </p:style>
-        <p:txBody>
-          <a:bodyPr rtlCol="0" anchor="ctr" wrap="square"/>
-          <a:lstStyle/>
-          <a:p>
-            <a:pPr algn="ctr"/>
-          </a:p>
-        </p:txBody>
-      </p:sp>
-      <p:sp>
-        <p:nvSpPr>
-          <p:cNvPr id="38" name="TextBox 37"/>
-          <p:cNvSpPr txBox="1"/>
-          <p:nvPr/>
-        </p:nvSpPr>
-        <p:spPr>
-          <a:xfrm>
-            <a:off x="10123170" y="2990088"/>
-            <a:ext cx="1373581" cy="251205"/>
-          </a:xfrm>
-          <a:prstGeom prst="rect">
-            <a:avLst/>
-          </a:prstGeom>
-          <a:noFill/>
-        </p:spPr>
-        <p:txBody>
-          <a:bodyPr wrap="square" anchor="t" lIns="0" rIns="0" tIns="0" bIns="0">
-            <a:spAutoFit/>
-          </a:bodyPr>
-          <a:lstStyle/>
-          <a:p>
-            <a:pPr algn="l"/>
-            <a:r>
-              <a:rPr sz="1300" b="1" i="0">
-                <a:solidFill>
-                  <a:srgbClr val="FFFFFF"/>
-                </a:solidFill>
-                <a:latin typeface="Calibri"/>
-              </a:rPr>
-              <a:t>Runs</a:t>
-            </a:r>
-          </a:p>
-        </p:txBody>
-      </p:sp>
-      <p:sp>
-        <p:nvSpPr>
-          <p:cNvPr id="39" name="TextBox 38"/>
-          <p:cNvSpPr txBox="1"/>
-          <p:nvPr/>
-        </p:nvSpPr>
-        <p:spPr>
-          <a:xfrm>
-            <a:off x="10123170" y="3277870"/>
-            <a:ext cx="1373581" cy="862076"/>
-          </a:xfrm>
-          <a:prstGeom prst="rect">
-            <a:avLst/>
-          </a:prstGeom>
-          <a:noFill/>
-        </p:spPr>
-        <p:txBody>
-          <a:bodyPr wrap="square" anchor="t" lIns="0" rIns="0" tIns="0" bIns="0">
-            <a:spAutoFit/>
-          </a:bodyPr>
-          <a:lstStyle/>
-          <a:p>
-            <a:pPr algn="l"/>
-            <a:r>
-              <a:rPr sz="1000" b="0" i="0">
-                <a:solidFill>
-                  <a:srgbClr val="CFC9EE"/>
-                </a:solidFill>
-                <a:latin typeface="Calibri"/>
-              </a:rPr>
-              <a:t>Order every list on a column no two rows share, and print the book's fingerprint beside the numbers.</a:t>
-            </a:r>
-          </a:p>
-        </p:txBody>
-      </p:sp>
-      <p:sp>
-        <p:nvSpPr>
-          <p:cNvPr id="40" name="Oval 39"/>
-          <p:cNvSpPr/>
-          <p:nvPr/>
-        </p:nvSpPr>
-        <p:spPr>
-          <a:xfrm>
-            <a:off x="530352" y="6492240"/>
-            <a:ext cx="64008" cy="64008"/>
-          </a:xfrm>
-          <a:prstGeom prst="ellipse">
-            <a:avLst/>
-          </a:prstGeom>
-          <a:solidFill>
-            <a:srgbClr val="CFC9EE"/>
-          </a:solidFill>
-          <a:ln>
-            <a:noFill/>
-          </a:ln>
-          <a:effectLst/>
-        </p:spPr>
-        <p:style>
-          <a:lnRef idx="1">
-            <a:schemeClr val="accent1"/>
-          </a:lnRef>
-          <a:fillRef idx="3">
-            <a:schemeClr val="accent1"/>
-          </a:fillRef>
-          <a:effectRef idx="2">
-            <a:schemeClr val="accent1"/>
-          </a:effectRef>
-          <a:fontRef idx="minor">
-            <a:schemeClr val="lt1"/>
-          </a:fontRef>
-        </p:style>
-        <p:txBody>
-          <a:bodyPr rtlCol="0" anchor="ctr" wrap="square"/>
-          <a:lstStyle/>
-          <a:p>
-            <a:pPr algn="ctr"/>
-          </a:p>
-        </p:txBody>
-      </p:sp>
-      <p:sp>
-        <p:nvSpPr>
-          <p:cNvPr id="41" name="TextBox 40"/>
-          <p:cNvSpPr txBox="1"/>
-          <p:nvPr/>
-        </p:nvSpPr>
-        <p:spPr>
-          <a:xfrm>
-            <a:off x="640080" y="6437376"/>
-            <a:ext cx="1286446" cy="152146"/>
-          </a:xfrm>
-          <a:prstGeom prst="rect">
-            <a:avLst/>
-          </a:prstGeom>
-          <a:noFill/>
-        </p:spPr>
-        <p:txBody>
-          <a:bodyPr wrap="square" anchor="t" lIns="0" rIns="0" tIns="0" bIns="0">
-            <a:spAutoFit/>
-          </a:bodyPr>
-          <a:lstStyle/>
-          <a:p>
-            <a:pPr algn="l"/>
-            <a:r>
-              <a:rPr sz="700" b="0" i="0">
-                <a:solidFill>
-                  <a:srgbClr val="6B6690"/>
-                </a:solidFill>
-                <a:latin typeface="Calibri"/>
-              </a:rPr>
-              <a:t>Same answer next week?</a:t>
-            </a:r>
-          </a:p>
-        </p:txBody>
-      </p:sp>
-      <p:sp>
-        <p:nvSpPr>
-          <p:cNvPr id="42" name="Oval 41"/>
-          <p:cNvSpPr/>
-          <p:nvPr/>
-        </p:nvSpPr>
-        <p:spPr>
-          <a:xfrm>
-            <a:off x="2017966" y="6492240"/>
-            <a:ext cx="64008" cy="64008"/>
-          </a:xfrm>
-          <a:prstGeom prst="ellipse">
-            <a:avLst/>
-          </a:prstGeom>
-          <a:solidFill>
-            <a:srgbClr val="CFC9EE"/>
-          </a:solidFill>
-          <a:ln>
-            <a:noFill/>
-          </a:ln>
-          <a:effectLst/>
-        </p:spPr>
-        <p:style>
-          <a:lnRef idx="1">
-            <a:schemeClr val="accent1"/>
-          </a:lnRef>
-          <a:fillRef idx="3">
-            <a:schemeClr val="accent1"/>
-          </a:fillRef>
-          <a:effectRef idx="2">
-            <a:schemeClr val="accent1"/>
-          </a:effectRef>
-          <a:fontRef idx="minor">
-            <a:schemeClr val="lt1"/>
-          </a:fontRef>
-        </p:style>
-        <p:txBody>
-          <a:bodyPr rtlCol="0" anchor="ctr" wrap="square"/>
-          <a:lstStyle/>
-          <a:p>
-            <a:pPr algn="ctr"/>
-          </a:p>
-        </p:txBody>
-      </p:sp>
-      <p:sp>
-        <p:nvSpPr>
-          <p:cNvPr id="43" name="TextBox 42"/>
-          <p:cNvSpPr txBox="1"/>
-          <p:nvPr/>
-        </p:nvSpPr>
-        <p:spPr>
-          <a:xfrm>
-            <a:off x="2127694" y="6437376"/>
-            <a:ext cx="1194435" cy="152146"/>
-          </a:xfrm>
-          <a:prstGeom prst="rect">
-            <a:avLst/>
-          </a:prstGeom>
-          <a:noFill/>
-        </p:spPr>
-        <p:txBody>
-          <a:bodyPr wrap="square" anchor="t" lIns="0" rIns="0" tIns="0" bIns="0">
-            <a:spAutoFit/>
-          </a:bodyPr>
-          <a:lstStyle/>
-          <a:p>
-            <a:pPr algn="l"/>
-            <a:r>
-              <a:rPr sz="700" b="0" i="0">
-                <a:solidFill>
-                  <a:srgbClr val="6B6690"/>
-                </a:solidFill>
-                <a:latin typeface="Calibri"/>
-              </a:rPr>
-              <a:t>Can you do it alone?</a:t>
-            </a:r>
-          </a:p>
-        </p:txBody>
-      </p:sp>
-      <p:sp>
-        <p:nvSpPr>
-          <p:cNvPr id="44" name="Oval 43"/>
-          <p:cNvSpPr/>
-          <p:nvPr/>
-        </p:nvSpPr>
-        <p:spPr>
-          <a:xfrm>
-            <a:off x="3413569" y="6492240"/>
-            <a:ext cx="64008" cy="64008"/>
-          </a:xfrm>
-          <a:prstGeom prst="ellipse">
-            <a:avLst/>
-          </a:prstGeom>
-          <a:solidFill>
-            <a:srgbClr val="5B3FD6"/>
-          </a:solidFill>
-          <a:ln>
-            <a:noFill/>
-          </a:ln>
-          <a:effectLst/>
-        </p:spPr>
-        <p:style>
-          <a:lnRef idx="1">
-            <a:schemeClr val="accent1"/>
-          </a:lnRef>
-          <a:fillRef idx="3">
-            <a:schemeClr val="accent1"/>
-          </a:fillRef>
-          <a:effectRef idx="2">
-            <a:schemeClr val="accent1"/>
-          </a:effectRef>
-          <a:fontRef idx="minor">
-            <a:schemeClr val="lt1"/>
-          </a:fontRef>
-        </p:style>
-        <p:txBody>
-          <a:bodyPr rtlCol="0" anchor="ctr" wrap="square"/>
-          <a:lstStyle/>
-          <a:p>
-            <a:pPr algn="ctr"/>
-          </a:p>
-        </p:txBody>
-      </p:sp>
-      <p:sp>
-        <p:nvSpPr>
-          <p:cNvPr id="45" name="TextBox 44"/>
+          <p:cNvPr id="31" name="TextBox 30"/>
           <p:cNvSpPr txBox="1"/>
           <p:nvPr/>
         </p:nvSpPr>
@@ -20808,7 +20256,7 @@
       </p:sp>
       <p:sp>
         <p:nvSpPr>
-          <p:cNvPr id="46" name="TextBox 45"/>
+          <p:cNvPr id="32" name="TextBox 31"/>
           <p:cNvSpPr txBox="1"/>
           <p:nvPr/>
         </p:nvSpPr>
@@ -20836,7 +20284,7 @@
                 </a:solidFill>
                 <a:latin typeface="Calibri"/>
               </a:rPr>
-              <a:t>S18  ·  22 / 27</a:t>
+              <a:t>S18  ·  22 / 28</a:t>
             </a:r>
           </a:p>
         </p:txBody>
@@ -21042,7 +20490,7 @@
                 </a:solidFill>
                 <a:latin typeface="Georgia"/>
               </a:rPr>
-              <a:t>The Kahoot: eight items, none of them graded</a:t>
+              <a:t>Six lines worth keeping, one per chapter</a:t>
             </a:r>
           </a:p>
         </p:txBody>
@@ -21077,494 +20525,23 @@
                 </a:solidFill>
                 <a:latin typeface="Calibri"/>
               </a:rPr>
-              <a:t>Which of the day's decisions can the room make in twenty seconds each?</a:t>
-            </a:r>
-          </a:p>
-        </p:txBody>
-      </p:sp>
-      <p:sp>
-        <p:nvSpPr>
-          <p:cNvPr id="9" name="TextBox 8"/>
-          <p:cNvSpPr txBox="1"/>
-          <p:nvPr/>
-        </p:nvSpPr>
-        <p:spPr>
-          <a:xfrm>
-            <a:off x="530352" y="1956816"/>
-            <a:ext cx="3527450" cy="698500"/>
-          </a:xfrm>
-          <a:prstGeom prst="rect">
-            <a:avLst/>
-          </a:prstGeom>
-          <a:noFill/>
-        </p:spPr>
-        <p:txBody>
-          <a:bodyPr wrap="square" anchor="t" lIns="0" rIns="0" tIns="0" bIns="0">
-            <a:spAutoFit/>
-          </a:bodyPr>
-          <a:lstStyle/>
-          <a:p>
-            <a:pPr algn="l"/>
-            <a:r>
-              <a:rPr sz="4400" b="0" i="0">
-                <a:solidFill>
-                  <a:srgbClr val="5B3FD6"/>
-                </a:solidFill>
-                <a:latin typeface="Georgia"/>
-              </a:rPr>
-              <a:t>8</a:t>
-            </a:r>
-          </a:p>
-        </p:txBody>
-      </p:sp>
-      <p:sp>
-        <p:nvSpPr>
-          <p:cNvPr id="10" name="TextBox 9"/>
-          <p:cNvSpPr txBox="1"/>
-          <p:nvPr/>
-        </p:nvSpPr>
-        <p:spPr>
-          <a:xfrm>
-            <a:off x="530352" y="2691892"/>
-            <a:ext cx="3527450" cy="168656"/>
-          </a:xfrm>
-          <a:prstGeom prst="rect">
-            <a:avLst/>
-          </a:prstGeom>
-          <a:noFill/>
-        </p:spPr>
-        <p:txBody>
-          <a:bodyPr wrap="square" anchor="t" lIns="0" rIns="0" tIns="0" bIns="0">
-            <a:spAutoFit/>
-          </a:bodyPr>
-          <a:lstStyle/>
-          <a:p>
-            <a:pPr algn="l"/>
-            <a:r>
-              <a:rPr sz="800" b="1" i="0" spc="250">
-                <a:solidFill>
-                  <a:srgbClr val="1A0F5C"/>
-                </a:solidFill>
-                <a:latin typeface="Calibri"/>
-              </a:rPr>
-              <a:t>ITEMS</a:t>
-            </a:r>
-          </a:p>
-        </p:txBody>
-      </p:sp>
-      <p:sp>
-        <p:nvSpPr>
-          <p:cNvPr id="11" name="TextBox 10"/>
-          <p:cNvSpPr txBox="1"/>
-          <p:nvPr/>
-        </p:nvSpPr>
-        <p:spPr>
-          <a:xfrm>
-            <a:off x="530352" y="2893060"/>
-            <a:ext cx="3527450" cy="193421"/>
-          </a:xfrm>
-          <a:prstGeom prst="rect">
-            <a:avLst/>
-          </a:prstGeom>
-          <a:noFill/>
-        </p:spPr>
-        <p:txBody>
-          <a:bodyPr wrap="square" anchor="t" lIns="0" rIns="0" tIns="0" bIns="0">
-            <a:spAutoFit/>
-          </a:bodyPr>
-          <a:lstStyle/>
-          <a:p>
-            <a:pPr algn="l"/>
-            <a:r>
-              <a:rPr sz="950" b="0" i="0">
-                <a:solidFill>
-                  <a:srgbClr val="6B6690"/>
-                </a:solidFill>
-                <a:latin typeface="Calibri"/>
-              </a:rPr>
-              <a:t>seven on today, one returning from Week 1 Thursday</a:t>
-            </a:r>
-          </a:p>
-        </p:txBody>
-      </p:sp>
-      <p:sp>
-        <p:nvSpPr>
-          <p:cNvPr id="12" name="Rectangle 11"/>
+              <a:t>Which line does each chapter leave the Monday suite with?</a:t>
+            </a:r>
+          </a:p>
+        </p:txBody>
+      </p:sp>
+      <p:sp>
+        <p:nvSpPr>
+          <p:cNvPr id="9" name="Rectangle 8"/>
           <p:cNvSpPr/>
           <p:nvPr/>
         </p:nvSpPr>
         <p:spPr>
           <a:xfrm>
-            <a:off x="530352" y="3145536"/>
-            <a:ext cx="3527450" cy="10972"/>
-          </a:xfrm>
-          <a:prstGeom prst="rect">
-            <a:avLst/>
-          </a:prstGeom>
-          <a:solidFill>
-            <a:srgbClr val="E4E1F1"/>
-          </a:solidFill>
-          <a:ln>
-            <a:noFill/>
-          </a:ln>
-          <a:effectLst/>
-        </p:spPr>
-        <p:style>
-          <a:lnRef idx="1">
-            <a:schemeClr val="accent1"/>
-          </a:lnRef>
-          <a:fillRef idx="3">
-            <a:schemeClr val="accent1"/>
-          </a:fillRef>
-          <a:effectRef idx="2">
-            <a:schemeClr val="accent1"/>
-          </a:effectRef>
-          <a:fontRef idx="minor">
-            <a:schemeClr val="lt1"/>
-          </a:fontRef>
-        </p:style>
-        <p:txBody>
-          <a:bodyPr rtlCol="0" anchor="ctr" wrap="square"/>
-          <a:lstStyle/>
-          <a:p>
-            <a:pPr algn="ctr"/>
-          </a:p>
-        </p:txBody>
-      </p:sp>
-      <p:sp>
-        <p:nvSpPr>
-          <p:cNvPr id="13" name="TextBox 12"/>
-          <p:cNvSpPr txBox="1"/>
-          <p:nvPr/>
-        </p:nvSpPr>
-        <p:spPr>
-          <a:xfrm>
-            <a:off x="4332122" y="1956816"/>
-            <a:ext cx="3527450" cy="698500"/>
-          </a:xfrm>
-          <a:prstGeom prst="rect">
-            <a:avLst/>
-          </a:prstGeom>
-          <a:noFill/>
-        </p:spPr>
-        <p:txBody>
-          <a:bodyPr wrap="square" anchor="t" lIns="0" rIns="0" tIns="0" bIns="0">
-            <a:spAutoFit/>
-          </a:bodyPr>
-          <a:lstStyle/>
-          <a:p>
-            <a:pPr algn="l"/>
-            <a:r>
-              <a:rPr sz="4400" b="0" i="0">
-                <a:solidFill>
-                  <a:srgbClr val="5B3FD6"/>
-                </a:solidFill>
-                <a:latin typeface="Georgia"/>
-              </a:rPr>
-              <a:t>0</a:t>
-            </a:r>
-          </a:p>
-        </p:txBody>
-      </p:sp>
-      <p:sp>
-        <p:nvSpPr>
-          <p:cNvPr id="14" name="TextBox 13"/>
-          <p:cNvSpPr txBox="1"/>
-          <p:nvPr/>
-        </p:nvSpPr>
-        <p:spPr>
-          <a:xfrm>
-            <a:off x="4332122" y="2691892"/>
-            <a:ext cx="3527450" cy="168656"/>
-          </a:xfrm>
-          <a:prstGeom prst="rect">
-            <a:avLst/>
-          </a:prstGeom>
-          <a:noFill/>
-        </p:spPr>
-        <p:txBody>
-          <a:bodyPr wrap="square" anchor="t" lIns="0" rIns="0" tIns="0" bIns="0">
-            <a:spAutoFit/>
-          </a:bodyPr>
-          <a:lstStyle/>
-          <a:p>
-            <a:pPr algn="l"/>
-            <a:r>
-              <a:rPr sz="800" b="1" i="0" spc="250">
-                <a:solidFill>
-                  <a:srgbClr val="1A0F5C"/>
-                </a:solidFill>
-                <a:latin typeface="Calibri"/>
-              </a:rPr>
-              <a:t>GRADES</a:t>
-            </a:r>
-          </a:p>
-        </p:txBody>
-      </p:sp>
-      <p:sp>
-        <p:nvSpPr>
-          <p:cNvPr id="15" name="TextBox 14"/>
-          <p:cNvSpPr txBox="1"/>
-          <p:nvPr/>
-        </p:nvSpPr>
-        <p:spPr>
-          <a:xfrm>
-            <a:off x="4332122" y="2893060"/>
-            <a:ext cx="3527450" cy="193421"/>
-          </a:xfrm>
-          <a:prstGeom prst="rect">
-            <a:avLst/>
-          </a:prstGeom>
-          <a:noFill/>
-        </p:spPr>
-        <p:txBody>
-          <a:bodyPr wrap="square" anchor="t" lIns="0" rIns="0" tIns="0" bIns="0">
-            <a:spAutoFit/>
-          </a:bodyPr>
-          <a:lstStyle/>
-          <a:p>
-            <a:pPr algn="l"/>
-            <a:r>
-              <a:rPr sz="950" b="0" i="0">
-                <a:solidFill>
-                  <a:srgbClr val="6B6690"/>
-                </a:solidFill>
-                <a:latin typeface="Calibri"/>
-              </a:rPr>
-              <a:t>the Kahoot is daily and ungraded</a:t>
-            </a:r>
-          </a:p>
-        </p:txBody>
-      </p:sp>
-      <p:sp>
-        <p:nvSpPr>
-          <p:cNvPr id="16" name="Rectangle 15"/>
-          <p:cNvSpPr/>
-          <p:nvPr/>
-        </p:nvSpPr>
-        <p:spPr>
-          <a:xfrm>
-            <a:off x="4332122" y="3145536"/>
-            <a:ext cx="3527450" cy="10972"/>
-          </a:xfrm>
-          <a:prstGeom prst="rect">
-            <a:avLst/>
-          </a:prstGeom>
-          <a:solidFill>
-            <a:srgbClr val="E4E1F1"/>
-          </a:solidFill>
-          <a:ln>
-            <a:noFill/>
-          </a:ln>
-          <a:effectLst/>
-        </p:spPr>
-        <p:style>
-          <a:lnRef idx="1">
-            <a:schemeClr val="accent1"/>
-          </a:lnRef>
-          <a:fillRef idx="3">
-            <a:schemeClr val="accent1"/>
-          </a:fillRef>
-          <a:effectRef idx="2">
-            <a:schemeClr val="accent1"/>
-          </a:effectRef>
-          <a:fontRef idx="minor">
-            <a:schemeClr val="lt1"/>
-          </a:fontRef>
-        </p:style>
-        <p:txBody>
-          <a:bodyPr rtlCol="0" anchor="ctr" wrap="square"/>
-          <a:lstStyle/>
-          <a:p>
-            <a:pPr algn="ctr"/>
-          </a:p>
-        </p:txBody>
-      </p:sp>
-      <p:sp>
-        <p:nvSpPr>
-          <p:cNvPr id="17" name="TextBox 16"/>
-          <p:cNvSpPr txBox="1"/>
-          <p:nvPr/>
-        </p:nvSpPr>
-        <p:spPr>
-          <a:xfrm>
-            <a:off x="8133892" y="1956816"/>
-            <a:ext cx="3527450" cy="698500"/>
-          </a:xfrm>
-          <a:prstGeom prst="rect">
-            <a:avLst/>
-          </a:prstGeom>
-          <a:noFill/>
-        </p:spPr>
-        <p:txBody>
-          <a:bodyPr wrap="square" anchor="t" lIns="0" rIns="0" tIns="0" bIns="0">
-            <a:spAutoFit/>
-          </a:bodyPr>
-          <a:lstStyle/>
-          <a:p>
-            <a:pPr algn="l"/>
-            <a:r>
-              <a:rPr sz="4400" b="0" i="0">
-                <a:solidFill>
-                  <a:srgbClr val="5B3FD6"/>
-                </a:solidFill>
-                <a:latin typeface="Georgia"/>
-              </a:rPr>
-              <a:t>20 s</a:t>
-            </a:r>
-          </a:p>
-        </p:txBody>
-      </p:sp>
-      <p:sp>
-        <p:nvSpPr>
-          <p:cNvPr id="18" name="TextBox 17"/>
-          <p:cNvSpPr txBox="1"/>
-          <p:nvPr/>
-        </p:nvSpPr>
-        <p:spPr>
-          <a:xfrm>
-            <a:off x="8133892" y="2691892"/>
-            <a:ext cx="3527450" cy="168656"/>
-          </a:xfrm>
-          <a:prstGeom prst="rect">
-            <a:avLst/>
-          </a:prstGeom>
-          <a:noFill/>
-        </p:spPr>
-        <p:txBody>
-          <a:bodyPr wrap="square" anchor="t" lIns="0" rIns="0" tIns="0" bIns="0">
-            <a:spAutoFit/>
-          </a:bodyPr>
-          <a:lstStyle/>
-          <a:p>
-            <a:pPr algn="l"/>
-            <a:r>
-              <a:rPr sz="800" b="1" i="0" spc="250">
-                <a:solidFill>
-                  <a:srgbClr val="1A0F5C"/>
-                </a:solidFill>
-                <a:latin typeface="Calibri"/>
-              </a:rPr>
-              <a:t>PER ITEM</a:t>
-            </a:r>
-          </a:p>
-        </p:txBody>
-      </p:sp>
-      <p:sp>
-        <p:nvSpPr>
-          <p:cNvPr id="19" name="TextBox 18"/>
-          <p:cNvSpPr txBox="1"/>
-          <p:nvPr/>
-        </p:nvSpPr>
-        <p:spPr>
-          <a:xfrm>
-            <a:off x="8133892" y="2893060"/>
-            <a:ext cx="3527450" cy="193421"/>
-          </a:xfrm>
-          <a:prstGeom prst="rect">
-            <a:avLst/>
-          </a:prstGeom>
-          <a:noFill/>
-        </p:spPr>
-        <p:txBody>
-          <a:bodyPr wrap="square" anchor="t" lIns="0" rIns="0" tIns="0" bIns="0">
-            <a:spAutoFit/>
-          </a:bodyPr>
-          <a:lstStyle/>
-          <a:p>
-            <a:pPr algn="l"/>
-            <a:r>
-              <a:rPr sz="950" b="0" i="0">
-                <a:solidFill>
-                  <a:srgbClr val="6B6690"/>
-                </a:solidFill>
-                <a:latin typeface="Calibri"/>
-              </a:rPr>
-              <a:t>then the reason, aloud</a:t>
-            </a:r>
-          </a:p>
-        </p:txBody>
-      </p:sp>
-      <p:sp>
-        <p:nvSpPr>
-          <p:cNvPr id="20" name="Rectangle 19"/>
-          <p:cNvSpPr/>
-          <p:nvPr/>
-        </p:nvSpPr>
-        <p:spPr>
-          <a:xfrm>
-            <a:off x="8133892" y="3145536"/>
-            <a:ext cx="3527450" cy="10972"/>
-          </a:xfrm>
-          <a:prstGeom prst="rect">
-            <a:avLst/>
-          </a:prstGeom>
-          <a:solidFill>
-            <a:srgbClr val="E4E1F1"/>
-          </a:solidFill>
-          <a:ln>
-            <a:noFill/>
-          </a:ln>
-          <a:effectLst/>
-        </p:spPr>
-        <p:style>
-          <a:lnRef idx="1">
-            <a:schemeClr val="accent1"/>
-          </a:lnRef>
-          <a:fillRef idx="3">
-            <a:schemeClr val="accent1"/>
-          </a:fillRef>
-          <a:effectRef idx="2">
-            <a:schemeClr val="accent1"/>
-          </a:effectRef>
-          <a:fontRef idx="minor">
-            <a:schemeClr val="lt1"/>
-          </a:fontRef>
-        </p:style>
-        <p:txBody>
-          <a:bodyPr rtlCol="0" anchor="ctr" wrap="square"/>
-          <a:lstStyle/>
-          <a:p>
-            <a:pPr algn="ctr"/>
-          </a:p>
-        </p:txBody>
-      </p:sp>
-      <p:pic>
-        <p:nvPicPr>
-          <p:cNvPr id="21" name="mermaid diagram" descr="f29a3ab81528a198.png"/>
-          <p:cNvPicPr>
-            <a:picLocks noChangeAspect="1"/>
-          </p:cNvPicPr>
-          <p:nvPr/>
-        </p:nvPicPr>
-        <p:blipFill>
-          <a:blip r:embed="rId5"/>
-          <a:stretch>
-            <a:fillRect/>
-          </a:stretch>
-        </p:blipFill>
-        <p:spPr>
-          <a:xfrm>
-            <a:off x="3524097" y="3419856"/>
-            <a:ext cx="5143500" cy="2100262"/>
-          </a:xfrm>
-          <a:prstGeom prst="rect">
-            <a:avLst/>
-          </a:prstGeom>
-        </p:spPr>
-      </p:pic>
-      <p:sp>
-        <p:nvSpPr>
-          <p:cNvPr id="22" name="Oval 21"/>
-          <p:cNvSpPr/>
-          <p:nvPr/>
-        </p:nvSpPr>
-        <p:spPr>
-          <a:xfrm>
-            <a:off x="530352" y="6492240"/>
-            <a:ext cx="64008" cy="64008"/>
-          </a:xfrm>
-          <a:prstGeom prst="ellipse">
+            <a:off x="1381734" y="2523744"/>
+            <a:ext cx="9428226" cy="18288"/>
+          </a:xfrm>
+          <a:prstGeom prst="rect">
             <a:avLst/>
           </a:prstGeom>
           <a:solidFill>
@@ -21599,14 +20576,553 @@
       </p:sp>
       <p:sp>
         <p:nvSpPr>
+          <p:cNvPr id="10" name="TextBox 9"/>
+          <p:cNvSpPr txBox="1"/>
+          <p:nvPr/>
+        </p:nvSpPr>
+        <p:spPr>
+          <a:xfrm>
+            <a:off x="530352" y="1956816"/>
+            <a:ext cx="1702765" cy="168656"/>
+          </a:xfrm>
+          <a:prstGeom prst="rect">
+            <a:avLst/>
+          </a:prstGeom>
+          <a:noFill/>
+        </p:spPr>
+        <p:txBody>
+          <a:bodyPr wrap="square" anchor="t" lIns="0" rIns="0" tIns="0" bIns="0">
+            <a:spAutoFit/>
+          </a:bodyPr>
+          <a:lstStyle/>
+          <a:p>
+            <a:pPr algn="ctr"/>
+            <a:r>
+              <a:rPr sz="800" b="1" i="0" spc="250">
+                <a:solidFill>
+                  <a:srgbClr val="5B3FD6"/>
+                </a:solidFill>
+                <a:latin typeface="Calibri"/>
+              </a:rPr>
+              <a:t>CHAPTER 1</a:t>
+            </a:r>
+          </a:p>
+        </p:txBody>
+      </p:sp>
+      <p:sp>
+        <p:nvSpPr>
+          <p:cNvPr id="11" name="Oval 10"/>
+          <p:cNvSpPr/>
+          <p:nvPr/>
+        </p:nvSpPr>
+        <p:spPr>
+          <a:xfrm>
+            <a:off x="1281150" y="2432304"/>
+            <a:ext cx="201168" cy="201168"/>
+          </a:xfrm>
+          <a:prstGeom prst="ellipse">
+            <a:avLst/>
+          </a:prstGeom>
+          <a:solidFill>
+            <a:srgbClr val="5B3FD6"/>
+          </a:solidFill>
+          <a:ln>
+            <a:noFill/>
+          </a:ln>
+          <a:effectLst/>
+        </p:spPr>
+        <p:style>
+          <a:lnRef idx="1">
+            <a:schemeClr val="accent1"/>
+          </a:lnRef>
+          <a:fillRef idx="3">
+            <a:schemeClr val="accent1"/>
+          </a:fillRef>
+          <a:effectRef idx="2">
+            <a:schemeClr val="accent1"/>
+          </a:effectRef>
+          <a:fontRef idx="minor">
+            <a:schemeClr val="lt1"/>
+          </a:fontRef>
+        </p:style>
+        <p:txBody>
+          <a:bodyPr rtlCol="0" anchor="ctr" wrap="square"/>
+          <a:lstStyle/>
+          <a:p>
+            <a:pPr algn="ctr"/>
+          </a:p>
+        </p:txBody>
+      </p:sp>
+      <p:sp>
+        <p:nvSpPr>
+          <p:cNvPr id="12" name="Rounded Rectangle 11"/>
+          <p:cNvSpPr/>
+          <p:nvPr/>
+        </p:nvSpPr>
+        <p:spPr>
+          <a:xfrm>
+            <a:off x="530352" y="2843784"/>
+            <a:ext cx="1702765" cy="1595120"/>
+          </a:xfrm>
+          <a:prstGeom prst="roundRect">
+            <a:avLst>
+              <a:gd name="adj" fmla="val 5000"/>
+            </a:avLst>
+          </a:prstGeom>
+          <a:solidFill>
+            <a:srgbClr val="FFFFFF"/>
+          </a:solidFill>
+          <a:ln w="9525">
+            <a:solidFill>
+              <a:srgbClr val="E4E1F1"/>
+            </a:solidFill>
+          </a:ln>
+          <a:effectLst>
+            <a:outerShdw blurRad="76200" dist="19050" dir="5400000" algn="bl" rotWithShape="0">
+              <a:srgbClr val="1A0F5C">
+                <a:alpha val="12000"/>
+              </a:srgbClr>
+            </a:outerShdw>
+          </a:effectLst>
+        </p:spPr>
+        <p:style>
+          <a:lnRef idx="1">
+            <a:schemeClr val="accent1"/>
+          </a:lnRef>
+          <a:fillRef idx="3">
+            <a:schemeClr val="accent1"/>
+          </a:fillRef>
+          <a:effectRef idx="2">
+            <a:schemeClr val="accent1"/>
+          </a:effectRef>
+          <a:fontRef idx="minor">
+            <a:schemeClr val="lt1"/>
+          </a:fontRef>
+        </p:style>
+        <p:txBody>
+          <a:bodyPr rtlCol="0" anchor="ctr" wrap="square"/>
+          <a:lstStyle/>
+          <a:p>
+            <a:pPr algn="ctr"/>
+          </a:p>
+        </p:txBody>
+      </p:sp>
+      <p:sp>
+        <p:nvSpPr>
+          <p:cNvPr id="13" name="TextBox 12"/>
+          <p:cNvSpPr txBox="1"/>
+          <p:nvPr/>
+        </p:nvSpPr>
+        <p:spPr>
+          <a:xfrm>
+            <a:off x="694944" y="2990088"/>
+            <a:ext cx="1373581" cy="251205"/>
+          </a:xfrm>
+          <a:prstGeom prst="rect">
+            <a:avLst/>
+          </a:prstGeom>
+          <a:noFill/>
+        </p:spPr>
+        <p:txBody>
+          <a:bodyPr wrap="square" anchor="t" lIns="0" rIns="0" tIns="0" bIns="0">
+            <a:spAutoFit/>
+          </a:bodyPr>
+          <a:lstStyle/>
+          <a:p>
+            <a:pPr algn="l"/>
+            <a:r>
+              <a:rPr sz="1300" b="1" i="0">
+                <a:solidFill>
+                  <a:srgbClr val="1A0F5C"/>
+                </a:solidFill>
+                <a:latin typeface="Calibri"/>
+              </a:rPr>
+              <a:t>Counts</a:t>
+            </a:r>
+          </a:p>
+        </p:txBody>
+      </p:sp>
+      <p:sp>
+        <p:nvSpPr>
+          <p:cNvPr id="14" name="TextBox 13"/>
+          <p:cNvSpPr txBox="1"/>
+          <p:nvPr/>
+        </p:nvSpPr>
+        <p:spPr>
+          <a:xfrm>
+            <a:off x="694944" y="3277870"/>
+            <a:ext cx="1373581" cy="862076"/>
+          </a:xfrm>
+          <a:prstGeom prst="rect">
+            <a:avLst/>
+          </a:prstGeom>
+          <a:noFill/>
+        </p:spPr>
+        <p:txBody>
+          <a:bodyPr wrap="square" anchor="t" lIns="0" rIns="0" tIns="0" bIns="0">
+            <a:spAutoFit/>
+          </a:bodyPr>
+          <a:lstStyle/>
+          <a:p>
+            <a:pPr algn="l"/>
+            <a:r>
+              <a:rPr sz="1000" b="0" i="0">
+                <a:solidFill>
+                  <a:srgbClr val="6B6690"/>
+                </a:solidFill>
+                <a:latin typeface="Calibri"/>
+              </a:rPr>
+              <a:t>A count says what it counts: order rows are count(*), customers are count(DISTINCT customer_id).</a:t>
+            </a:r>
+          </a:p>
+        </p:txBody>
+      </p:sp>
+      <p:sp>
+        <p:nvSpPr>
+          <p:cNvPr id="15" name="TextBox 14"/>
+          <p:cNvSpPr txBox="1"/>
+          <p:nvPr/>
+        </p:nvSpPr>
+        <p:spPr>
+          <a:xfrm>
+            <a:off x="2415997" y="1956816"/>
+            <a:ext cx="1702765" cy="168656"/>
+          </a:xfrm>
+          <a:prstGeom prst="rect">
+            <a:avLst/>
+          </a:prstGeom>
+          <a:noFill/>
+        </p:spPr>
+        <p:txBody>
+          <a:bodyPr wrap="square" anchor="t" lIns="0" rIns="0" tIns="0" bIns="0">
+            <a:spAutoFit/>
+          </a:bodyPr>
+          <a:lstStyle/>
+          <a:p>
+            <a:pPr algn="ctr"/>
+            <a:r>
+              <a:rPr sz="800" b="1" i="0" spc="250">
+                <a:solidFill>
+                  <a:srgbClr val="5B3FD6"/>
+                </a:solidFill>
+                <a:latin typeface="Calibri"/>
+              </a:rPr>
+              <a:t>CHAPTER 2</a:t>
+            </a:r>
+          </a:p>
+        </p:txBody>
+      </p:sp>
+      <p:sp>
+        <p:nvSpPr>
+          <p:cNvPr id="16" name="Oval 15"/>
+          <p:cNvSpPr/>
+          <p:nvPr/>
+        </p:nvSpPr>
+        <p:spPr>
+          <a:xfrm>
+            <a:off x="3166795" y="2432304"/>
+            <a:ext cx="201168" cy="201168"/>
+          </a:xfrm>
+          <a:prstGeom prst="ellipse">
+            <a:avLst/>
+          </a:prstGeom>
+          <a:solidFill>
+            <a:srgbClr val="5B3FD6"/>
+          </a:solidFill>
+          <a:ln>
+            <a:noFill/>
+          </a:ln>
+          <a:effectLst/>
+        </p:spPr>
+        <p:style>
+          <a:lnRef idx="1">
+            <a:schemeClr val="accent1"/>
+          </a:lnRef>
+          <a:fillRef idx="3">
+            <a:schemeClr val="accent1"/>
+          </a:fillRef>
+          <a:effectRef idx="2">
+            <a:schemeClr val="accent1"/>
+          </a:effectRef>
+          <a:fontRef idx="minor">
+            <a:schemeClr val="lt1"/>
+          </a:fontRef>
+        </p:style>
+        <p:txBody>
+          <a:bodyPr rtlCol="0" anchor="ctr" wrap="square"/>
+          <a:lstStyle/>
+          <a:p>
+            <a:pPr algn="ctr"/>
+          </a:p>
+        </p:txBody>
+      </p:sp>
+      <p:sp>
+        <p:nvSpPr>
+          <p:cNvPr id="17" name="Rounded Rectangle 16"/>
+          <p:cNvSpPr/>
+          <p:nvPr/>
+        </p:nvSpPr>
+        <p:spPr>
+          <a:xfrm>
+            <a:off x="2415997" y="2843784"/>
+            <a:ext cx="1702765" cy="1595120"/>
+          </a:xfrm>
+          <a:prstGeom prst="roundRect">
+            <a:avLst>
+              <a:gd name="adj" fmla="val 5000"/>
+            </a:avLst>
+          </a:prstGeom>
+          <a:solidFill>
+            <a:srgbClr val="FFFFFF"/>
+          </a:solidFill>
+          <a:ln w="9525">
+            <a:solidFill>
+              <a:srgbClr val="E4E1F1"/>
+            </a:solidFill>
+          </a:ln>
+          <a:effectLst>
+            <a:outerShdw blurRad="76200" dist="19050" dir="5400000" algn="bl" rotWithShape="0">
+              <a:srgbClr val="1A0F5C">
+                <a:alpha val="12000"/>
+              </a:srgbClr>
+            </a:outerShdw>
+          </a:effectLst>
+        </p:spPr>
+        <p:style>
+          <a:lnRef idx="1">
+            <a:schemeClr val="accent1"/>
+          </a:lnRef>
+          <a:fillRef idx="3">
+            <a:schemeClr val="accent1"/>
+          </a:fillRef>
+          <a:effectRef idx="2">
+            <a:schemeClr val="accent1"/>
+          </a:effectRef>
+          <a:fontRef idx="minor">
+            <a:schemeClr val="lt1"/>
+          </a:fontRef>
+        </p:style>
+        <p:txBody>
+          <a:bodyPr rtlCol="0" anchor="ctr" wrap="square"/>
+          <a:lstStyle/>
+          <a:p>
+            <a:pPr algn="ctr"/>
+          </a:p>
+        </p:txBody>
+      </p:sp>
+      <p:sp>
+        <p:nvSpPr>
+          <p:cNvPr id="18" name="TextBox 17"/>
+          <p:cNvSpPr txBox="1"/>
+          <p:nvPr/>
+        </p:nvSpPr>
+        <p:spPr>
+          <a:xfrm>
+            <a:off x="2580589" y="2990088"/>
+            <a:ext cx="1373581" cy="251205"/>
+          </a:xfrm>
+          <a:prstGeom prst="rect">
+            <a:avLst/>
+          </a:prstGeom>
+          <a:noFill/>
+        </p:spPr>
+        <p:txBody>
+          <a:bodyPr wrap="square" anchor="t" lIns="0" rIns="0" tIns="0" bIns="0">
+            <a:spAutoFit/>
+          </a:bodyPr>
+          <a:lstStyle/>
+          <a:p>
+            <a:pPr algn="l"/>
+            <a:r>
+              <a:rPr sz="1300" b="1" i="0">
+                <a:solidFill>
+                  <a:srgbClr val="1A0F5C"/>
+                </a:solidFill>
+                <a:latin typeface="Calibri"/>
+              </a:rPr>
+              <a:t>Sources</a:t>
+            </a:r>
+          </a:p>
+        </p:txBody>
+      </p:sp>
+      <p:sp>
+        <p:nvSpPr>
+          <p:cNvPr id="19" name="TextBox 18"/>
+          <p:cNvSpPr txBox="1"/>
+          <p:nvPr/>
+        </p:nvSpPr>
+        <p:spPr>
+          <a:xfrm>
+            <a:off x="2580589" y="3277870"/>
+            <a:ext cx="1373581" cy="696976"/>
+          </a:xfrm>
+          <a:prstGeom prst="rect">
+            <a:avLst/>
+          </a:prstGeom>
+          <a:noFill/>
+        </p:spPr>
+        <p:txBody>
+          <a:bodyPr wrap="square" anchor="t" lIns="0" rIns="0" tIns="0" bIns="0">
+            <a:spAutoFit/>
+          </a:bodyPr>
+          <a:lstStyle/>
+          <a:p>
+            <a:pPr algn="l"/>
+            <a:r>
+              <a:rPr sz="1000" b="0" i="0">
+                <a:solidFill>
+                  <a:srgbClr val="6B6690"/>
+                </a:solidFill>
+                <a:latin typeface="Calibri"/>
+              </a:rPr>
+              <a:t>A matching total is one leaf matching, so compare every leaf as a change.</a:t>
+            </a:r>
+          </a:p>
+        </p:txBody>
+      </p:sp>
+      <p:sp>
+        <p:nvSpPr>
+          <p:cNvPr id="20" name="TextBox 19"/>
+          <p:cNvSpPr txBox="1"/>
+          <p:nvPr/>
+        </p:nvSpPr>
+        <p:spPr>
+          <a:xfrm>
+            <a:off x="4301642" y="1956816"/>
+            <a:ext cx="1702765" cy="168656"/>
+          </a:xfrm>
+          <a:prstGeom prst="rect">
+            <a:avLst/>
+          </a:prstGeom>
+          <a:noFill/>
+        </p:spPr>
+        <p:txBody>
+          <a:bodyPr wrap="square" anchor="t" lIns="0" rIns="0" tIns="0" bIns="0">
+            <a:spAutoFit/>
+          </a:bodyPr>
+          <a:lstStyle/>
+          <a:p>
+            <a:pPr algn="ctr"/>
+            <a:r>
+              <a:rPr sz="800" b="1" i="0" spc="250">
+                <a:solidFill>
+                  <a:srgbClr val="5B3FD6"/>
+                </a:solidFill>
+                <a:latin typeface="Calibri"/>
+              </a:rPr>
+              <a:t>CHAPTER 3</a:t>
+            </a:r>
+          </a:p>
+        </p:txBody>
+      </p:sp>
+      <p:sp>
+        <p:nvSpPr>
+          <p:cNvPr id="21" name="Oval 20"/>
+          <p:cNvSpPr/>
+          <p:nvPr/>
+        </p:nvSpPr>
+        <p:spPr>
+          <a:xfrm>
+            <a:off x="5052441" y="2432304"/>
+            <a:ext cx="201168" cy="201168"/>
+          </a:xfrm>
+          <a:prstGeom prst="ellipse">
+            <a:avLst/>
+          </a:prstGeom>
+          <a:solidFill>
+            <a:srgbClr val="5B3FD6"/>
+          </a:solidFill>
+          <a:ln>
+            <a:noFill/>
+          </a:ln>
+          <a:effectLst/>
+        </p:spPr>
+        <p:style>
+          <a:lnRef idx="1">
+            <a:schemeClr val="accent1"/>
+          </a:lnRef>
+          <a:fillRef idx="3">
+            <a:schemeClr val="accent1"/>
+          </a:fillRef>
+          <a:effectRef idx="2">
+            <a:schemeClr val="accent1"/>
+          </a:effectRef>
+          <a:fontRef idx="minor">
+            <a:schemeClr val="lt1"/>
+          </a:fontRef>
+        </p:style>
+        <p:txBody>
+          <a:bodyPr rtlCol="0" anchor="ctr" wrap="square"/>
+          <a:lstStyle/>
+          <a:p>
+            <a:pPr algn="ctr"/>
+          </a:p>
+        </p:txBody>
+      </p:sp>
+      <p:sp>
+        <p:nvSpPr>
+          <p:cNvPr id="22" name="Rounded Rectangle 21"/>
+          <p:cNvSpPr/>
+          <p:nvPr/>
+        </p:nvSpPr>
+        <p:spPr>
+          <a:xfrm>
+            <a:off x="4301642" y="2843784"/>
+            <a:ext cx="1702765" cy="1595120"/>
+          </a:xfrm>
+          <a:prstGeom prst="roundRect">
+            <a:avLst>
+              <a:gd name="adj" fmla="val 5000"/>
+            </a:avLst>
+          </a:prstGeom>
+          <a:solidFill>
+            <a:srgbClr val="FFFFFF"/>
+          </a:solidFill>
+          <a:ln w="9525">
+            <a:solidFill>
+              <a:srgbClr val="E4E1F1"/>
+            </a:solidFill>
+          </a:ln>
+          <a:effectLst>
+            <a:outerShdw blurRad="76200" dist="19050" dir="5400000" algn="bl" rotWithShape="0">
+              <a:srgbClr val="1A0F5C">
+                <a:alpha val="12000"/>
+              </a:srgbClr>
+            </a:outerShdw>
+          </a:effectLst>
+        </p:spPr>
+        <p:style>
+          <a:lnRef idx="1">
+            <a:schemeClr val="accent1"/>
+          </a:lnRef>
+          <a:fillRef idx="3">
+            <a:schemeClr val="accent1"/>
+          </a:fillRef>
+          <a:effectRef idx="2">
+            <a:schemeClr val="accent1"/>
+          </a:effectRef>
+          <a:fontRef idx="minor">
+            <a:schemeClr val="lt1"/>
+          </a:fontRef>
+        </p:style>
+        <p:txBody>
+          <a:bodyPr rtlCol="0" anchor="ctr" wrap="square"/>
+          <a:lstStyle/>
+          <a:p>
+            <a:pPr algn="ctr"/>
+          </a:p>
+        </p:txBody>
+      </p:sp>
+      <p:sp>
+        <p:nvSpPr>
           <p:cNvPr id="23" name="TextBox 22"/>
           <p:cNvSpPr txBox="1"/>
           <p:nvPr/>
         </p:nvSpPr>
         <p:spPr>
           <a:xfrm>
-            <a:off x="640080" y="6437376"/>
-            <a:ext cx="1286446" cy="152146"/>
+            <a:off x="4466234" y="2990088"/>
+            <a:ext cx="1373581" cy="251205"/>
           </a:xfrm>
           <a:prstGeom prst="rect">
             <a:avLst/>
@@ -21621,26 +21137,676 @@
           <a:p>
             <a:pPr algn="l"/>
             <a:r>
-              <a:rPr sz="700" b="0" i="0">
+              <a:rPr sz="1300" b="1" i="0">
+                <a:solidFill>
+                  <a:srgbClr val="1A0F5C"/>
+                </a:solidFill>
+                <a:latin typeface="Calibri"/>
+              </a:rPr>
+              <a:t>Ratios</a:t>
+            </a:r>
+          </a:p>
+        </p:txBody>
+      </p:sp>
+      <p:sp>
+        <p:nvSpPr>
+          <p:cNvPr id="24" name="TextBox 23"/>
+          <p:cNvSpPr txBox="1"/>
+          <p:nvPr/>
+        </p:nvSpPr>
+        <p:spPr>
+          <a:xfrm>
+            <a:off x="4466234" y="3277870"/>
+            <a:ext cx="1373581" cy="696976"/>
+          </a:xfrm>
+          <a:prstGeom prst="rect">
+            <a:avLst/>
+          </a:prstGeom>
+          <a:noFill/>
+        </p:spPr>
+        <p:txBody>
+          <a:bodyPr wrap="square" anchor="t" lIns="0" rIns="0" tIns="0" bIns="0">
+            <a:spAutoFit/>
+          </a:bodyPr>
+          <a:lstStyle/>
+          <a:p>
+            <a:pPr algn="l"/>
+            <a:r>
+              <a:rPr sz="1000" b="0" i="0">
                 <a:solidFill>
                   <a:srgbClr val="6B6690"/>
                 </a:solidFill>
                 <a:latin typeface="Calibri"/>
               </a:rPr>
-              <a:t>Same answer next week?</a:t>
-            </a:r>
-          </a:p>
-        </p:txBody>
-      </p:sp>
-      <p:sp>
-        <p:nvSpPr>
-          <p:cNvPr id="24" name="Oval 23"/>
+              <a:t>Divide in numeric, round on purpose, and keep the counts beside the ratio.</a:t>
+            </a:r>
+          </a:p>
+        </p:txBody>
+      </p:sp>
+      <p:sp>
+        <p:nvSpPr>
+          <p:cNvPr id="25" name="TextBox 24"/>
+          <p:cNvSpPr txBox="1"/>
+          <p:nvPr/>
+        </p:nvSpPr>
+        <p:spPr>
+          <a:xfrm>
+            <a:off x="6187287" y="1956816"/>
+            <a:ext cx="1702765" cy="168656"/>
+          </a:xfrm>
+          <a:prstGeom prst="rect">
+            <a:avLst/>
+          </a:prstGeom>
+          <a:noFill/>
+        </p:spPr>
+        <p:txBody>
+          <a:bodyPr wrap="square" anchor="t" lIns="0" rIns="0" tIns="0" bIns="0">
+            <a:spAutoFit/>
+          </a:bodyPr>
+          <a:lstStyle/>
+          <a:p>
+            <a:pPr algn="ctr"/>
+            <a:r>
+              <a:rPr sz="800" b="1" i="0" spc="250">
+                <a:solidFill>
+                  <a:srgbClr val="5B3FD6"/>
+                </a:solidFill>
+                <a:latin typeface="Calibri"/>
+              </a:rPr>
+              <a:t>CHAPTER 4</a:t>
+            </a:r>
+          </a:p>
+        </p:txBody>
+      </p:sp>
+      <p:sp>
+        <p:nvSpPr>
+          <p:cNvPr id="26" name="Oval 25"/>
           <p:cNvSpPr/>
           <p:nvPr/>
         </p:nvSpPr>
         <p:spPr>
           <a:xfrm>
-            <a:off x="2017966" y="6492240"/>
+            <a:off x="6938086" y="2432304"/>
+            <a:ext cx="201168" cy="201168"/>
+          </a:xfrm>
+          <a:prstGeom prst="ellipse">
+            <a:avLst/>
+          </a:prstGeom>
+          <a:solidFill>
+            <a:srgbClr val="5B3FD6"/>
+          </a:solidFill>
+          <a:ln>
+            <a:noFill/>
+          </a:ln>
+          <a:effectLst/>
+        </p:spPr>
+        <p:style>
+          <a:lnRef idx="1">
+            <a:schemeClr val="accent1"/>
+          </a:lnRef>
+          <a:fillRef idx="3">
+            <a:schemeClr val="accent1"/>
+          </a:fillRef>
+          <a:effectRef idx="2">
+            <a:schemeClr val="accent1"/>
+          </a:effectRef>
+          <a:fontRef idx="minor">
+            <a:schemeClr val="lt1"/>
+          </a:fontRef>
+        </p:style>
+        <p:txBody>
+          <a:bodyPr rtlCol="0" anchor="ctr" wrap="square"/>
+          <a:lstStyle/>
+          <a:p>
+            <a:pPr algn="ctr"/>
+          </a:p>
+        </p:txBody>
+      </p:sp>
+      <p:sp>
+        <p:nvSpPr>
+          <p:cNvPr id="27" name="Rounded Rectangle 26"/>
+          <p:cNvSpPr/>
+          <p:nvPr/>
+        </p:nvSpPr>
+        <p:spPr>
+          <a:xfrm>
+            <a:off x="6187287" y="2843784"/>
+            <a:ext cx="1702765" cy="1595120"/>
+          </a:xfrm>
+          <a:prstGeom prst="roundRect">
+            <a:avLst>
+              <a:gd name="adj" fmla="val 5000"/>
+            </a:avLst>
+          </a:prstGeom>
+          <a:solidFill>
+            <a:srgbClr val="FFFFFF"/>
+          </a:solidFill>
+          <a:ln w="9525">
+            <a:solidFill>
+              <a:srgbClr val="E4E1F1"/>
+            </a:solidFill>
+          </a:ln>
+          <a:effectLst>
+            <a:outerShdw blurRad="76200" dist="19050" dir="5400000" algn="bl" rotWithShape="0">
+              <a:srgbClr val="1A0F5C">
+                <a:alpha val="12000"/>
+              </a:srgbClr>
+            </a:outerShdw>
+          </a:effectLst>
+        </p:spPr>
+        <p:style>
+          <a:lnRef idx="1">
+            <a:schemeClr val="accent1"/>
+          </a:lnRef>
+          <a:fillRef idx="3">
+            <a:schemeClr val="accent1"/>
+          </a:fillRef>
+          <a:effectRef idx="2">
+            <a:schemeClr val="accent1"/>
+          </a:effectRef>
+          <a:fontRef idx="minor">
+            <a:schemeClr val="lt1"/>
+          </a:fontRef>
+        </p:style>
+        <p:txBody>
+          <a:bodyPr rtlCol="0" anchor="ctr" wrap="square"/>
+          <a:lstStyle/>
+          <a:p>
+            <a:pPr algn="ctr"/>
+          </a:p>
+        </p:txBody>
+      </p:sp>
+      <p:sp>
+        <p:nvSpPr>
+          <p:cNvPr id="28" name="TextBox 27"/>
+          <p:cNvSpPr txBox="1"/>
+          <p:nvPr/>
+        </p:nvSpPr>
+        <p:spPr>
+          <a:xfrm>
+            <a:off x="6351879" y="2990088"/>
+            <a:ext cx="1373581" cy="251205"/>
+          </a:xfrm>
+          <a:prstGeom prst="rect">
+            <a:avLst/>
+          </a:prstGeom>
+          <a:noFill/>
+        </p:spPr>
+        <p:txBody>
+          <a:bodyPr wrap="square" anchor="t" lIns="0" rIns="0" tIns="0" bIns="0">
+            <a:spAutoFit/>
+          </a:bodyPr>
+          <a:lstStyle/>
+          <a:p>
+            <a:pPr algn="l"/>
+            <a:r>
+              <a:rPr sz="1300" b="1" i="0">
+                <a:solidFill>
+                  <a:srgbClr val="1A0F5C"/>
+                </a:solidFill>
+                <a:latin typeface="Calibri"/>
+              </a:rPr>
+              <a:t>Averages</a:t>
+            </a:r>
+          </a:p>
+        </p:txBody>
+      </p:sp>
+      <p:sp>
+        <p:nvSpPr>
+          <p:cNvPr id="29" name="TextBox 28"/>
+          <p:cNvSpPr txBox="1"/>
+          <p:nvPr/>
+        </p:nvSpPr>
+        <p:spPr>
+          <a:xfrm>
+            <a:off x="6351879" y="3277870"/>
+            <a:ext cx="1373581" cy="696976"/>
+          </a:xfrm>
+          <a:prstGeom prst="rect">
+            <a:avLst/>
+          </a:prstGeom>
+          <a:noFill/>
+        </p:spPr>
+        <p:txBody>
+          <a:bodyPr wrap="square" anchor="t" lIns="0" rIns="0" tIns="0" bIns="0">
+            <a:spAutoFit/>
+          </a:bodyPr>
+          <a:lstStyle/>
+          <a:p>
+            <a:pPr algn="l"/>
+            <a:r>
+              <a:rPr sz="1000" b="0" i="0">
+                <a:solidFill>
+                  <a:srgbClr val="6B6690"/>
+                </a:solidFill>
+                <a:latin typeface="Calibri"/>
+              </a:rPr>
+              <a:t>An average names who is inside it, so write the zero on purpose.</a:t>
+            </a:r>
+          </a:p>
+        </p:txBody>
+      </p:sp>
+      <p:sp>
+        <p:nvSpPr>
+          <p:cNvPr id="30" name="TextBox 29"/>
+          <p:cNvSpPr txBox="1"/>
+          <p:nvPr/>
+        </p:nvSpPr>
+        <p:spPr>
+          <a:xfrm>
+            <a:off x="8072932" y="1956816"/>
+            <a:ext cx="1702765" cy="168656"/>
+          </a:xfrm>
+          <a:prstGeom prst="rect">
+            <a:avLst/>
+          </a:prstGeom>
+          <a:noFill/>
+        </p:spPr>
+        <p:txBody>
+          <a:bodyPr wrap="square" anchor="t" lIns="0" rIns="0" tIns="0" bIns="0">
+            <a:spAutoFit/>
+          </a:bodyPr>
+          <a:lstStyle/>
+          <a:p>
+            <a:pPr algn="ctr"/>
+            <a:r>
+              <a:rPr sz="800" b="1" i="0" spc="250">
+                <a:solidFill>
+                  <a:srgbClr val="5B3FD6"/>
+                </a:solidFill>
+                <a:latin typeface="Calibri"/>
+              </a:rPr>
+              <a:t>CHAPTER 5</a:t>
+            </a:r>
+          </a:p>
+        </p:txBody>
+      </p:sp>
+      <p:sp>
+        <p:nvSpPr>
+          <p:cNvPr id="31" name="Oval 30"/>
+          <p:cNvSpPr/>
+          <p:nvPr/>
+        </p:nvSpPr>
+        <p:spPr>
+          <a:xfrm>
+            <a:off x="8823731" y="2432304"/>
+            <a:ext cx="201168" cy="201168"/>
+          </a:xfrm>
+          <a:prstGeom prst="ellipse">
+            <a:avLst/>
+          </a:prstGeom>
+          <a:solidFill>
+            <a:srgbClr val="5B3FD6"/>
+          </a:solidFill>
+          <a:ln>
+            <a:noFill/>
+          </a:ln>
+          <a:effectLst/>
+        </p:spPr>
+        <p:style>
+          <a:lnRef idx="1">
+            <a:schemeClr val="accent1"/>
+          </a:lnRef>
+          <a:fillRef idx="3">
+            <a:schemeClr val="accent1"/>
+          </a:fillRef>
+          <a:effectRef idx="2">
+            <a:schemeClr val="accent1"/>
+          </a:effectRef>
+          <a:fontRef idx="minor">
+            <a:schemeClr val="lt1"/>
+          </a:fontRef>
+        </p:style>
+        <p:txBody>
+          <a:bodyPr rtlCol="0" anchor="ctr" wrap="square"/>
+          <a:lstStyle/>
+          <a:p>
+            <a:pPr algn="ctr"/>
+          </a:p>
+        </p:txBody>
+      </p:sp>
+      <p:sp>
+        <p:nvSpPr>
+          <p:cNvPr id="32" name="Rounded Rectangle 31"/>
+          <p:cNvSpPr/>
+          <p:nvPr/>
+        </p:nvSpPr>
+        <p:spPr>
+          <a:xfrm>
+            <a:off x="8072932" y="2843784"/>
+            <a:ext cx="1702765" cy="1595120"/>
+          </a:xfrm>
+          <a:prstGeom prst="roundRect">
+            <a:avLst>
+              <a:gd name="adj" fmla="val 5000"/>
+            </a:avLst>
+          </a:prstGeom>
+          <a:solidFill>
+            <a:srgbClr val="FFFFFF"/>
+          </a:solidFill>
+          <a:ln w="9525">
+            <a:solidFill>
+              <a:srgbClr val="E4E1F1"/>
+            </a:solidFill>
+          </a:ln>
+          <a:effectLst>
+            <a:outerShdw blurRad="76200" dist="19050" dir="5400000" algn="bl" rotWithShape="0">
+              <a:srgbClr val="1A0F5C">
+                <a:alpha val="12000"/>
+              </a:srgbClr>
+            </a:outerShdw>
+          </a:effectLst>
+        </p:spPr>
+        <p:style>
+          <a:lnRef idx="1">
+            <a:schemeClr val="accent1"/>
+          </a:lnRef>
+          <a:fillRef idx="3">
+            <a:schemeClr val="accent1"/>
+          </a:fillRef>
+          <a:effectRef idx="2">
+            <a:schemeClr val="accent1"/>
+          </a:effectRef>
+          <a:fontRef idx="minor">
+            <a:schemeClr val="lt1"/>
+          </a:fontRef>
+        </p:style>
+        <p:txBody>
+          <a:bodyPr rtlCol="0" anchor="ctr" wrap="square"/>
+          <a:lstStyle/>
+          <a:p>
+            <a:pPr algn="ctr"/>
+          </a:p>
+        </p:txBody>
+      </p:sp>
+      <p:sp>
+        <p:nvSpPr>
+          <p:cNvPr id="33" name="TextBox 32"/>
+          <p:cNvSpPr txBox="1"/>
+          <p:nvPr/>
+        </p:nvSpPr>
+        <p:spPr>
+          <a:xfrm>
+            <a:off x="8237524" y="2990088"/>
+            <a:ext cx="1373581" cy="251205"/>
+          </a:xfrm>
+          <a:prstGeom prst="rect">
+            <a:avLst/>
+          </a:prstGeom>
+          <a:noFill/>
+        </p:spPr>
+        <p:txBody>
+          <a:bodyPr wrap="square" anchor="t" lIns="0" rIns="0" tIns="0" bIns="0">
+            <a:spAutoFit/>
+          </a:bodyPr>
+          <a:lstStyle/>
+          <a:p>
+            <a:pPr algn="l"/>
+            <a:r>
+              <a:rPr sz="1300" b="1" i="0">
+                <a:solidFill>
+                  <a:srgbClr val="1A0F5C"/>
+                </a:solidFill>
+                <a:latin typeface="Calibri"/>
+              </a:rPr>
+              <a:t>Sums</a:t>
+            </a:r>
+          </a:p>
+        </p:txBody>
+      </p:sp>
+      <p:sp>
+        <p:nvSpPr>
+          <p:cNvPr id="34" name="TextBox 33"/>
+          <p:cNvSpPr txBox="1"/>
+          <p:nvPr/>
+        </p:nvSpPr>
+        <p:spPr>
+          <a:xfrm>
+            <a:off x="8237524" y="3277870"/>
+            <a:ext cx="1373581" cy="862076"/>
+          </a:xfrm>
+          <a:prstGeom prst="rect">
+            <a:avLst/>
+          </a:prstGeom>
+          <a:noFill/>
+        </p:spPr>
+        <p:txBody>
+          <a:bodyPr wrap="square" anchor="t" lIns="0" rIns="0" tIns="0" bIns="0">
+            <a:spAutoFit/>
+          </a:bodyPr>
+          <a:lstStyle/>
+          <a:p>
+            <a:pPr algn="l"/>
+            <a:r>
+              <a:rPr sz="1000" b="0" i="0">
+                <a:solidFill>
+                  <a:srgbClr val="6B6690"/>
+                </a:solidFill>
+                <a:latin typeface="Calibri"/>
+              </a:rPr>
+              <a:t>Orders and rupees add across quarters; customers are counted again from the orders.</a:t>
+            </a:r>
+          </a:p>
+        </p:txBody>
+      </p:sp>
+      <p:sp>
+        <p:nvSpPr>
+          <p:cNvPr id="35" name="TextBox 34"/>
+          <p:cNvSpPr txBox="1"/>
+          <p:nvPr/>
+        </p:nvSpPr>
+        <p:spPr>
+          <a:xfrm>
+            <a:off x="9958578" y="1956816"/>
+            <a:ext cx="1702765" cy="168656"/>
+          </a:xfrm>
+          <a:prstGeom prst="rect">
+            <a:avLst/>
+          </a:prstGeom>
+          <a:noFill/>
+        </p:spPr>
+        <p:txBody>
+          <a:bodyPr wrap="square" anchor="t" lIns="0" rIns="0" tIns="0" bIns="0">
+            <a:spAutoFit/>
+          </a:bodyPr>
+          <a:lstStyle/>
+          <a:p>
+            <a:pPr algn="ctr"/>
+            <a:r>
+              <a:rPr sz="800" b="1" i="0" spc="250">
+                <a:solidFill>
+                  <a:srgbClr val="5B3FD6"/>
+                </a:solidFill>
+                <a:latin typeface="Calibri"/>
+              </a:rPr>
+              <a:t>CHAPTER 6</a:t>
+            </a:r>
+          </a:p>
+        </p:txBody>
+      </p:sp>
+      <p:sp>
+        <p:nvSpPr>
+          <p:cNvPr id="36" name="Oval 35"/>
+          <p:cNvSpPr/>
+          <p:nvPr/>
+        </p:nvSpPr>
+        <p:spPr>
+          <a:xfrm>
+            <a:off x="10709376" y="2432304"/>
+            <a:ext cx="201168" cy="201168"/>
+          </a:xfrm>
+          <a:prstGeom prst="ellipse">
+            <a:avLst/>
+          </a:prstGeom>
+          <a:solidFill>
+            <a:srgbClr val="D9A7FF"/>
+          </a:solidFill>
+          <a:ln>
+            <a:noFill/>
+          </a:ln>
+          <a:effectLst/>
+        </p:spPr>
+        <p:style>
+          <a:lnRef idx="1">
+            <a:schemeClr val="accent1"/>
+          </a:lnRef>
+          <a:fillRef idx="3">
+            <a:schemeClr val="accent1"/>
+          </a:fillRef>
+          <a:effectRef idx="2">
+            <a:schemeClr val="accent1"/>
+          </a:effectRef>
+          <a:fontRef idx="minor">
+            <a:schemeClr val="lt1"/>
+          </a:fontRef>
+        </p:style>
+        <p:txBody>
+          <a:bodyPr rtlCol="0" anchor="ctr" wrap="square"/>
+          <a:lstStyle/>
+          <a:p>
+            <a:pPr algn="ctr"/>
+          </a:p>
+        </p:txBody>
+      </p:sp>
+      <p:sp>
+        <p:nvSpPr>
+          <p:cNvPr id="37" name="Rounded Rectangle 36"/>
+          <p:cNvSpPr/>
+          <p:nvPr/>
+        </p:nvSpPr>
+        <p:spPr>
+          <a:xfrm>
+            <a:off x="9958578" y="2843784"/>
+            <a:ext cx="1702765" cy="1595120"/>
+          </a:xfrm>
+          <a:prstGeom prst="roundRect">
+            <a:avLst>
+              <a:gd name="adj" fmla="val 5000"/>
+            </a:avLst>
+          </a:prstGeom>
+          <a:gradFill rotWithShape="1">
+            <a:gsLst>
+              <a:gs pos="0">
+                <a:srgbClr val="2C1A86"/>
+              </a:gs>
+              <a:gs pos="100000">
+                <a:srgbClr val="1A0F5C"/>
+              </a:gs>
+            </a:gsLst>
+            <a:lin scaled="0" ang="16200000"/>
+          </a:gradFill>
+          <a:ln>
+            <a:noFill/>
+          </a:ln>
+          <a:effectLst>
+            <a:outerShdw blurRad="76200" dist="19050" dir="5400000" algn="bl" rotWithShape="0">
+              <a:srgbClr val="1A0F5C">
+                <a:alpha val="12000"/>
+              </a:srgbClr>
+            </a:outerShdw>
+          </a:effectLst>
+        </p:spPr>
+        <p:style>
+          <a:lnRef idx="1">
+            <a:schemeClr val="accent1"/>
+          </a:lnRef>
+          <a:fillRef idx="3">
+            <a:schemeClr val="accent1"/>
+          </a:fillRef>
+          <a:effectRef idx="2">
+            <a:schemeClr val="accent1"/>
+          </a:effectRef>
+          <a:fontRef idx="minor">
+            <a:schemeClr val="lt1"/>
+          </a:fontRef>
+        </p:style>
+        <p:txBody>
+          <a:bodyPr rtlCol="0" anchor="ctr" wrap="square"/>
+          <a:lstStyle/>
+          <a:p>
+            <a:pPr algn="ctr"/>
+          </a:p>
+        </p:txBody>
+      </p:sp>
+      <p:sp>
+        <p:nvSpPr>
+          <p:cNvPr id="38" name="TextBox 37"/>
+          <p:cNvSpPr txBox="1"/>
+          <p:nvPr/>
+        </p:nvSpPr>
+        <p:spPr>
+          <a:xfrm>
+            <a:off x="10123170" y="2990088"/>
+            <a:ext cx="1373581" cy="251205"/>
+          </a:xfrm>
+          <a:prstGeom prst="rect">
+            <a:avLst/>
+          </a:prstGeom>
+          <a:noFill/>
+        </p:spPr>
+        <p:txBody>
+          <a:bodyPr wrap="square" anchor="t" lIns="0" rIns="0" tIns="0" bIns="0">
+            <a:spAutoFit/>
+          </a:bodyPr>
+          <a:lstStyle/>
+          <a:p>
+            <a:pPr algn="l"/>
+            <a:r>
+              <a:rPr sz="1300" b="1" i="0">
+                <a:solidFill>
+                  <a:srgbClr val="FFFFFF"/>
+                </a:solidFill>
+                <a:latin typeface="Calibri"/>
+              </a:rPr>
+              <a:t>Runs</a:t>
+            </a:r>
+          </a:p>
+        </p:txBody>
+      </p:sp>
+      <p:sp>
+        <p:nvSpPr>
+          <p:cNvPr id="39" name="TextBox 38"/>
+          <p:cNvSpPr txBox="1"/>
+          <p:nvPr/>
+        </p:nvSpPr>
+        <p:spPr>
+          <a:xfrm>
+            <a:off x="10123170" y="3277870"/>
+            <a:ext cx="1373581" cy="862076"/>
+          </a:xfrm>
+          <a:prstGeom prst="rect">
+            <a:avLst/>
+          </a:prstGeom>
+          <a:noFill/>
+        </p:spPr>
+        <p:txBody>
+          <a:bodyPr wrap="square" anchor="t" lIns="0" rIns="0" tIns="0" bIns="0">
+            <a:spAutoFit/>
+          </a:bodyPr>
+          <a:lstStyle/>
+          <a:p>
+            <a:pPr algn="l"/>
+            <a:r>
+              <a:rPr sz="1000" b="0" i="0">
+                <a:solidFill>
+                  <a:srgbClr val="CFC9EE"/>
+                </a:solidFill>
+                <a:latin typeface="Calibri"/>
+              </a:rPr>
+              <a:t>Order every list on a column no two rows share, and print the book's fingerprint beside the numbers.</a:t>
+            </a:r>
+          </a:p>
+        </p:txBody>
+      </p:sp>
+      <p:sp>
+        <p:nvSpPr>
+          <p:cNvPr id="40" name="Oval 39"/>
+          <p:cNvSpPr/>
+          <p:nvPr/>
+        </p:nvSpPr>
+        <p:spPr>
+          <a:xfrm>
+            <a:off x="530352" y="6492240"/>
             <a:ext cx="64008" cy="64008"/>
           </a:xfrm>
           <a:prstGeom prst="ellipse">
@@ -21678,7 +21844,86 @@
       </p:sp>
       <p:sp>
         <p:nvSpPr>
-          <p:cNvPr id="25" name="TextBox 24"/>
+          <p:cNvPr id="41" name="TextBox 40"/>
+          <p:cNvSpPr txBox="1"/>
+          <p:nvPr/>
+        </p:nvSpPr>
+        <p:spPr>
+          <a:xfrm>
+            <a:off x="640080" y="6437376"/>
+            <a:ext cx="1286446" cy="152146"/>
+          </a:xfrm>
+          <a:prstGeom prst="rect">
+            <a:avLst/>
+          </a:prstGeom>
+          <a:noFill/>
+        </p:spPr>
+        <p:txBody>
+          <a:bodyPr wrap="square" anchor="t" lIns="0" rIns="0" tIns="0" bIns="0">
+            <a:spAutoFit/>
+          </a:bodyPr>
+          <a:lstStyle/>
+          <a:p>
+            <a:pPr algn="l"/>
+            <a:r>
+              <a:rPr sz="700" b="0" i="0">
+                <a:solidFill>
+                  <a:srgbClr val="6B6690"/>
+                </a:solidFill>
+                <a:latin typeface="Calibri"/>
+              </a:rPr>
+              <a:t>Same answer next week?</a:t>
+            </a:r>
+          </a:p>
+        </p:txBody>
+      </p:sp>
+      <p:sp>
+        <p:nvSpPr>
+          <p:cNvPr id="42" name="Oval 41"/>
+          <p:cNvSpPr/>
+          <p:nvPr/>
+        </p:nvSpPr>
+        <p:spPr>
+          <a:xfrm>
+            <a:off x="2017966" y="6492240"/>
+            <a:ext cx="64008" cy="64008"/>
+          </a:xfrm>
+          <a:prstGeom prst="ellipse">
+            <a:avLst/>
+          </a:prstGeom>
+          <a:solidFill>
+            <a:srgbClr val="CFC9EE"/>
+          </a:solidFill>
+          <a:ln>
+            <a:noFill/>
+          </a:ln>
+          <a:effectLst/>
+        </p:spPr>
+        <p:style>
+          <a:lnRef idx="1">
+            <a:schemeClr val="accent1"/>
+          </a:lnRef>
+          <a:fillRef idx="3">
+            <a:schemeClr val="accent1"/>
+          </a:fillRef>
+          <a:effectRef idx="2">
+            <a:schemeClr val="accent1"/>
+          </a:effectRef>
+          <a:fontRef idx="minor">
+            <a:schemeClr val="lt1"/>
+          </a:fontRef>
+        </p:style>
+        <p:txBody>
+          <a:bodyPr rtlCol="0" anchor="ctr" wrap="square"/>
+          <a:lstStyle/>
+          <a:p>
+            <a:pPr algn="ctr"/>
+          </a:p>
+        </p:txBody>
+      </p:sp>
+      <p:sp>
+        <p:nvSpPr>
+          <p:cNvPr id="43" name="TextBox 42"/>
           <p:cNvSpPr txBox="1"/>
           <p:nvPr/>
         </p:nvSpPr>
@@ -21713,7 +21958,7 @@
       </p:sp>
       <p:sp>
         <p:nvSpPr>
-          <p:cNvPr id="26" name="Oval 25"/>
+          <p:cNvPr id="44" name="Oval 43"/>
           <p:cNvSpPr/>
           <p:nvPr/>
         </p:nvSpPr>
@@ -21757,7 +22002,7 @@
       </p:sp>
       <p:sp>
         <p:nvSpPr>
-          <p:cNvPr id="27" name="TextBox 26"/>
+          <p:cNvPr id="45" name="TextBox 44"/>
           <p:cNvSpPr txBox="1"/>
           <p:nvPr/>
         </p:nvSpPr>
@@ -21792,7 +22037,7 @@
       </p:sp>
       <p:sp>
         <p:nvSpPr>
-          <p:cNvPr id="28" name="TextBox 27"/>
+          <p:cNvPr id="46" name="TextBox 45"/>
           <p:cNvSpPr txBox="1"/>
           <p:nvPr/>
         </p:nvSpPr>
@@ -21820,7 +22065,7 @@
                 </a:solidFill>
                 <a:latin typeface="Calibri"/>
               </a:rPr>
-              <a:t>S19  ·  23 / 27</a:t>
+              <a:t>S19  ·  23 / 28</a:t>
             </a:r>
           </a:p>
         </p:txBody>
@@ -21834,6 +22079,990 @@
 </file>
 
 <file path=ppt/slides/slide24.xml><?xml version="1.0" encoding="utf-8"?>
+<p:sld xmlns:a="http://schemas.openxmlformats.org/drawingml/2006/main" xmlns:p="http://schemas.openxmlformats.org/presentationml/2006/main" xmlns:r="http://schemas.openxmlformats.org/officeDocument/2006/relationships">
+  <p:cSld>
+    <p:spTree>
+      <p:nvGrpSpPr>
+        <p:cNvPr id="1" name=""/>
+        <p:cNvGrpSpPr/>
+        <p:nvPr/>
+      </p:nvGrpSpPr>
+      <p:grpSpPr/>
+      <p:pic>
+        <p:nvPicPr>
+          <p:cNvPr id="2" name="Picture 1" descr="bg_light.jpg"/>
+          <p:cNvPicPr>
+            <a:picLocks noChangeAspect="1"/>
+          </p:cNvPicPr>
+          <p:nvPr/>
+        </p:nvPicPr>
+        <p:blipFill>
+          <a:blip r:embed="rId2"/>
+          <a:stretch>
+            <a:fillRect/>
+          </a:stretch>
+        </p:blipFill>
+        <p:spPr>
+          <a:xfrm>
+            <a:off x="0" y="0"/>
+            <a:ext cx="12191695" cy="6858000"/>
+          </a:xfrm>
+          <a:prstGeom prst="rect">
+            <a:avLst/>
+          </a:prstGeom>
+        </p:spPr>
+      </p:pic>
+      <p:pic>
+        <p:nvPicPr>
+          <p:cNvPr id="3" name="Picture 2" descr="iitgn_logo.png"/>
+          <p:cNvPicPr>
+            <a:picLocks noChangeAspect="1"/>
+          </p:cNvPicPr>
+          <p:nvPr/>
+        </p:nvPicPr>
+        <p:blipFill>
+          <a:blip r:embed="rId3"/>
+          <a:stretch>
+            <a:fillRect/>
+          </a:stretch>
+        </p:blipFill>
+        <p:spPr>
+          <a:xfrm>
+            <a:off x="530352" y="201168"/>
+            <a:ext cx="420624" cy="420624"/>
+          </a:xfrm>
+          <a:prstGeom prst="rect">
+            <a:avLst/>
+          </a:prstGeom>
+        </p:spPr>
+      </p:pic>
+      <p:sp>
+        <p:nvSpPr>
+          <p:cNvPr id="4" name="TextBox 3"/>
+          <p:cNvSpPr txBox="1"/>
+          <p:nvPr/>
+        </p:nvSpPr>
+        <p:spPr>
+          <a:xfrm>
+            <a:off x="1042416" y="228600"/>
+            <a:ext cx="5120640" cy="185166"/>
+          </a:xfrm>
+          <a:prstGeom prst="rect">
+            <a:avLst/>
+          </a:prstGeom>
+          <a:noFill/>
+        </p:spPr>
+        <p:txBody>
+          <a:bodyPr wrap="square" anchor="t" lIns="0" rIns="0" tIns="0" bIns="0">
+            <a:spAutoFit/>
+          </a:bodyPr>
+          <a:lstStyle/>
+          <a:p>
+            <a:pPr algn="l"/>
+            <a:r>
+              <a:rPr sz="900" b="1" i="0">
+                <a:solidFill>
+                  <a:srgbClr val="1A0F5C"/>
+                </a:solidFill>
+                <a:latin typeface="Calibri"/>
+              </a:rPr>
+              <a:t>Indian Institute of Technology Gandhinagar</a:t>
+            </a:r>
+          </a:p>
+        </p:txBody>
+      </p:sp>
+      <p:sp>
+        <p:nvSpPr>
+          <p:cNvPr id="5" name="TextBox 4"/>
+          <p:cNvSpPr txBox="1"/>
+          <p:nvPr/>
+        </p:nvSpPr>
+        <p:spPr>
+          <a:xfrm>
+            <a:off x="1042416" y="420623"/>
+            <a:ext cx="5852160" cy="127381"/>
+          </a:xfrm>
+          <a:prstGeom prst="rect">
+            <a:avLst/>
+          </a:prstGeom>
+          <a:noFill/>
+        </p:spPr>
+        <p:txBody>
+          <a:bodyPr wrap="square" anchor="t" lIns="0" rIns="0" tIns="0" bIns="0">
+            <a:spAutoFit/>
+          </a:bodyPr>
+          <a:lstStyle/>
+          <a:p>
+            <a:pPr algn="l"/>
+            <a:r>
+              <a:rPr sz="550" b="1" i="0" spc="300">
+                <a:solidFill>
+                  <a:srgbClr val="6B6690"/>
+                </a:solidFill>
+                <a:latin typeface="Calibri"/>
+              </a:rPr>
+              <a:t>ADMINISTERED THROUGH THE COMPETENCY ADVANCEMENT ACADEMY</a:t>
+            </a:r>
+          </a:p>
+        </p:txBody>
+      </p:sp>
+      <p:sp>
+        <p:nvSpPr>
+          <p:cNvPr id="6" name="TextBox 5"/>
+          <p:cNvSpPr txBox="1"/>
+          <p:nvPr/>
+        </p:nvSpPr>
+        <p:spPr>
+          <a:xfrm>
+            <a:off x="5992063" y="310896"/>
+            <a:ext cx="5669280" cy="127381"/>
+          </a:xfrm>
+          <a:prstGeom prst="rect">
+            <a:avLst/>
+          </a:prstGeom>
+          <a:noFill/>
+        </p:spPr>
+        <p:txBody>
+          <a:bodyPr wrap="square" anchor="t" lIns="0" rIns="0" tIns="0" bIns="0">
+            <a:spAutoFit/>
+          </a:bodyPr>
+          <a:lstStyle/>
+          <a:p>
+            <a:pPr algn="r"/>
+            <a:r>
+              <a:rPr sz="550" b="1" i="0" spc="300">
+                <a:solidFill>
+                  <a:srgbClr val="6B6690"/>
+                </a:solidFill>
+                <a:latin typeface="Calibri"/>
+              </a:rPr>
+              <a:t>WEEK 2  ·  DAY 1  ·  KALPA GLOBAL CAPABILITY CENTRE</a:t>
+            </a:r>
+          </a:p>
+        </p:txBody>
+      </p:sp>
+      <p:sp>
+        <p:nvSpPr>
+          <p:cNvPr id="7" name="TextBox 6"/>
+          <p:cNvSpPr txBox="1"/>
+          <p:nvPr/>
+        </p:nvSpPr>
+        <p:spPr>
+          <a:xfrm>
+            <a:off x="530352" y="676656"/>
+            <a:ext cx="11130991" cy="512064"/>
+          </a:xfrm>
+          <a:prstGeom prst="rect">
+            <a:avLst/>
+          </a:prstGeom>
+          <a:noFill/>
+        </p:spPr>
+        <p:txBody>
+          <a:bodyPr wrap="square" anchor="b" lIns="0" rIns="0" tIns="0" bIns="0">
+            <a:spAutoFit/>
+          </a:bodyPr>
+          <a:lstStyle/>
+          <a:p>
+            <a:pPr algn="l"/>
+            <a:r>
+              <a:rPr sz="2600" b="0" i="0">
+                <a:solidFill>
+                  <a:srgbClr val="1A0F5C"/>
+                </a:solidFill>
+                <a:latin typeface="Georgia"/>
+              </a:rPr>
+              <a:t>The Kahoot: eight items, none of them graded</a:t>
+            </a:r>
+          </a:p>
+        </p:txBody>
+      </p:sp>
+      <p:sp>
+        <p:nvSpPr>
+          <p:cNvPr id="8" name="TextBox 7"/>
+          <p:cNvSpPr txBox="1"/>
+          <p:nvPr/>
+        </p:nvSpPr>
+        <p:spPr>
+          <a:xfrm>
+            <a:off x="530352" y="1243584"/>
+            <a:ext cx="11130991" cy="234696"/>
+          </a:xfrm>
+          <a:prstGeom prst="rect">
+            <a:avLst/>
+          </a:prstGeom>
+          <a:noFill/>
+        </p:spPr>
+        <p:txBody>
+          <a:bodyPr wrap="square" anchor="t" lIns="0" rIns="0" tIns="0" bIns="0">
+            <a:spAutoFit/>
+          </a:bodyPr>
+          <a:lstStyle/>
+          <a:p>
+            <a:pPr algn="l"/>
+            <a:r>
+              <a:rPr sz="1200" b="0" i="0">
+                <a:solidFill>
+                  <a:srgbClr val="6B6690"/>
+                </a:solidFill>
+                <a:latin typeface="Calibri"/>
+              </a:rPr>
+              <a:t>Which of the day's decisions can the room make in twenty seconds each?</a:t>
+            </a:r>
+          </a:p>
+        </p:txBody>
+      </p:sp>
+      <p:sp>
+        <p:nvSpPr>
+          <p:cNvPr id="9" name="TextBox 8"/>
+          <p:cNvSpPr txBox="1"/>
+          <p:nvPr/>
+        </p:nvSpPr>
+        <p:spPr>
+          <a:xfrm>
+            <a:off x="530352" y="1956816"/>
+            <a:ext cx="3527450" cy="698500"/>
+          </a:xfrm>
+          <a:prstGeom prst="rect">
+            <a:avLst/>
+          </a:prstGeom>
+          <a:noFill/>
+        </p:spPr>
+        <p:txBody>
+          <a:bodyPr wrap="square" anchor="t" lIns="0" rIns="0" tIns="0" bIns="0">
+            <a:spAutoFit/>
+          </a:bodyPr>
+          <a:lstStyle/>
+          <a:p>
+            <a:pPr algn="l"/>
+            <a:r>
+              <a:rPr sz="4400" b="0" i="0">
+                <a:solidFill>
+                  <a:srgbClr val="5B3FD6"/>
+                </a:solidFill>
+                <a:latin typeface="Georgia"/>
+              </a:rPr>
+              <a:t>8</a:t>
+            </a:r>
+          </a:p>
+        </p:txBody>
+      </p:sp>
+      <p:sp>
+        <p:nvSpPr>
+          <p:cNvPr id="10" name="TextBox 9"/>
+          <p:cNvSpPr txBox="1"/>
+          <p:nvPr/>
+        </p:nvSpPr>
+        <p:spPr>
+          <a:xfrm>
+            <a:off x="530352" y="2691892"/>
+            <a:ext cx="3527450" cy="168656"/>
+          </a:xfrm>
+          <a:prstGeom prst="rect">
+            <a:avLst/>
+          </a:prstGeom>
+          <a:noFill/>
+        </p:spPr>
+        <p:txBody>
+          <a:bodyPr wrap="square" anchor="t" lIns="0" rIns="0" tIns="0" bIns="0">
+            <a:spAutoFit/>
+          </a:bodyPr>
+          <a:lstStyle/>
+          <a:p>
+            <a:pPr algn="l"/>
+            <a:r>
+              <a:rPr sz="800" b="1" i="0" spc="250">
+                <a:solidFill>
+                  <a:srgbClr val="1A0F5C"/>
+                </a:solidFill>
+                <a:latin typeface="Calibri"/>
+              </a:rPr>
+              <a:t>ITEMS</a:t>
+            </a:r>
+          </a:p>
+        </p:txBody>
+      </p:sp>
+      <p:sp>
+        <p:nvSpPr>
+          <p:cNvPr id="11" name="TextBox 10"/>
+          <p:cNvSpPr txBox="1"/>
+          <p:nvPr/>
+        </p:nvSpPr>
+        <p:spPr>
+          <a:xfrm>
+            <a:off x="530352" y="2893060"/>
+            <a:ext cx="3527450" cy="193421"/>
+          </a:xfrm>
+          <a:prstGeom prst="rect">
+            <a:avLst/>
+          </a:prstGeom>
+          <a:noFill/>
+        </p:spPr>
+        <p:txBody>
+          <a:bodyPr wrap="square" anchor="t" lIns="0" rIns="0" tIns="0" bIns="0">
+            <a:spAutoFit/>
+          </a:bodyPr>
+          <a:lstStyle/>
+          <a:p>
+            <a:pPr algn="l"/>
+            <a:r>
+              <a:rPr sz="950" b="0" i="0">
+                <a:solidFill>
+                  <a:srgbClr val="6B6690"/>
+                </a:solidFill>
+                <a:latin typeface="Calibri"/>
+              </a:rPr>
+              <a:t>seven on today, one returning from Week 1 Thursday</a:t>
+            </a:r>
+          </a:p>
+        </p:txBody>
+      </p:sp>
+      <p:sp>
+        <p:nvSpPr>
+          <p:cNvPr id="12" name="Rectangle 11"/>
+          <p:cNvSpPr/>
+          <p:nvPr/>
+        </p:nvSpPr>
+        <p:spPr>
+          <a:xfrm>
+            <a:off x="530352" y="3145536"/>
+            <a:ext cx="3527450" cy="10972"/>
+          </a:xfrm>
+          <a:prstGeom prst="rect">
+            <a:avLst/>
+          </a:prstGeom>
+          <a:solidFill>
+            <a:srgbClr val="E4E1F1"/>
+          </a:solidFill>
+          <a:ln>
+            <a:noFill/>
+          </a:ln>
+          <a:effectLst/>
+        </p:spPr>
+        <p:style>
+          <a:lnRef idx="1">
+            <a:schemeClr val="accent1"/>
+          </a:lnRef>
+          <a:fillRef idx="3">
+            <a:schemeClr val="accent1"/>
+          </a:fillRef>
+          <a:effectRef idx="2">
+            <a:schemeClr val="accent1"/>
+          </a:effectRef>
+          <a:fontRef idx="minor">
+            <a:schemeClr val="lt1"/>
+          </a:fontRef>
+        </p:style>
+        <p:txBody>
+          <a:bodyPr rtlCol="0" anchor="ctr" wrap="square"/>
+          <a:lstStyle/>
+          <a:p>
+            <a:pPr algn="ctr"/>
+          </a:p>
+        </p:txBody>
+      </p:sp>
+      <p:sp>
+        <p:nvSpPr>
+          <p:cNvPr id="13" name="TextBox 12"/>
+          <p:cNvSpPr txBox="1"/>
+          <p:nvPr/>
+        </p:nvSpPr>
+        <p:spPr>
+          <a:xfrm>
+            <a:off x="4332122" y="1956816"/>
+            <a:ext cx="3527450" cy="698500"/>
+          </a:xfrm>
+          <a:prstGeom prst="rect">
+            <a:avLst/>
+          </a:prstGeom>
+          <a:noFill/>
+        </p:spPr>
+        <p:txBody>
+          <a:bodyPr wrap="square" anchor="t" lIns="0" rIns="0" tIns="0" bIns="0">
+            <a:spAutoFit/>
+          </a:bodyPr>
+          <a:lstStyle/>
+          <a:p>
+            <a:pPr algn="l"/>
+            <a:r>
+              <a:rPr sz="4400" b="0" i="0">
+                <a:solidFill>
+                  <a:srgbClr val="5B3FD6"/>
+                </a:solidFill>
+                <a:latin typeface="Georgia"/>
+              </a:rPr>
+              <a:t>0</a:t>
+            </a:r>
+          </a:p>
+        </p:txBody>
+      </p:sp>
+      <p:sp>
+        <p:nvSpPr>
+          <p:cNvPr id="14" name="TextBox 13"/>
+          <p:cNvSpPr txBox="1"/>
+          <p:nvPr/>
+        </p:nvSpPr>
+        <p:spPr>
+          <a:xfrm>
+            <a:off x="4332122" y="2691892"/>
+            <a:ext cx="3527450" cy="168656"/>
+          </a:xfrm>
+          <a:prstGeom prst="rect">
+            <a:avLst/>
+          </a:prstGeom>
+          <a:noFill/>
+        </p:spPr>
+        <p:txBody>
+          <a:bodyPr wrap="square" anchor="t" lIns="0" rIns="0" tIns="0" bIns="0">
+            <a:spAutoFit/>
+          </a:bodyPr>
+          <a:lstStyle/>
+          <a:p>
+            <a:pPr algn="l"/>
+            <a:r>
+              <a:rPr sz="800" b="1" i="0" spc="250">
+                <a:solidFill>
+                  <a:srgbClr val="1A0F5C"/>
+                </a:solidFill>
+                <a:latin typeface="Calibri"/>
+              </a:rPr>
+              <a:t>GRADES</a:t>
+            </a:r>
+          </a:p>
+        </p:txBody>
+      </p:sp>
+      <p:sp>
+        <p:nvSpPr>
+          <p:cNvPr id="15" name="TextBox 14"/>
+          <p:cNvSpPr txBox="1"/>
+          <p:nvPr/>
+        </p:nvSpPr>
+        <p:spPr>
+          <a:xfrm>
+            <a:off x="4332122" y="2893060"/>
+            <a:ext cx="3527450" cy="193421"/>
+          </a:xfrm>
+          <a:prstGeom prst="rect">
+            <a:avLst/>
+          </a:prstGeom>
+          <a:noFill/>
+        </p:spPr>
+        <p:txBody>
+          <a:bodyPr wrap="square" anchor="t" lIns="0" rIns="0" tIns="0" bIns="0">
+            <a:spAutoFit/>
+          </a:bodyPr>
+          <a:lstStyle/>
+          <a:p>
+            <a:pPr algn="l"/>
+            <a:r>
+              <a:rPr sz="950" b="0" i="0">
+                <a:solidFill>
+                  <a:srgbClr val="6B6690"/>
+                </a:solidFill>
+                <a:latin typeface="Calibri"/>
+              </a:rPr>
+              <a:t>the Kahoot is daily and ungraded</a:t>
+            </a:r>
+          </a:p>
+        </p:txBody>
+      </p:sp>
+      <p:sp>
+        <p:nvSpPr>
+          <p:cNvPr id="16" name="Rectangle 15"/>
+          <p:cNvSpPr/>
+          <p:nvPr/>
+        </p:nvSpPr>
+        <p:spPr>
+          <a:xfrm>
+            <a:off x="4332122" y="3145536"/>
+            <a:ext cx="3527450" cy="10972"/>
+          </a:xfrm>
+          <a:prstGeom prst="rect">
+            <a:avLst/>
+          </a:prstGeom>
+          <a:solidFill>
+            <a:srgbClr val="E4E1F1"/>
+          </a:solidFill>
+          <a:ln>
+            <a:noFill/>
+          </a:ln>
+          <a:effectLst/>
+        </p:spPr>
+        <p:style>
+          <a:lnRef idx="1">
+            <a:schemeClr val="accent1"/>
+          </a:lnRef>
+          <a:fillRef idx="3">
+            <a:schemeClr val="accent1"/>
+          </a:fillRef>
+          <a:effectRef idx="2">
+            <a:schemeClr val="accent1"/>
+          </a:effectRef>
+          <a:fontRef idx="minor">
+            <a:schemeClr val="lt1"/>
+          </a:fontRef>
+        </p:style>
+        <p:txBody>
+          <a:bodyPr rtlCol="0" anchor="ctr" wrap="square"/>
+          <a:lstStyle/>
+          <a:p>
+            <a:pPr algn="ctr"/>
+          </a:p>
+        </p:txBody>
+      </p:sp>
+      <p:sp>
+        <p:nvSpPr>
+          <p:cNvPr id="17" name="TextBox 16"/>
+          <p:cNvSpPr txBox="1"/>
+          <p:nvPr/>
+        </p:nvSpPr>
+        <p:spPr>
+          <a:xfrm>
+            <a:off x="8133892" y="1956816"/>
+            <a:ext cx="3527450" cy="698500"/>
+          </a:xfrm>
+          <a:prstGeom prst="rect">
+            <a:avLst/>
+          </a:prstGeom>
+          <a:noFill/>
+        </p:spPr>
+        <p:txBody>
+          <a:bodyPr wrap="square" anchor="t" lIns="0" rIns="0" tIns="0" bIns="0">
+            <a:spAutoFit/>
+          </a:bodyPr>
+          <a:lstStyle/>
+          <a:p>
+            <a:pPr algn="l"/>
+            <a:r>
+              <a:rPr sz="4400" b="0" i="0">
+                <a:solidFill>
+                  <a:srgbClr val="5B3FD6"/>
+                </a:solidFill>
+                <a:latin typeface="Georgia"/>
+              </a:rPr>
+              <a:t>20 s</a:t>
+            </a:r>
+          </a:p>
+        </p:txBody>
+      </p:sp>
+      <p:sp>
+        <p:nvSpPr>
+          <p:cNvPr id="18" name="TextBox 17"/>
+          <p:cNvSpPr txBox="1"/>
+          <p:nvPr/>
+        </p:nvSpPr>
+        <p:spPr>
+          <a:xfrm>
+            <a:off x="8133892" y="2691892"/>
+            <a:ext cx="3527450" cy="168656"/>
+          </a:xfrm>
+          <a:prstGeom prst="rect">
+            <a:avLst/>
+          </a:prstGeom>
+          <a:noFill/>
+        </p:spPr>
+        <p:txBody>
+          <a:bodyPr wrap="square" anchor="t" lIns="0" rIns="0" tIns="0" bIns="0">
+            <a:spAutoFit/>
+          </a:bodyPr>
+          <a:lstStyle/>
+          <a:p>
+            <a:pPr algn="l"/>
+            <a:r>
+              <a:rPr sz="800" b="1" i="0" spc="250">
+                <a:solidFill>
+                  <a:srgbClr val="1A0F5C"/>
+                </a:solidFill>
+                <a:latin typeface="Calibri"/>
+              </a:rPr>
+              <a:t>PER ITEM</a:t>
+            </a:r>
+          </a:p>
+        </p:txBody>
+      </p:sp>
+      <p:sp>
+        <p:nvSpPr>
+          <p:cNvPr id="19" name="TextBox 18"/>
+          <p:cNvSpPr txBox="1"/>
+          <p:nvPr/>
+        </p:nvSpPr>
+        <p:spPr>
+          <a:xfrm>
+            <a:off x="8133892" y="2893060"/>
+            <a:ext cx="3527450" cy="193421"/>
+          </a:xfrm>
+          <a:prstGeom prst="rect">
+            <a:avLst/>
+          </a:prstGeom>
+          <a:noFill/>
+        </p:spPr>
+        <p:txBody>
+          <a:bodyPr wrap="square" anchor="t" lIns="0" rIns="0" tIns="0" bIns="0">
+            <a:spAutoFit/>
+          </a:bodyPr>
+          <a:lstStyle/>
+          <a:p>
+            <a:pPr algn="l"/>
+            <a:r>
+              <a:rPr sz="950" b="0" i="0">
+                <a:solidFill>
+                  <a:srgbClr val="6B6690"/>
+                </a:solidFill>
+                <a:latin typeface="Calibri"/>
+              </a:rPr>
+              <a:t>then the reason, aloud</a:t>
+            </a:r>
+          </a:p>
+        </p:txBody>
+      </p:sp>
+      <p:sp>
+        <p:nvSpPr>
+          <p:cNvPr id="20" name="Rectangle 19"/>
+          <p:cNvSpPr/>
+          <p:nvPr/>
+        </p:nvSpPr>
+        <p:spPr>
+          <a:xfrm>
+            <a:off x="8133892" y="3145536"/>
+            <a:ext cx="3527450" cy="10972"/>
+          </a:xfrm>
+          <a:prstGeom prst="rect">
+            <a:avLst/>
+          </a:prstGeom>
+          <a:solidFill>
+            <a:srgbClr val="E4E1F1"/>
+          </a:solidFill>
+          <a:ln>
+            <a:noFill/>
+          </a:ln>
+          <a:effectLst/>
+        </p:spPr>
+        <p:style>
+          <a:lnRef idx="1">
+            <a:schemeClr val="accent1"/>
+          </a:lnRef>
+          <a:fillRef idx="3">
+            <a:schemeClr val="accent1"/>
+          </a:fillRef>
+          <a:effectRef idx="2">
+            <a:schemeClr val="accent1"/>
+          </a:effectRef>
+          <a:fontRef idx="minor">
+            <a:schemeClr val="lt1"/>
+          </a:fontRef>
+        </p:style>
+        <p:txBody>
+          <a:bodyPr rtlCol="0" anchor="ctr" wrap="square"/>
+          <a:lstStyle/>
+          <a:p>
+            <a:pPr algn="ctr"/>
+          </a:p>
+        </p:txBody>
+      </p:sp>
+      <p:pic>
+        <p:nvPicPr>
+          <p:cNvPr id="21" name="mermaid diagram" descr="f29a3ab81528a198.png"/>
+          <p:cNvPicPr>
+            <a:picLocks noChangeAspect="1"/>
+          </p:cNvPicPr>
+          <p:nvPr/>
+        </p:nvPicPr>
+        <p:blipFill>
+          <a:blip r:embed="rId5"/>
+          <a:stretch>
+            <a:fillRect/>
+          </a:stretch>
+        </p:blipFill>
+        <p:spPr>
+          <a:xfrm>
+            <a:off x="3524097" y="3419856"/>
+            <a:ext cx="5143500" cy="2100262"/>
+          </a:xfrm>
+          <a:prstGeom prst="rect">
+            <a:avLst/>
+          </a:prstGeom>
+        </p:spPr>
+      </p:pic>
+      <p:sp>
+        <p:nvSpPr>
+          <p:cNvPr id="22" name="Oval 21"/>
+          <p:cNvSpPr/>
+          <p:nvPr/>
+        </p:nvSpPr>
+        <p:spPr>
+          <a:xfrm>
+            <a:off x="530352" y="6492240"/>
+            <a:ext cx="64008" cy="64008"/>
+          </a:xfrm>
+          <a:prstGeom prst="ellipse">
+            <a:avLst/>
+          </a:prstGeom>
+          <a:solidFill>
+            <a:srgbClr val="CFC9EE"/>
+          </a:solidFill>
+          <a:ln>
+            <a:noFill/>
+          </a:ln>
+          <a:effectLst/>
+        </p:spPr>
+        <p:style>
+          <a:lnRef idx="1">
+            <a:schemeClr val="accent1"/>
+          </a:lnRef>
+          <a:fillRef idx="3">
+            <a:schemeClr val="accent1"/>
+          </a:fillRef>
+          <a:effectRef idx="2">
+            <a:schemeClr val="accent1"/>
+          </a:effectRef>
+          <a:fontRef idx="minor">
+            <a:schemeClr val="lt1"/>
+          </a:fontRef>
+        </p:style>
+        <p:txBody>
+          <a:bodyPr rtlCol="0" anchor="ctr" wrap="square"/>
+          <a:lstStyle/>
+          <a:p>
+            <a:pPr algn="ctr"/>
+          </a:p>
+        </p:txBody>
+      </p:sp>
+      <p:sp>
+        <p:nvSpPr>
+          <p:cNvPr id="23" name="TextBox 22"/>
+          <p:cNvSpPr txBox="1"/>
+          <p:nvPr/>
+        </p:nvSpPr>
+        <p:spPr>
+          <a:xfrm>
+            <a:off x="640080" y="6437376"/>
+            <a:ext cx="1286446" cy="152146"/>
+          </a:xfrm>
+          <a:prstGeom prst="rect">
+            <a:avLst/>
+          </a:prstGeom>
+          <a:noFill/>
+        </p:spPr>
+        <p:txBody>
+          <a:bodyPr wrap="square" anchor="t" lIns="0" rIns="0" tIns="0" bIns="0">
+            <a:spAutoFit/>
+          </a:bodyPr>
+          <a:lstStyle/>
+          <a:p>
+            <a:pPr algn="l"/>
+            <a:r>
+              <a:rPr sz="700" b="0" i="0">
+                <a:solidFill>
+                  <a:srgbClr val="6B6690"/>
+                </a:solidFill>
+                <a:latin typeface="Calibri"/>
+              </a:rPr>
+              <a:t>Same answer next week?</a:t>
+            </a:r>
+          </a:p>
+        </p:txBody>
+      </p:sp>
+      <p:sp>
+        <p:nvSpPr>
+          <p:cNvPr id="24" name="Oval 23"/>
+          <p:cNvSpPr/>
+          <p:nvPr/>
+        </p:nvSpPr>
+        <p:spPr>
+          <a:xfrm>
+            <a:off x="2017966" y="6492240"/>
+            <a:ext cx="64008" cy="64008"/>
+          </a:xfrm>
+          <a:prstGeom prst="ellipse">
+            <a:avLst/>
+          </a:prstGeom>
+          <a:solidFill>
+            <a:srgbClr val="CFC9EE"/>
+          </a:solidFill>
+          <a:ln>
+            <a:noFill/>
+          </a:ln>
+          <a:effectLst/>
+        </p:spPr>
+        <p:style>
+          <a:lnRef idx="1">
+            <a:schemeClr val="accent1"/>
+          </a:lnRef>
+          <a:fillRef idx="3">
+            <a:schemeClr val="accent1"/>
+          </a:fillRef>
+          <a:effectRef idx="2">
+            <a:schemeClr val="accent1"/>
+          </a:effectRef>
+          <a:fontRef idx="minor">
+            <a:schemeClr val="lt1"/>
+          </a:fontRef>
+        </p:style>
+        <p:txBody>
+          <a:bodyPr rtlCol="0" anchor="ctr" wrap="square"/>
+          <a:lstStyle/>
+          <a:p>
+            <a:pPr algn="ctr"/>
+          </a:p>
+        </p:txBody>
+      </p:sp>
+      <p:sp>
+        <p:nvSpPr>
+          <p:cNvPr id="25" name="TextBox 24"/>
+          <p:cNvSpPr txBox="1"/>
+          <p:nvPr/>
+        </p:nvSpPr>
+        <p:spPr>
+          <a:xfrm>
+            <a:off x="2127694" y="6437376"/>
+            <a:ext cx="1194435" cy="152146"/>
+          </a:xfrm>
+          <a:prstGeom prst="rect">
+            <a:avLst/>
+          </a:prstGeom>
+          <a:noFill/>
+        </p:spPr>
+        <p:txBody>
+          <a:bodyPr wrap="square" anchor="t" lIns="0" rIns="0" tIns="0" bIns="0">
+            <a:spAutoFit/>
+          </a:bodyPr>
+          <a:lstStyle/>
+          <a:p>
+            <a:pPr algn="l"/>
+            <a:r>
+              <a:rPr sz="700" b="0" i="0">
+                <a:solidFill>
+                  <a:srgbClr val="6B6690"/>
+                </a:solidFill>
+                <a:latin typeface="Calibri"/>
+              </a:rPr>
+              <a:t>Can you do it alone?</a:t>
+            </a:r>
+          </a:p>
+        </p:txBody>
+      </p:sp>
+      <p:sp>
+        <p:nvSpPr>
+          <p:cNvPr id="26" name="Oval 25"/>
+          <p:cNvSpPr/>
+          <p:nvPr/>
+        </p:nvSpPr>
+        <p:spPr>
+          <a:xfrm>
+            <a:off x="3413569" y="6492240"/>
+            <a:ext cx="64008" cy="64008"/>
+          </a:xfrm>
+          <a:prstGeom prst="ellipse">
+            <a:avLst/>
+          </a:prstGeom>
+          <a:solidFill>
+            <a:srgbClr val="5B3FD6"/>
+          </a:solidFill>
+          <a:ln>
+            <a:noFill/>
+          </a:ln>
+          <a:effectLst/>
+        </p:spPr>
+        <p:style>
+          <a:lnRef idx="1">
+            <a:schemeClr val="accent1"/>
+          </a:lnRef>
+          <a:fillRef idx="3">
+            <a:schemeClr val="accent1"/>
+          </a:fillRef>
+          <a:effectRef idx="2">
+            <a:schemeClr val="accent1"/>
+          </a:effectRef>
+          <a:fontRef idx="minor">
+            <a:schemeClr val="lt1"/>
+          </a:fontRef>
+        </p:style>
+        <p:txBody>
+          <a:bodyPr rtlCol="0" anchor="ctr" wrap="square"/>
+          <a:lstStyle/>
+          <a:p>
+            <a:pPr algn="ctr"/>
+          </a:p>
+        </p:txBody>
+      </p:sp>
+      <p:sp>
+        <p:nvSpPr>
+          <p:cNvPr id="27" name="TextBox 26"/>
+          <p:cNvSpPr txBox="1"/>
+          <p:nvPr/>
+        </p:nvSpPr>
+        <p:spPr>
+          <a:xfrm>
+            <a:off x="3523297" y="6437376"/>
+            <a:ext cx="1286446" cy="152146"/>
+          </a:xfrm>
+          <a:prstGeom prst="rect">
+            <a:avLst/>
+          </a:prstGeom>
+          <a:noFill/>
+        </p:spPr>
+        <p:txBody>
+          <a:bodyPr wrap="square" anchor="t" lIns="0" rIns="0" tIns="0" bIns="0">
+            <a:spAutoFit/>
+          </a:bodyPr>
+          <a:lstStyle/>
+          <a:p>
+            <a:pPr algn="l"/>
+            <a:r>
+              <a:rPr sz="700" b="1" i="0">
+                <a:solidFill>
+                  <a:srgbClr val="5B3FD6"/>
+                </a:solidFill>
+                <a:latin typeface="Calibri"/>
+              </a:rPr>
+              <a:t>What do we tell Anand?</a:t>
+            </a:r>
+          </a:p>
+        </p:txBody>
+      </p:sp>
+      <p:sp>
+        <p:nvSpPr>
+          <p:cNvPr id="28" name="TextBox 27"/>
+          <p:cNvSpPr txBox="1"/>
+          <p:nvPr/>
+        </p:nvSpPr>
+        <p:spPr>
+          <a:xfrm>
+            <a:off x="10198303" y="6437376"/>
+            <a:ext cx="1463040" cy="160401"/>
+          </a:xfrm>
+          <a:prstGeom prst="rect">
+            <a:avLst/>
+          </a:prstGeom>
+          <a:noFill/>
+        </p:spPr>
+        <p:txBody>
+          <a:bodyPr wrap="square" anchor="t" lIns="0" rIns="0" tIns="0" bIns="0">
+            <a:spAutoFit/>
+          </a:bodyPr>
+          <a:lstStyle/>
+          <a:p>
+            <a:pPr algn="r"/>
+            <a:r>
+              <a:rPr sz="750" b="0" i="0">
+                <a:solidFill>
+                  <a:srgbClr val="6B6690"/>
+                </a:solidFill>
+                <a:latin typeface="Calibri"/>
+              </a:rPr>
+              <a:t>S20  ·  24 / 28</a:t>
+            </a:r>
+          </a:p>
+        </p:txBody>
+      </p:sp>
+    </p:spTree>
+  </p:cSld>
+  <p:clrMapOvr>
+    <a:masterClrMapping/>
+  </p:clrMapOvr>
+</p:sld>
+</file>
+
+<file path=ppt/slides/slide25.xml><?xml version="1.0" encoding="utf-8"?>
 <p:sld xmlns:a="http://schemas.openxmlformats.org/drawingml/2006/main" xmlns:p="http://schemas.openxmlformats.org/presentationml/2006/main" xmlns:r="http://schemas.openxmlformats.org/officeDocument/2006/relationships">
   <p:cSld>
     <p:spTree>
@@ -22959,7 +24188,7 @@
                 </a:solidFill>
                 <a:latin typeface="Calibri"/>
               </a:rPr>
-              <a:t>D20  ·  24 / 27</a:t>
+              <a:t>D21  ·  25 / 28</a:t>
             </a:r>
           </a:p>
         </p:txBody>
@@ -22972,7 +24201,7 @@
 </p:sld>
 </file>
 
-<file path=ppt/slides/slide25.xml><?xml version="1.0" encoding="utf-8"?>
+<file path=ppt/slides/slide26.xml><?xml version="1.0" encoding="utf-8"?>
 <p:sld xmlns:a="http://schemas.openxmlformats.org/drawingml/2006/main" xmlns:p="http://schemas.openxmlformats.org/presentationml/2006/main" xmlns:r="http://schemas.openxmlformats.org/officeDocument/2006/relationships">
   <p:cSld>
     <p:spTree>
@@ -23787,7 +25016,7 @@
                 </a:solidFill>
                 <a:latin typeface="Calibri"/>
               </a:rPr>
-              <a:t>D21  ·  25 / 27</a:t>
+              <a:t>D22  ·  26 / 28</a:t>
             </a:r>
           </a:p>
         </p:txBody>
@@ -23800,7 +25029,7 @@
 </p:sld>
 </file>
 
-<file path=ppt/slides/slide26.xml><?xml version="1.0" encoding="utf-8"?>
+<file path=ppt/slides/slide27.xml><?xml version="1.0" encoding="utf-8"?>
 <p:sld xmlns:a="http://schemas.openxmlformats.org/drawingml/2006/main" xmlns:p="http://schemas.openxmlformats.org/presentationml/2006/main" xmlns:r="http://schemas.openxmlformats.org/officeDocument/2006/relationships">
   <p:cSld>
     <p:spTree>
@@ -24858,7 +26087,7 @@
                 </a:solidFill>
                 <a:latin typeface="Calibri"/>
               </a:rPr>
-              <a:t>D22  ·  26 / 27</a:t>
+              <a:t>D23  ·  27 / 28</a:t>
             </a:r>
           </a:p>
         </p:txBody>
@@ -24871,7 +26100,7 @@
 </p:sld>
 </file>
 
-<file path=ppt/slides/slide27.xml><?xml version="1.0" encoding="utf-8"?>
+<file path=ppt/slides/slide28.xml><?xml version="1.0" encoding="utf-8"?>
 <p:sld xmlns:a="http://schemas.openxmlformats.org/drawingml/2006/main" xmlns:p="http://schemas.openxmlformats.org/presentationml/2006/main" xmlns:r="http://schemas.openxmlformats.org/officeDocument/2006/relationships">
   <p:cSld>
     <p:spTree>
@@ -25555,7 +26784,7 @@
                 </a:solidFill>
                 <a:latin typeface="Calibri"/>
               </a:rPr>
-              <a:t>S23  ·  27 / 27</a:t>
+              <a:t>S24  ·  28 / 28</a:t>
             </a:r>
           </a:p>
         </p:txBody>
@@ -26066,7 +27295,7 @@
                 </a:solidFill>
                 <a:latin typeface="Calibri"/>
               </a:rPr>
-              <a:t>3 / 27</a:t>
+              <a:t>3 / 28</a:t>
             </a:r>
           </a:p>
         </p:txBody>
@@ -27781,7 +29010,7 @@
                 </a:solidFill>
                 <a:latin typeface="Calibri"/>
               </a:rPr>
-              <a:t>S2  ·  4 / 27</a:t>
+              <a:t>S2  ·  4 / 28</a:t>
             </a:r>
           </a:p>
         </p:txBody>
@@ -28981,7 +30210,7 @@
                 </a:solidFill>
                 <a:latin typeface="Calibri"/>
               </a:rPr>
-              <a:t>S3  ·  5 / 27</a:t>
+              <a:t>S3  ·  5 / 28</a:t>
             </a:r>
           </a:p>
         </p:txBody>
@@ -29557,7 +30786,7 @@
                 </a:solidFill>
                 <a:latin typeface="Calibri"/>
               </a:rPr>
-              <a:t>S4  ·  6 / 27</a:t>
+              <a:t>S4  ·  6 / 28</a:t>
             </a:r>
           </a:p>
         </p:txBody>
@@ -30685,7 +31914,7 @@
                 </a:solidFill>
                 <a:latin typeface="Calibri"/>
               </a:rPr>
-              <a:t>S5  ·  7 / 27</a:t>
+              <a:t>S5  ·  7 / 28</a:t>
             </a:r>
           </a:p>
         </p:txBody>
@@ -31359,7 +32588,7 @@
                 </a:solidFill>
                 <a:latin typeface="Calibri"/>
               </a:rPr>
-              <a:t>S6  ·  8 / 27</a:t>
+              <a:t>S6  ·  8 / 28</a:t>
             </a:r>
           </a:p>
         </p:txBody>
@@ -32328,7 +33557,7 @@
                 </a:solidFill>
                 <a:latin typeface="Calibri"/>
               </a:rPr>
-              <a:t>S7  ·  9 / 27</a:t>
+              <a:t>S7  ·  9 / 28</a:t>
             </a:r>
           </a:p>
         </p:txBody>

--- a/content/W02/D1/slides/C2_W02_D01_half2_STUDENT.pptx
+++ b/content/W02/D1/slides/C2_W02_D01_half2_STUDENT.pptx
@@ -10050,7 +10050,7 @@
       </p:sp>
       <p:pic>
         <p:nvPicPr>
-          <p:cNvPr id="9" name="mermaid diagram" descr="7647d511fe64edd1.png"/>
+          <p:cNvPr id="9" name="mermaid diagram" descr="3bc846f50e9698f3.png"/>
           <p:cNvPicPr>
             <a:picLocks noChangeAspect="1"/>
           </p:cNvPicPr>
@@ -11955,7 +11955,7 @@
       </p:sp>
       <p:pic>
         <p:nvPicPr>
-          <p:cNvPr id="9" name="mermaid diagram" descr="b2475a8e6bd693c1.png"/>
+          <p:cNvPr id="9" name="mermaid diagram" descr="1d703620b9331bd1.png"/>
           <p:cNvPicPr>
             <a:picLocks noChangeAspect="1"/>
           </p:cNvPicPr>
@@ -12611,7 +12611,7 @@
       </p:sp>
       <p:pic>
         <p:nvPicPr>
-          <p:cNvPr id="11" name="mermaid diagram" descr="0976b04f81f9508f.png"/>
+          <p:cNvPr id="11" name="mermaid diagram" descr="0d46d70744d0d965.png"/>
           <p:cNvPicPr>
             <a:picLocks noChangeAspect="1"/>
           </p:cNvPicPr>
@@ -22760,7 +22760,7 @@
       </p:sp>
       <p:pic>
         <p:nvPicPr>
-          <p:cNvPr id="21" name="mermaid diagram" descr="f29a3ab81528a198.png"/>
+          <p:cNvPr id="21" name="mermaid diagram" descr="82879d0b5e755ad7.png"/>
           <p:cNvPicPr>
             <a:picLocks noChangeAspect="1"/>
           </p:cNvPicPr>
@@ -24491,7 +24491,7 @@
       </p:sp>
       <p:pic>
         <p:nvPicPr>
-          <p:cNvPr id="10" name="mermaid diagram" descr="6a6d9ee5681df4b3.png"/>
+          <p:cNvPr id="10" name="mermaid diagram" descr="7dafdf7130c06c0d.png"/>
           <p:cNvPicPr>
             <a:picLocks noChangeAspect="1"/>
           </p:cNvPicPr>
@@ -26495,7 +26495,7 @@
       </p:sp>
       <p:pic>
         <p:nvPicPr>
-          <p:cNvPr id="13" name="mermaid diagram" descr="6055f7d26d6b54f8.png"/>
+          <p:cNvPr id="13" name="mermaid diagram" descr="0d40c52eb9dde352.png"/>
           <p:cNvPicPr>
             <a:picLocks noChangeAspect="1"/>
           </p:cNvPicPr>
@@ -30458,7 +30458,7 @@
       </p:sp>
       <p:pic>
         <p:nvPicPr>
-          <p:cNvPr id="9" name="mermaid diagram" descr="4cd06380afdb5b42.png"/>
+          <p:cNvPr id="9" name="mermaid diagram" descr="d0e861d03cb57114.png"/>
           <p:cNvPicPr>
             <a:picLocks noChangeAspect="1"/>
           </p:cNvPicPr>
@@ -32162,7 +32162,7 @@
       </p:sp>
       <p:pic>
         <p:nvPicPr>
-          <p:cNvPr id="9" name="mermaid diagram" descr="bf2295a3cfc083ac.png"/>
+          <p:cNvPr id="9" name="mermaid diagram" descr="76ef3f8a0b221813.png"/>
           <p:cNvPicPr>
             <a:picLocks noChangeAspect="1"/>
           </p:cNvPicPr>

--- a/content/W02/D1/slides/C2_W02_D01_half2_STUDENT.pptx
+++ b/content/W02/D1/slides/C2_W02_D01_half2_STUDENT.pptx
@@ -1370,12 +1370,12 @@
           <a:lstStyle/>
           <a:p>
             <a:r>
-              <a:t>LIVE, 3 minutes. Read Anand's words aloud. Delivered means the order reached the customer and was</a:t>
-            </a:r>
-          </a:p>
-          <a:p>
-            <a:r>
-              <a:t>not returned or cancelled; on the book 653 of the 1,000 orders are delivered. Nothing from the</a:t>
+              <a:t>LIVE, 3 minutes. Read Anand's words aloud, and leave the definition's filter to the room: part 1's</a:t>
+            </a:r>
+          </a:p>
+          <a:p>
+            <a:r>
+              <a:t>first marker asks which orders it keeps. Nothing from the</a:t>
             </a:r>
           </a:p>
           <a:p>
@@ -1810,12 +1810,12 @@
           </a:p>
           <a:p>
             <a:r>
-              <a:t>three of the brief's own, and one line for Anand naming the channel losing its consumers fastest,</a:t>
-            </a:r>
-          </a:p>
-          <a:p>
-            <a:r>
-              <a:t>with its number.</a:t>
+              <a:t>three of the brief's own, and the line for Anand's channel sheet about Marketing's request, with the</a:t>
+            </a:r>
+          </a:p>
+          <a:p>
+            <a:r>
+              <a:t>number it rests on.</a:t>
             </a:r>
           </a:p>
         </p:txBody>
@@ -6312,7 +6312,7 @@
         <p:spPr>
           <a:xfrm>
             <a:off x="3056953" y="5870448"/>
-            <a:ext cx="1484185" cy="185166"/>
+            <a:ext cx="1425035" cy="185166"/>
           </a:xfrm>
           <a:prstGeom prst="rect">
             <a:avLst/>
@@ -6333,7 +6333,7 @@
                 </a:solidFill>
                 <a:latin typeface="Calibri"/>
               </a:rPr>
-              <a:t>Delivered orders only?</a:t>
+              <a:t>Finance's definition?</a:t>
             </a:r>
           </a:p>
         </p:txBody>
@@ -6346,7 +6346,7 @@
         </p:nvSpPr>
         <p:spPr>
           <a:xfrm>
-            <a:off x="4724019" y="5833872"/>
+            <a:off x="4664868" y="5833872"/>
             <a:ext cx="365760" cy="251205"/>
           </a:xfrm>
           <a:prstGeom prst="rect">
@@ -6381,7 +6381,7 @@
         </p:nvSpPr>
         <p:spPr>
           <a:xfrm>
-            <a:off x="5108067" y="5870448"/>
+            <a:off x="5048916" y="5870448"/>
             <a:ext cx="1484185" cy="185166"/>
           </a:xfrm>
           <a:prstGeom prst="rect">
@@ -7486,7 +7486,7 @@
         <p:spPr>
           <a:xfrm>
             <a:off x="2127694" y="6437376"/>
-            <a:ext cx="1286446" cy="152146"/>
+            <a:ext cx="1240440" cy="152146"/>
           </a:xfrm>
           <a:prstGeom prst="rect">
             <a:avLst/>
@@ -7507,7 +7507,7 @@
                 </a:solidFill>
                 <a:latin typeface="Calibri"/>
               </a:rPr>
-              <a:t>Delivered orders only?</a:t>
+              <a:t>Finance's definition?</a:t>
             </a:r>
           </a:p>
         </p:txBody>
@@ -7520,7 +7520,7 @@
         </p:nvSpPr>
         <p:spPr>
           <a:xfrm>
-            <a:off x="3505580" y="6492240"/>
+            <a:off x="3459575" y="6492240"/>
             <a:ext cx="64008" cy="64008"/>
           </a:xfrm>
           <a:prstGeom prst="ellipse">
@@ -7564,7 +7564,7 @@
         </p:nvSpPr>
         <p:spPr>
           <a:xfrm>
-            <a:off x="3615308" y="6437376"/>
+            <a:off x="3569303" y="6437376"/>
             <a:ext cx="1286446" cy="152146"/>
           </a:xfrm>
           <a:prstGeom prst="rect">
@@ -8391,7 +8391,7 @@
         <p:spPr>
           <a:xfrm>
             <a:off x="2127694" y="6437376"/>
-            <a:ext cx="1286446" cy="152146"/>
+            <a:ext cx="1240440" cy="152146"/>
           </a:xfrm>
           <a:prstGeom prst="rect">
             <a:avLst/>
@@ -8412,7 +8412,7 @@
                 </a:solidFill>
                 <a:latin typeface="Calibri"/>
               </a:rPr>
-              <a:t>Delivered orders only?</a:t>
+              <a:t>Finance's definition?</a:t>
             </a:r>
           </a:p>
         </p:txBody>
@@ -8425,7 +8425,7 @@
         </p:nvSpPr>
         <p:spPr>
           <a:xfrm>
-            <a:off x="3505580" y="6492240"/>
+            <a:off x="3459575" y="6492240"/>
             <a:ext cx="64008" cy="64008"/>
           </a:xfrm>
           <a:prstGeom prst="ellipse">
@@ -8469,7 +8469,7 @@
         </p:nvSpPr>
         <p:spPr>
           <a:xfrm>
-            <a:off x="3615308" y="6437376"/>
+            <a:off x="3569303" y="6437376"/>
             <a:ext cx="1286446" cy="152146"/>
           </a:xfrm>
           <a:prstGeom prst="rect">
@@ -9753,7 +9753,7 @@
         <p:spPr>
           <a:xfrm>
             <a:off x="2127694" y="6437376"/>
-            <a:ext cx="1286446" cy="152146"/>
+            <a:ext cx="1240440" cy="152146"/>
           </a:xfrm>
           <a:prstGeom prst="rect">
             <a:avLst/>
@@ -9774,7 +9774,7 @@
                 </a:solidFill>
                 <a:latin typeface="Calibri"/>
               </a:rPr>
-              <a:t>Delivered orders only?</a:t>
+              <a:t>Finance's definition?</a:t>
             </a:r>
           </a:p>
         </p:txBody>
@@ -9787,7 +9787,7 @@
         </p:nvSpPr>
         <p:spPr>
           <a:xfrm>
-            <a:off x="3505580" y="6492240"/>
+            <a:off x="3459575" y="6492240"/>
             <a:ext cx="64008" cy="64008"/>
           </a:xfrm>
           <a:prstGeom prst="ellipse">
@@ -9831,7 +9831,7 @@
         </p:nvSpPr>
         <p:spPr>
           <a:xfrm>
-            <a:off x="3615308" y="6437376"/>
+            <a:off x="3569303" y="6437376"/>
             <a:ext cx="1286446" cy="152146"/>
           </a:xfrm>
           <a:prstGeom prst="rect">
@@ -10427,7 +10427,7 @@
         <p:spPr>
           <a:xfrm>
             <a:off x="2127694" y="6437376"/>
-            <a:ext cx="1286446" cy="152146"/>
+            <a:ext cx="1240440" cy="152146"/>
           </a:xfrm>
           <a:prstGeom prst="rect">
             <a:avLst/>
@@ -10448,7 +10448,7 @@
                 </a:solidFill>
                 <a:latin typeface="Calibri"/>
               </a:rPr>
-              <a:t>Delivered orders only?</a:t>
+              <a:t>Finance's definition?</a:t>
             </a:r>
           </a:p>
         </p:txBody>
@@ -10461,7 +10461,7 @@
         </p:nvSpPr>
         <p:spPr>
           <a:xfrm>
-            <a:off x="3505580" y="6492240"/>
+            <a:off x="3459575" y="6492240"/>
             <a:ext cx="64008" cy="64008"/>
           </a:xfrm>
           <a:prstGeom prst="ellipse">
@@ -10505,7 +10505,7 @@
         </p:nvSpPr>
         <p:spPr>
           <a:xfrm>
-            <a:off x="3615308" y="6437376"/>
+            <a:off x="3569303" y="6437376"/>
             <a:ext cx="1286446" cy="152146"/>
           </a:xfrm>
           <a:prstGeom prst="rect">
@@ -11658,7 +11658,7 @@
         <p:spPr>
           <a:xfrm>
             <a:off x="2127694" y="6437376"/>
-            <a:ext cx="1286446" cy="152146"/>
+            <a:ext cx="1240440" cy="152146"/>
           </a:xfrm>
           <a:prstGeom prst="rect">
             <a:avLst/>
@@ -11679,7 +11679,7 @@
                 </a:solidFill>
                 <a:latin typeface="Calibri"/>
               </a:rPr>
-              <a:t>Delivered orders only?</a:t>
+              <a:t>Finance's definition?</a:t>
             </a:r>
           </a:p>
         </p:txBody>
@@ -11692,7 +11692,7 @@
         </p:nvSpPr>
         <p:spPr>
           <a:xfrm>
-            <a:off x="3505580" y="6492240"/>
+            <a:off x="3459575" y="6492240"/>
             <a:ext cx="64008" cy="64008"/>
           </a:xfrm>
           <a:prstGeom prst="ellipse">
@@ -11736,7 +11736,7 @@
         </p:nvSpPr>
         <p:spPr>
           <a:xfrm>
-            <a:off x="3615308" y="6437376"/>
+            <a:off x="3569303" y="6437376"/>
             <a:ext cx="1286446" cy="152146"/>
           </a:xfrm>
           <a:prstGeom prst="rect">
@@ -12229,7 +12229,7 @@
         <p:spPr>
           <a:xfrm>
             <a:off x="2127694" y="6437376"/>
-            <a:ext cx="1286446" cy="152146"/>
+            <a:ext cx="1240440" cy="152146"/>
           </a:xfrm>
           <a:prstGeom prst="rect">
             <a:avLst/>
@@ -12250,7 +12250,7 @@
                 </a:solidFill>
                 <a:latin typeface="Calibri"/>
               </a:rPr>
-              <a:t>Delivered orders only?</a:t>
+              <a:t>Finance's definition?</a:t>
             </a:r>
           </a:p>
         </p:txBody>
@@ -12263,7 +12263,7 @@
         </p:nvSpPr>
         <p:spPr>
           <a:xfrm>
-            <a:off x="3505580" y="6492240"/>
+            <a:off x="3459575" y="6492240"/>
             <a:ext cx="64008" cy="64008"/>
           </a:xfrm>
           <a:prstGeom prst="ellipse">
@@ -12307,7 +12307,7 @@
         </p:nvSpPr>
         <p:spPr>
           <a:xfrm>
-            <a:off x="3615308" y="6437376"/>
+            <a:off x="3569303" y="6437376"/>
             <a:ext cx="1286446" cy="152146"/>
           </a:xfrm>
           <a:prstGeom prst="rect">
@@ -12846,7 +12846,7 @@
         <p:spPr>
           <a:xfrm>
             <a:off x="2127694" y="6437376"/>
-            <a:ext cx="1286446" cy="152146"/>
+            <a:ext cx="1240440" cy="152146"/>
           </a:xfrm>
           <a:prstGeom prst="rect">
             <a:avLst/>
@@ -12867,7 +12867,7 @@
                 </a:solidFill>
                 <a:latin typeface="Calibri"/>
               </a:rPr>
-              <a:t>Delivered orders only?</a:t>
+              <a:t>Finance's definition?</a:t>
             </a:r>
           </a:p>
         </p:txBody>
@@ -12880,7 +12880,7 @@
         </p:nvSpPr>
         <p:spPr>
           <a:xfrm>
-            <a:off x="3505580" y="6492240"/>
+            <a:off x="3459575" y="6492240"/>
             <a:ext cx="64008" cy="64008"/>
           </a:xfrm>
           <a:prstGeom prst="ellipse">
@@ -12924,7 +12924,7 @@
         </p:nvSpPr>
         <p:spPr>
           <a:xfrm>
-            <a:off x="3615308" y="6437376"/>
+            <a:off x="3569303" y="6437376"/>
             <a:ext cx="1286446" cy="152146"/>
           </a:xfrm>
           <a:prstGeom prst="rect">
@@ -14043,7 +14043,7 @@
         <p:spPr>
           <a:xfrm>
             <a:off x="2127694" y="6437376"/>
-            <a:ext cx="1286446" cy="152146"/>
+            <a:ext cx="1240440" cy="152146"/>
           </a:xfrm>
           <a:prstGeom prst="rect">
             <a:avLst/>
@@ -14064,7 +14064,7 @@
                 </a:solidFill>
                 <a:latin typeface="Calibri"/>
               </a:rPr>
-              <a:t>Delivered orders only?</a:t>
+              <a:t>Finance's definition?</a:t>
             </a:r>
           </a:p>
         </p:txBody>
@@ -14077,7 +14077,7 @@
         </p:nvSpPr>
         <p:spPr>
           <a:xfrm>
-            <a:off x="3505580" y="6492240"/>
+            <a:off x="3459575" y="6492240"/>
             <a:ext cx="64008" cy="64008"/>
           </a:xfrm>
           <a:prstGeom prst="ellipse">
@@ -14121,7 +14121,7 @@
         </p:nvSpPr>
         <p:spPr>
           <a:xfrm>
-            <a:off x="3615308" y="6437376"/>
+            <a:off x="3569303" y="6437376"/>
             <a:ext cx="1286446" cy="152146"/>
           </a:xfrm>
           <a:prstGeom prst="rect">
@@ -14419,7 +14419,7 @@
                 </a:solidFill>
                 <a:latin typeface="Georgia"/>
               </a:rPr>
-              <a:t>Delivered orders only?</a:t>
+              <a:t>Finance's definition?</a:t>
             </a:r>
           </a:p>
         </p:txBody>
@@ -14454,7 +14454,7 @@
                 </a:solidFill>
                 <a:latin typeface="Calibri"/>
               </a:rPr>
-              <a:t>Does the Monday suite hold on Finance's definition, the orders that were delivered?</a:t>
+              <a:t>Does the Monday suite hold on Finance's definition of revenue?</a:t>
             </a:r>
           </a:p>
         </p:txBody>
@@ -14523,7 +14523,7 @@
         <p:spPr>
           <a:xfrm>
             <a:off x="2509759" y="5074920"/>
-            <a:ext cx="1668511" cy="310896"/>
+            <a:ext cx="1609295" cy="310896"/>
           </a:xfrm>
           <a:prstGeom prst="roundRect">
             <a:avLst>
@@ -14564,7 +14564,7 @@
                 </a:solidFill>
                 <a:latin typeface="Calibri"/>
               </a:rPr>
-              <a:t>Delivered orders only?</a:t>
+              <a:t>Finance's definition?</a:t>
             </a:r>
           </a:p>
         </p:txBody>
@@ -14577,7 +14577,7 @@
         </p:nvSpPr>
         <p:spPr>
           <a:xfrm>
-            <a:off x="4287998" y="5074920"/>
+            <a:off x="4228782" y="5074920"/>
             <a:ext cx="1668511" cy="310896"/>
           </a:xfrm>
           <a:prstGeom prst="roundRect">
@@ -15010,7 +15010,7 @@
                 </a:solidFill>
                 <a:latin typeface="Georgia"/>
               </a:rPr>
-              <a:t>"Finance counts the orders that reached the customer and stayed there. Run me the same suite on delivered orders, and tell me whether the story changes."</a:t>
+              <a:t>"Finance counts the orders that reached the customer and stayed there. Run me the same suite on that definition, and tell me whether the story changes."</a:t>
             </a:r>
           </a:p>
         </p:txBody>
@@ -15281,7 +15281,7 @@
         <p:spPr>
           <a:xfrm>
             <a:off x="694944" y="4501896"/>
-            <a:ext cx="1750710" cy="251205"/>
+            <a:ext cx="1750710" cy="465836"/>
           </a:xfrm>
           <a:prstGeom prst="rect">
             <a:avLst/>
@@ -15302,7 +15302,7 @@
                 </a:solidFill>
                 <a:latin typeface="Calibri"/>
               </a:rPr>
-              <a:t>The delivered book</a:t>
+              <a:t>On Finance's definition</a:t>
             </a:r>
           </a:p>
         </p:txBody>
@@ -15315,8 +15315,8 @@
         </p:nvSpPr>
         <p:spPr>
           <a:xfrm>
-            <a:off x="694944" y="4789678"/>
-            <a:ext cx="1750710" cy="696976"/>
+            <a:off x="694944" y="5004308"/>
+            <a:ext cx="1750710" cy="531876"/>
           </a:xfrm>
           <a:prstGeom prst="rect">
             <a:avLst/>
@@ -15337,7 +15337,7 @@
                 </a:solidFill>
                 <a:latin typeface="Calibri"/>
               </a:rPr>
-              <a:t>Orders, customers and rupees per quarter, on Finance's definition. This afternoon.</a:t>
+              <a:t>Orders, customers and rupees per quarter. This afternoon.</a:t>
             </a:r>
           </a:p>
         </p:txBody>
@@ -16292,7 +16292,7 @@
         <p:spPr>
           <a:xfrm>
             <a:off x="2127694" y="6437376"/>
-            <a:ext cx="1286446" cy="152146"/>
+            <a:ext cx="1240440" cy="152146"/>
           </a:xfrm>
           <a:prstGeom prst="rect">
             <a:avLst/>
@@ -16313,7 +16313,7 @@
                 </a:solidFill>
                 <a:latin typeface="Calibri"/>
               </a:rPr>
-              <a:t>Delivered orders only?</a:t>
+              <a:t>Finance's definition?</a:t>
             </a:r>
           </a:p>
         </p:txBody>
@@ -16326,7 +16326,7 @@
         </p:nvSpPr>
         <p:spPr>
           <a:xfrm>
-            <a:off x="3505580" y="6492240"/>
+            <a:off x="3459575" y="6492240"/>
             <a:ext cx="64008" cy="64008"/>
           </a:xfrm>
           <a:prstGeom prst="ellipse">
@@ -16370,7 +16370,7 @@
         </p:nvSpPr>
         <p:spPr>
           <a:xfrm>
-            <a:off x="3615308" y="6437376"/>
+            <a:off x="3569303" y="6437376"/>
             <a:ext cx="1286446" cy="152146"/>
           </a:xfrm>
           <a:prstGeom prst="rect">
@@ -17107,7 +17107,7 @@
         <p:spPr>
           <a:xfrm>
             <a:off x="2127694" y="6437376"/>
-            <a:ext cx="1286446" cy="152146"/>
+            <a:ext cx="1240440" cy="152146"/>
           </a:xfrm>
           <a:prstGeom prst="rect">
             <a:avLst/>
@@ -17128,7 +17128,7 @@
                 </a:solidFill>
                 <a:latin typeface="Calibri"/>
               </a:rPr>
-              <a:t>Delivered orders only?</a:t>
+              <a:t>Finance's definition?</a:t>
             </a:r>
           </a:p>
         </p:txBody>
@@ -17141,7 +17141,7 @@
         </p:nvSpPr>
         <p:spPr>
           <a:xfrm>
-            <a:off x="3505580" y="6492240"/>
+            <a:off x="3459575" y="6492240"/>
             <a:ext cx="64008" cy="64008"/>
           </a:xfrm>
           <a:prstGeom prst="ellipse">
@@ -17185,7 +17185,7 @@
         </p:nvSpPr>
         <p:spPr>
           <a:xfrm>
-            <a:off x="3615308" y="6437376"/>
+            <a:off x="3569303" y="6437376"/>
             <a:ext cx="1286446" cy="152146"/>
           </a:xfrm>
           <a:prstGeom prst="rect">
@@ -17448,7 +17448,7 @@
                 </a:solidFill>
                 <a:latin typeface="Georgia"/>
               </a:rPr>
-              <a:t>Delivered only, named counts, numeric, ordered</a:t>
+              <a:t>One stated filter, named counts, numeric, ordered</a:t>
             </a:r>
           </a:p>
         </p:txBody>
@@ -17483,7 +17483,7 @@
                 </a:solidFill>
                 <a:latin typeface="Calibri"/>
               </a:rPr>
-              <a:t>Which rules does the delivered suite have to keep, whatever the numbers turn out to be?</a:t>
+              <a:t>Which rules does the suite keep on Finance's definition, whatever the numbers turn out to be?</a:t>
             </a:r>
           </a:p>
         </p:txBody>
@@ -17675,7 +17675,7 @@
                 </a:solidFill>
                 <a:latin typeface="Calibri"/>
               </a:rPr>
-              <a:t>Delivered only</a:t>
+              <a:t>One filter, stated first</a:t>
             </a:r>
           </a:p>
         </p:txBody>
@@ -17710,7 +17710,7 @@
                 </a:solidFill>
                 <a:latin typeface="Calibri"/>
               </a:rPr>
-              <a:t>A filter on the order's status keeps orders that reached the customer and stayed.</a:t>
+              <a:t>One filter keeps only the orders that reached the customer and stayed there.</a:t>
             </a:r>
           </a:p>
         </p:txBody>
@@ -18534,7 +18534,7 @@
         <p:spPr>
           <a:xfrm>
             <a:off x="2127694" y="6437376"/>
-            <a:ext cx="1286446" cy="152146"/>
+            <a:ext cx="1240440" cy="152146"/>
           </a:xfrm>
           <a:prstGeom prst="rect">
             <a:avLst/>
@@ -18555,7 +18555,7 @@
                 </a:solidFill>
                 <a:latin typeface="Calibri"/>
               </a:rPr>
-              <a:t>Delivered orders only?</a:t>
+              <a:t>Finance's definition?</a:t>
             </a:r>
           </a:p>
         </p:txBody>
@@ -18568,7 +18568,7 @@
         </p:nvSpPr>
         <p:spPr>
           <a:xfrm>
-            <a:off x="3505580" y="6492240"/>
+            <a:off x="3459575" y="6492240"/>
             <a:ext cx="64008" cy="64008"/>
           </a:xfrm>
           <a:prstGeom prst="ellipse">
@@ -18612,7 +18612,7 @@
         </p:nvSpPr>
         <p:spPr>
           <a:xfrm>
-            <a:off x="3615308" y="6437376"/>
+            <a:off x="3569303" y="6437376"/>
             <a:ext cx="1286446" cy="152146"/>
           </a:xfrm>
           <a:prstGeom prst="rect">
@@ -19496,7 +19496,7 @@
         <p:spPr>
           <a:xfrm>
             <a:off x="2127694" y="6437376"/>
-            <a:ext cx="1286446" cy="152146"/>
+            <a:ext cx="1240440" cy="152146"/>
           </a:xfrm>
           <a:prstGeom prst="rect">
             <a:avLst/>
@@ -19517,7 +19517,7 @@
                 </a:solidFill>
                 <a:latin typeface="Calibri"/>
               </a:rPr>
-              <a:t>Delivered orders only?</a:t>
+              <a:t>Finance's definition?</a:t>
             </a:r>
           </a:p>
         </p:txBody>
@@ -19530,7 +19530,7 @@
         </p:nvSpPr>
         <p:spPr>
           <a:xfrm>
-            <a:off x="3505580" y="6492240"/>
+            <a:off x="3459575" y="6492240"/>
             <a:ext cx="64008" cy="64008"/>
           </a:xfrm>
           <a:prstGeom prst="ellipse">
@@ -19574,7 +19574,7 @@
         </p:nvSpPr>
         <p:spPr>
           <a:xfrm>
-            <a:off x="3615308" y="6437376"/>
+            <a:off x="3569303" y="6437376"/>
             <a:ext cx="1286446" cy="152146"/>
           </a:xfrm>
           <a:prstGeom prst="rect">
@@ -20412,7 +20412,7 @@
         <p:spPr>
           <a:xfrm>
             <a:off x="2127694" y="6437376"/>
-            <a:ext cx="1286446" cy="152146"/>
+            <a:ext cx="1240440" cy="152146"/>
           </a:xfrm>
           <a:prstGeom prst="rect">
             <a:avLst/>
@@ -20433,7 +20433,7 @@
                 </a:solidFill>
                 <a:latin typeface="Calibri"/>
               </a:rPr>
-              <a:t>Delivered orders only?</a:t>
+              <a:t>Finance's definition?</a:t>
             </a:r>
           </a:p>
         </p:txBody>
@@ -20446,7 +20446,7 @@
         </p:nvSpPr>
         <p:spPr>
           <a:xfrm>
-            <a:off x="3505580" y="6492240"/>
+            <a:off x="3459575" y="6492240"/>
             <a:ext cx="64008" cy="64008"/>
           </a:xfrm>
           <a:prstGeom prst="ellipse">
@@ -20490,7 +20490,7 @@
         </p:nvSpPr>
         <p:spPr>
           <a:xfrm>
-            <a:off x="3615308" y="6437376"/>
+            <a:off x="3569303" y="6437376"/>
             <a:ext cx="1286446" cy="152146"/>
           </a:xfrm>
           <a:prstGeom prst="rect">
@@ -21203,7 +21203,7 @@
         <p:spPr>
           <a:xfrm>
             <a:off x="2127694" y="6437376"/>
-            <a:ext cx="1286446" cy="152146"/>
+            <a:ext cx="1240440" cy="152146"/>
           </a:xfrm>
           <a:prstGeom prst="rect">
             <a:avLst/>
@@ -21224,7 +21224,7 @@
                 </a:solidFill>
                 <a:latin typeface="Calibri"/>
               </a:rPr>
-              <a:t>Delivered orders only?</a:t>
+              <a:t>Finance's definition?</a:t>
             </a:r>
           </a:p>
         </p:txBody>
@@ -21237,7 +21237,7 @@
         </p:nvSpPr>
         <p:spPr>
           <a:xfrm>
-            <a:off x="3505580" y="6492240"/>
+            <a:off x="3459575" y="6492240"/>
             <a:ext cx="64008" cy="64008"/>
           </a:xfrm>
           <a:prstGeom prst="ellipse">
@@ -21281,7 +21281,7 @@
         </p:nvSpPr>
         <p:spPr>
           <a:xfrm>
-            <a:off x="3615308" y="6437376"/>
+            <a:off x="3569303" y="6437376"/>
             <a:ext cx="1286446" cy="152146"/>
           </a:xfrm>
           <a:prstGeom prst="rect">
@@ -22274,7 +22274,7 @@
         <p:spPr>
           <a:xfrm>
             <a:off x="2127694" y="6437376"/>
-            <a:ext cx="1286446" cy="152146"/>
+            <a:ext cx="1240440" cy="152146"/>
           </a:xfrm>
           <a:prstGeom prst="rect">
             <a:avLst/>
@@ -22295,7 +22295,7 @@
                 </a:solidFill>
                 <a:latin typeface="Calibri"/>
               </a:rPr>
-              <a:t>Delivered orders only?</a:t>
+              <a:t>Finance's definition?</a:t>
             </a:r>
           </a:p>
         </p:txBody>
@@ -22308,7 +22308,7 @@
         </p:nvSpPr>
         <p:spPr>
           <a:xfrm>
-            <a:off x="3505580" y="6492240"/>
+            <a:off x="3459575" y="6492240"/>
             <a:ext cx="64008" cy="64008"/>
           </a:xfrm>
           <a:prstGeom prst="ellipse">
@@ -22352,7 +22352,7 @@
         </p:nvSpPr>
         <p:spPr>
           <a:xfrm>
-            <a:off x="3615308" y="6437376"/>
+            <a:off x="3569303" y="6437376"/>
             <a:ext cx="1286446" cy="152146"/>
           </a:xfrm>
           <a:prstGeom prst="rect">
@@ -22754,7 +22754,7 @@
         <p:spPr>
           <a:xfrm>
             <a:off x="2509759" y="5074920"/>
-            <a:ext cx="1668511" cy="310896"/>
+            <a:ext cx="1609295" cy="310896"/>
           </a:xfrm>
           <a:prstGeom prst="roundRect">
             <a:avLst>
@@ -22795,7 +22795,7 @@
                 </a:solidFill>
                 <a:latin typeface="Calibri"/>
               </a:rPr>
-              <a:t>Delivered orders only?</a:t>
+              <a:t>Finance's definition?</a:t>
             </a:r>
           </a:p>
         </p:txBody>
@@ -22808,7 +22808,7 @@
         </p:nvSpPr>
         <p:spPr>
           <a:xfrm>
-            <a:off x="4287998" y="5074920"/>
+            <a:off x="4228782" y="5074920"/>
             <a:ext cx="1668511" cy="310896"/>
           </a:xfrm>
           <a:prstGeom prst="roundRect">
@@ -24054,7 +24054,7 @@
         <p:spPr>
           <a:xfrm>
             <a:off x="2127694" y="6437376"/>
-            <a:ext cx="1286446" cy="152146"/>
+            <a:ext cx="1240440" cy="152146"/>
           </a:xfrm>
           <a:prstGeom prst="rect">
             <a:avLst/>
@@ -24075,7 +24075,7 @@
                 </a:solidFill>
                 <a:latin typeface="Calibri"/>
               </a:rPr>
-              <a:t>Delivered orders only?</a:t>
+              <a:t>Finance's definition?</a:t>
             </a:r>
           </a:p>
         </p:txBody>
@@ -24088,7 +24088,7 @@
         </p:nvSpPr>
         <p:spPr>
           <a:xfrm>
-            <a:off x="3505580" y="6492240"/>
+            <a:off x="3459575" y="6492240"/>
             <a:ext cx="64008" cy="64008"/>
           </a:xfrm>
           <a:prstGeom prst="ellipse">
@@ -24132,7 +24132,7 @@
         </p:nvSpPr>
         <p:spPr>
           <a:xfrm>
-            <a:off x="3615308" y="6437376"/>
+            <a:off x="3569303" y="6437376"/>
             <a:ext cx="1286446" cy="152146"/>
           </a:xfrm>
           <a:prstGeom prst="rect">
@@ -24915,7 +24915,7 @@
         <p:spPr>
           <a:xfrm>
             <a:off x="2127694" y="6437376"/>
-            <a:ext cx="1286446" cy="152146"/>
+            <a:ext cx="1240440" cy="152146"/>
           </a:xfrm>
           <a:prstGeom prst="rect">
             <a:avLst/>
@@ -24936,7 +24936,7 @@
                 </a:solidFill>
                 <a:latin typeface="Calibri"/>
               </a:rPr>
-              <a:t>Delivered orders only?</a:t>
+              <a:t>Finance's definition?</a:t>
             </a:r>
           </a:p>
         </p:txBody>
@@ -24949,7 +24949,7 @@
         </p:nvSpPr>
         <p:spPr>
           <a:xfrm>
-            <a:off x="3505580" y="6492240"/>
+            <a:off x="3459575" y="6492240"/>
             <a:ext cx="64008" cy="64008"/>
           </a:xfrm>
           <a:prstGeom prst="ellipse">
@@ -24993,7 +24993,7 @@
         </p:nvSpPr>
         <p:spPr>
           <a:xfrm>
-            <a:off x="3615308" y="6437376"/>
+            <a:off x="3569303" y="6437376"/>
             <a:ext cx="1286446" cy="152146"/>
           </a:xfrm>
           <a:prstGeom prst="rect">
@@ -25899,7 +25899,7 @@
         <p:spPr>
           <a:xfrm>
             <a:off x="2127694" y="6437376"/>
-            <a:ext cx="1286446" cy="152146"/>
+            <a:ext cx="1240440" cy="152146"/>
           </a:xfrm>
           <a:prstGeom prst="rect">
             <a:avLst/>
@@ -25920,7 +25920,7 @@
                 </a:solidFill>
                 <a:latin typeface="Calibri"/>
               </a:rPr>
-              <a:t>Delivered orders only?</a:t>
+              <a:t>Finance's definition?</a:t>
             </a:r>
           </a:p>
         </p:txBody>
@@ -25933,7 +25933,7 @@
         </p:nvSpPr>
         <p:spPr>
           <a:xfrm>
-            <a:off x="3505580" y="6492240"/>
+            <a:off x="3459575" y="6492240"/>
             <a:ext cx="64008" cy="64008"/>
           </a:xfrm>
           <a:prstGeom prst="ellipse">
@@ -25977,7 +25977,7 @@
         </p:nvSpPr>
         <p:spPr>
           <a:xfrm>
-            <a:off x="3615308" y="6437376"/>
+            <a:off x="3569303" y="6437376"/>
             <a:ext cx="1286446" cy="152146"/>
           </a:xfrm>
           <a:prstGeom prst="rect">
@@ -26596,7 +26596,7 @@
         <p:spPr>
           <a:xfrm>
             <a:off x="2127694" y="6437376"/>
-            <a:ext cx="1286446" cy="152146"/>
+            <a:ext cx="1240440" cy="152146"/>
           </a:xfrm>
           <a:prstGeom prst="rect">
             <a:avLst/>
@@ -26617,7 +26617,7 @@
                 </a:solidFill>
                 <a:latin typeface="Calibri"/>
               </a:rPr>
-              <a:t>Delivered orders only?</a:t>
+              <a:t>Finance's definition?</a:t>
             </a:r>
           </a:p>
         </p:txBody>
@@ -26630,7 +26630,7 @@
         </p:nvSpPr>
         <p:spPr>
           <a:xfrm>
-            <a:off x="3505580" y="6492240"/>
+            <a:off x="3459575" y="6492240"/>
             <a:ext cx="64008" cy="64008"/>
           </a:xfrm>
           <a:prstGeom prst="ellipse">
@@ -26674,7 +26674,7 @@
         </p:nvSpPr>
         <p:spPr>
           <a:xfrm>
-            <a:off x="3615308" y="6437376"/>
+            <a:off x="3569303" y="6437376"/>
             <a:ext cx="1286446" cy="152146"/>
           </a:xfrm>
           <a:prstGeom prst="rect">
@@ -27076,7 +27076,7 @@
         <p:spPr>
           <a:xfrm>
             <a:off x="2509759" y="5074920"/>
-            <a:ext cx="1668511" cy="310896"/>
+            <a:ext cx="1609295" cy="310896"/>
           </a:xfrm>
           <a:prstGeom prst="roundRect">
             <a:avLst>
@@ -27117,7 +27117,7 @@
                 </a:solidFill>
                 <a:latin typeface="Calibri"/>
               </a:rPr>
-              <a:t>Delivered orders only?</a:t>
+              <a:t>Finance's definition?</a:t>
             </a:r>
           </a:p>
         </p:txBody>
@@ -27130,7 +27130,7 @@
         </p:nvSpPr>
         <p:spPr>
           <a:xfrm>
-            <a:off x="4287998" y="5074920"/>
+            <a:off x="4228782" y="5074920"/>
             <a:ext cx="1668511" cy="310896"/>
           </a:xfrm>
           <a:prstGeom prst="roundRect">
@@ -28822,7 +28822,7 @@
         <p:spPr>
           <a:xfrm>
             <a:off x="2127694" y="6437376"/>
-            <a:ext cx="1286446" cy="152146"/>
+            <a:ext cx="1240440" cy="152146"/>
           </a:xfrm>
           <a:prstGeom prst="rect">
             <a:avLst/>
@@ -28843,7 +28843,7 @@
                 </a:solidFill>
                 <a:latin typeface="Calibri"/>
               </a:rPr>
-              <a:t>Delivered orders only?</a:t>
+              <a:t>Finance's definition?</a:t>
             </a:r>
           </a:p>
         </p:txBody>
@@ -28856,7 +28856,7 @@
         </p:nvSpPr>
         <p:spPr>
           <a:xfrm>
-            <a:off x="3505580" y="6492240"/>
+            <a:off x="3459575" y="6492240"/>
             <a:ext cx="64008" cy="64008"/>
           </a:xfrm>
           <a:prstGeom prst="ellipse">
@@ -28900,7 +28900,7 @@
         </p:nvSpPr>
         <p:spPr>
           <a:xfrm>
-            <a:off x="3615308" y="6437376"/>
+            <a:off x="3569303" y="6437376"/>
             <a:ext cx="1286446" cy="152146"/>
           </a:xfrm>
           <a:prstGeom prst="rect">
@@ -30022,7 +30022,7 @@
         <p:spPr>
           <a:xfrm>
             <a:off x="2127694" y="6437376"/>
-            <a:ext cx="1286446" cy="152146"/>
+            <a:ext cx="1240440" cy="152146"/>
           </a:xfrm>
           <a:prstGeom prst="rect">
             <a:avLst/>
@@ -30043,7 +30043,7 @@
                 </a:solidFill>
                 <a:latin typeface="Calibri"/>
               </a:rPr>
-              <a:t>Delivered orders only?</a:t>
+              <a:t>Finance's definition?</a:t>
             </a:r>
           </a:p>
         </p:txBody>
@@ -30056,7 +30056,7 @@
         </p:nvSpPr>
         <p:spPr>
           <a:xfrm>
-            <a:off x="3505580" y="6492240"/>
+            <a:off x="3459575" y="6492240"/>
             <a:ext cx="64008" cy="64008"/>
           </a:xfrm>
           <a:prstGeom prst="ellipse">
@@ -30100,7 +30100,7 @@
         </p:nvSpPr>
         <p:spPr>
           <a:xfrm>
-            <a:off x="3615308" y="6437376"/>
+            <a:off x="3569303" y="6437376"/>
             <a:ext cx="1286446" cy="152146"/>
           </a:xfrm>
           <a:prstGeom prst="rect">
@@ -30598,7 +30598,7 @@
         <p:spPr>
           <a:xfrm>
             <a:off x="2127694" y="6437376"/>
-            <a:ext cx="1286446" cy="152146"/>
+            <a:ext cx="1240440" cy="152146"/>
           </a:xfrm>
           <a:prstGeom prst="rect">
             <a:avLst/>
@@ -30619,7 +30619,7 @@
                 </a:solidFill>
                 <a:latin typeface="Calibri"/>
               </a:rPr>
-              <a:t>Delivered orders only?</a:t>
+              <a:t>Finance's definition?</a:t>
             </a:r>
           </a:p>
         </p:txBody>
@@ -30632,7 +30632,7 @@
         </p:nvSpPr>
         <p:spPr>
           <a:xfrm>
-            <a:off x="3505580" y="6492240"/>
+            <a:off x="3459575" y="6492240"/>
             <a:ext cx="64008" cy="64008"/>
           </a:xfrm>
           <a:prstGeom prst="ellipse">
@@ -30676,7 +30676,7 @@
         </p:nvSpPr>
         <p:spPr>
           <a:xfrm>
-            <a:off x="3615308" y="6437376"/>
+            <a:off x="3569303" y="6437376"/>
             <a:ext cx="1286446" cy="152146"/>
           </a:xfrm>
           <a:prstGeom prst="rect">
@@ -31726,7 +31726,7 @@
         <p:spPr>
           <a:xfrm>
             <a:off x="2127694" y="6437376"/>
-            <a:ext cx="1286446" cy="152146"/>
+            <a:ext cx="1240440" cy="152146"/>
           </a:xfrm>
           <a:prstGeom prst="rect">
             <a:avLst/>
@@ -31747,7 +31747,7 @@
                 </a:solidFill>
                 <a:latin typeface="Calibri"/>
               </a:rPr>
-              <a:t>Delivered orders only?</a:t>
+              <a:t>Finance's definition?</a:t>
             </a:r>
           </a:p>
         </p:txBody>
@@ -31760,7 +31760,7 @@
         </p:nvSpPr>
         <p:spPr>
           <a:xfrm>
-            <a:off x="3505580" y="6492240"/>
+            <a:off x="3459575" y="6492240"/>
             <a:ext cx="64008" cy="64008"/>
           </a:xfrm>
           <a:prstGeom prst="ellipse">
@@ -31804,7 +31804,7 @@
         </p:nvSpPr>
         <p:spPr>
           <a:xfrm>
-            <a:off x="3615308" y="6437376"/>
+            <a:off x="3569303" y="6437376"/>
             <a:ext cx="1286446" cy="152146"/>
           </a:xfrm>
           <a:prstGeom prst="rect">
@@ -32400,7 +32400,7 @@
         <p:spPr>
           <a:xfrm>
             <a:off x="2127694" y="6437376"/>
-            <a:ext cx="1286446" cy="152146"/>
+            <a:ext cx="1240440" cy="152146"/>
           </a:xfrm>
           <a:prstGeom prst="rect">
             <a:avLst/>
@@ -32421,7 +32421,7 @@
                 </a:solidFill>
                 <a:latin typeface="Calibri"/>
               </a:rPr>
-              <a:t>Delivered orders only?</a:t>
+              <a:t>Finance's definition?</a:t>
             </a:r>
           </a:p>
         </p:txBody>
@@ -32434,7 +32434,7 @@
         </p:nvSpPr>
         <p:spPr>
           <a:xfrm>
-            <a:off x="3505580" y="6492240"/>
+            <a:off x="3459575" y="6492240"/>
             <a:ext cx="64008" cy="64008"/>
           </a:xfrm>
           <a:prstGeom prst="ellipse">
@@ -32478,7 +32478,7 @@
         </p:nvSpPr>
         <p:spPr>
           <a:xfrm>
-            <a:off x="3615308" y="6437376"/>
+            <a:off x="3569303" y="6437376"/>
             <a:ext cx="1286446" cy="152146"/>
           </a:xfrm>
           <a:prstGeom prst="rect">
@@ -33369,7 +33369,7 @@
         <p:spPr>
           <a:xfrm>
             <a:off x="2127694" y="6437376"/>
-            <a:ext cx="1286446" cy="152146"/>
+            <a:ext cx="1240440" cy="152146"/>
           </a:xfrm>
           <a:prstGeom prst="rect">
             <a:avLst/>
@@ -33390,7 +33390,7 @@
                 </a:solidFill>
                 <a:latin typeface="Calibri"/>
               </a:rPr>
-              <a:t>Delivered orders only?</a:t>
+              <a:t>Finance's definition?</a:t>
             </a:r>
           </a:p>
         </p:txBody>
@@ -33403,7 +33403,7 @@
         </p:nvSpPr>
         <p:spPr>
           <a:xfrm>
-            <a:off x="3505580" y="6492240"/>
+            <a:off x="3459575" y="6492240"/>
             <a:ext cx="64008" cy="64008"/>
           </a:xfrm>
           <a:prstGeom prst="ellipse">
@@ -33447,7 +33447,7 @@
         </p:nvSpPr>
         <p:spPr>
           <a:xfrm>
-            <a:off x="3615308" y="6437376"/>
+            <a:off x="3569303" y="6437376"/>
             <a:ext cx="1286446" cy="152146"/>
           </a:xfrm>
           <a:prstGeom prst="rect">

--- a/content/W02/D1/slides/C2_W02_D01_half2_STUDENT.pptx
+++ b/content/W02/D1/slides/C2_W02_D01_half2_STUDENT.pptx
@@ -16155,7 +16155,7 @@
                 </a:solidFill>
                 <a:latin typeface="Calibri"/>
               </a:rPr>
-              <a:t>An ordered sample and the delivered book's fingerprint. In the lab.</a:t>
+              <a:t>A sample the rerun draws again, and the book's fingerprint. In the lab.</a:t>
             </a:r>
           </a:p>
         </p:txBody>
@@ -17448,7 +17448,7 @@
                 </a:solidFill>
                 <a:latin typeface="Georgia"/>
               </a:rPr>
-              <a:t>One stated filter, named counts, numeric, ordered</a:t>
+              <a:t>Four rules hold the case to the morning's habits</a:t>
             </a:r>
           </a:p>
         </p:txBody>
@@ -17497,7 +17497,7 @@
         <p:spPr>
           <a:xfrm>
             <a:off x="530352" y="1956816"/>
-            <a:ext cx="2645587" cy="2385568"/>
+            <a:ext cx="2645587" cy="2575560"/>
           </a:xfrm>
           <a:prstGeom prst="roundRect">
             <a:avLst>
@@ -17724,7 +17724,7 @@
         <p:spPr>
           <a:xfrm>
             <a:off x="3358819" y="1956816"/>
-            <a:ext cx="2645587" cy="2385568"/>
+            <a:ext cx="2645587" cy="2575560"/>
           </a:xfrm>
           <a:prstGeom prst="roundRect">
             <a:avLst>
@@ -17916,7 +17916,7 @@
         <p:spPr>
           <a:xfrm>
             <a:off x="3559987" y="3534664"/>
-            <a:ext cx="2243251" cy="399796"/>
+            <a:ext cx="2243251" cy="581406"/>
           </a:xfrm>
           <a:prstGeom prst="rect">
             <a:avLst/>
@@ -17937,7 +17937,7 @@
                 </a:solidFill>
                 <a:latin typeface="Calibri"/>
               </a:rPr>
-              <a:t>Orders are rows; customers are counted once each.</a:t>
+              <a:t>Every count's name says what it counts, so no reader takes orders for customers.</a:t>
             </a:r>
           </a:p>
         </p:txBody>
@@ -17951,7 +17951,7 @@
         <p:spPr>
           <a:xfrm>
             <a:off x="6187287" y="1956816"/>
-            <a:ext cx="2645587" cy="2385568"/>
+            <a:ext cx="2645587" cy="2575560"/>
           </a:xfrm>
           <a:prstGeom prst="roundRect">
             <a:avLst>
@@ -18129,7 +18129,7 @@
                 </a:solidFill>
                 <a:latin typeface="Calibri"/>
               </a:rPr>
-              <a:t>Divided in numeric</a:t>
+              <a:t>Ratios that hold</a:t>
             </a:r>
           </a:p>
         </p:txBody>
@@ -18164,7 +18164,7 @@
                 </a:solidFill>
                 <a:latin typeface="Calibri"/>
               </a:rPr>
-              <a:t>Every ratio keeps its decimals and multiplies back to its orders.</a:t>
+              <a:t>Every ratio multiplies back to its orders, with its two counts printed beside it.</a:t>
             </a:r>
           </a:p>
         </p:txBody>
@@ -18178,7 +18178,7 @@
         <p:spPr>
           <a:xfrm>
             <a:off x="9015755" y="1956816"/>
-            <a:ext cx="2645587" cy="2385568"/>
+            <a:ext cx="2645587" cy="2575560"/>
           </a:xfrm>
           <a:prstGeom prst="roundRect">
             <a:avLst>
@@ -18362,7 +18362,7 @@
                 </a:solidFill>
                 <a:latin typeface="Calibri"/>
               </a:rPr>
-              <a:t>Ordered and fingerprinted</a:t>
+              <a:t>Repeated and fingerprinted</a:t>
             </a:r>
           </a:p>
         </p:txBody>
@@ -18376,7 +18376,7 @@
         <p:spPr>
           <a:xfrm>
             <a:off x="9216923" y="3534664"/>
-            <a:ext cx="2243251" cy="581406"/>
+            <a:ext cx="2243251" cy="763016"/>
           </a:xfrm>
           <a:prstGeom prst="rect">
             <a:avLst/>
@@ -18397,7 +18397,7 @@
                 </a:solidFill>
                 <a:latin typeface="Calibri"/>
               </a:rPr>
-              <a:t>The sample orders on a unique key, and the delivered book's fingerprint prints beside it.</a:t>
+              <a:t>The sample comes back the same on the analyst's rerun, and the book's fingerprint prints beside it.</a:t>
             </a:r>
           </a:p>
         </p:txBody>
